--- a/산출물/실전반/이론_오프라인/04회차/실전반_오프라인_04회차.pptx
+++ b/산출물/실전반/이론_오프라인/04회차/실전반_오프라인_04회차.pptx
@@ -30,6 +30,13 @@
     <p:sldId id="278" r:id="rId30"/>
     <p:sldId id="279" r:id="rId31"/>
     <p:sldId id="280" r:id="rId32"/>
+    <p:sldId id="281" r:id="rId33"/>
+    <p:sldId id="282" r:id="rId34"/>
+    <p:sldId id="283" r:id="rId35"/>
+    <p:sldId id="284" r:id="rId36"/>
+    <p:sldId id="285" r:id="rId37"/>
+    <p:sldId id="286" r:id="rId38"/>
+    <p:sldId id="287" r:id="rId39"/>
   </p:sldIdLst>
   <p:sldSz cx="12191695" cy="6858000" type="screen4x3"/>
   <p:notesSz cx="6858000" cy="9144000"/>
@@ -531,17 +538,17 @@
           </a:p>
           <a:p>
             <a:r>
-              <a:t>· 세 회차에 걸쳐 세운 설비 모델 · 조건표 · 작업 확인 카드 → 오늘은 그 근거를 읽고 일하는 에이전트가 점검 요청 초안을 쓴다</a:t>
-            </a:r>
-          </a:p>
-          <a:p>
-            <a:r>
-              <a:t>· 네 교시: 이론 50분 → 원인과 점검 순서 기능 → 설비 · 문서 · 부품 근거 연결 → 점검 요청 초안과 검증</a:t>
-            </a:r>
-          </a:p>
-          <a:p>
-            <a:r>
-              <a:t>· 이론은 온라인 4회차 교재의 장에서 오늘 실습에 쓰는 것만</a:t>
+              <a:t>· 앞서 세운 설비 모델 · 조건표 · 작업 확인 카드 → 오늘은 그 근거를 읽고 일하는 에이전트가 점검 요청 초안을 쓴다</a:t>
+            </a:r>
+          </a:p>
+          <a:p>
+            <a:r>
+              <a:t>· 오늘의 흐름: 이론 → 원인과 점검 순서 기능 → 설비 · 문서 · 부품 근거 연결 → 점검 요청 초안과 검증</a:t>
+            </a:r>
+          </a:p>
+          <a:p>
+            <a:r>
+              <a:t>· 이론은 온라인 과정과 같은 교재의 장에서 오늘 실습에 쓰는 것만</a:t>
             </a:r>
           </a:p>
           <a:p>
@@ -626,7 +633,7 @@
           </a:p>
           <a:p>
             <a:r>
-              <a:t>· 2교시 원인 · 점검 순서 기능이 이 고리를 만든다</a:t>
+              <a:t>· 실습의 원인 · 점검 순서 기능이 이 고리를 만든다</a:t>
             </a:r>
           </a:p>
           <a:p>
@@ -1006,7 +1013,7 @@
           </a:p>
           <a:p>
             <a:r>
-              <a:t>· 3교시에 그래프와 문서의 집계 구간이 다르거나 원문 절이 없는 경우를 가른다</a:t>
+              <a:t>· 실습에서 그래프와 문서의 집계 구간이 다르거나 원문 절이 없는 경우를 가른다</a:t>
             </a:r>
           </a:p>
           <a:p>
@@ -1476,7 +1483,7 @@
           </a:p>
           <a:p>
             <a:r>
-              <a:t>· 20초 생각 시간. 값은 수업용 사례(2교시 원인 · 점검 순서 실습과 같음)</a:t>
+              <a:t>· 20초 생각 시간. 값은 수업용 사례(이어지는 원인 · 점검 순서 실습과 같음)</a:t>
             </a:r>
           </a:p>
           <a:p>
@@ -1591,7 +1598,7 @@
           </a:p>
           <a:p>
             <a:r>
-              <a:t>· 4 점검 요청: 근거가 모자라면 멈추고, 실제 도구가 확인한 사실과 가설을 가른 초안 → 4교시</a:t>
+              <a:t>· 4 점검 요청: 근거가 모자라면 멈추고, 실제 도구가 확인한 사실과 가설을 가른 초안</a:t>
             </a:r>
           </a:p>
           <a:p>
@@ -1676,7 +1683,7 @@
           </a:p>
           <a:p>
             <a:r>
-              <a:t>· 4교시에 누락과 복수 원인 사례로 점검 요청 초안을 검증한다</a:t>
+              <a:t>· 실습에서 누락과 복수 원인 사례로 점검 요청 초안을 검증한다</a:t>
             </a:r>
           </a:p>
           <a:p>
@@ -1976,7 +1983,7 @@
           </a:p>
           <a:p>
             <a:r>
-              <a:t>[다음] 응용</a:t>
+              <a:t>[다음] 결과에서 호출로 거슬러 확인하기</a:t>
             </a:r>
           </a:p>
         </p:txBody>
@@ -2046,32 +2053,37 @@
           <a:lstStyle/>
           <a:p>
             <a:r>
-              <a:t>[짚을 곳] 왼쪽 단정한 초안 → 오른쪽 근거 있는 초안(강조) → 꼬리표</a:t>
-            </a:r>
-          </a:p>
-          <a:p>
-            <a:r>
-              <a:t>· 단정: 원인 확정, 근거는 유온 상승뿐, 핀 세척 작업지시를 냈다고 적음</a:t>
-            </a:r>
-          </a:p>
-          <a:p>
-            <a:r>
-              <a:t>· 유온 상승은 주변 온도 · 팬 구동에서도 → 함께 변한 값으로 원인을 정하지 않는다</a:t>
-            </a:r>
-          </a:p>
-          <a:p>
-            <a:r>
-              <a:t>· 핀 세척은 설비를 세우는 근본 조치, 설비보전팀장 승인 뒤 작업지시 → 권한을 넘음</a:t>
-            </a:r>
-          </a:p>
-          <a:p>
-            <a:r>
-              <a:t>· 근거 있는 초안: 대상 · 부품 · 관측 시각 · 기준에 맞는 이유(다른 두 후보 배제) · 확인 항목 · 상태(작업지시 아님)</a:t>
-            </a:r>
-          </a:p>
-          <a:p>
-            <a:r>
-              <a:t>[다음] 오늘의 실습과 남길 결과</a:t>
+              <a:t>[짚을 곳] 네 칸 왼쪽부터, 셋째 칸 강조</a:t>
+            </a:r>
+          </a:p>
+          <a:p>
+            <a:r>
+              <a:t>· 주장: 「46.2 %로 핀 오염 지지」</a:t>
+            </a:r>
+          </a:p>
+          <a:p>
+            <a:r>
+              <a:t>· 그 값을 준 호출: 11:13:18 원인 진단의 받음. 출력과 문장이 같은 뜻인가(단위 · 섞인 값)</a:t>
+            </a:r>
+          </a:p>
+          <a:p>
+            <a:r>
+              <a:t>· 호출의 입력: 설비 · 경보 번호가 이 경보와 같은가</a:t>
+            </a:r>
+          </a:p>
+          <a:p>
+            <a:r>
+              <a:t>· 관측 시각 · 원천: 어느 구간, 묵은 값은 아닌가. 조회 시각 ≠ 관측 시각</a:t>
+            </a:r>
+          </a:p>
+          <a:p>
+            <a:r>
+              <a:t>· 진행 설명은 의도를 읽는 보조 자료일 뿐</a:t>
+            </a:r>
+          </a:p>
+          <a:p>
+            <a:r>
+              <a:t>[다음] 응용</a:t>
             </a:r>
           </a:p>
         </p:txBody>
@@ -2141,32 +2153,407 @@
           <a:lstStyle/>
           <a:p>
             <a:r>
-              <a:t>[짚을 곳] 표 세 줄: 교시 → 실습 → 남길 결과, 강조한 4교시</a:t>
-            </a:r>
-          </a:p>
-          <a:p>
-            <a:r>
-              <a:t>· 2교시: 포털의 준비된 에이전트에서 실제 조회 도구와 근거를 확인, 로컬 제공 그래프 · 사례로 원인 후보와 근거를 읽는 기능. 오래된 값 · 표본 부족은 미확인으로</a:t>
-            </a:r>
-          </a:p>
-          <a:p>
-            <a:r>
-              <a:t>· 3교시: 제공 그래프의 설비 · 부품 · 증거와 매뉴얼 절을 점검 대상에 연결, 집계 구간이 다르거나 원문 절이 없는 경우를 확인해 해결된 사실과 추가 확인 조건을 나눈다</a:t>
-            </a:r>
-          </a:p>
-          <a:p>
-            <a:r>
-              <a:t>· 4교시: 대상 설비 · 부품, 관측 시각, 근거, 확인할 항목과 이유를 담은 초안. 누락과 복수 원인 사례로 가설을 확정으로 쓰지 않는지, 초안과 실제 작업지시를 구분해 저장</a:t>
-            </a:r>
-          </a:p>
-          <a:p>
-            <a:r>
-              <a:t>· 진행은 실습마다 핸즈온 가이드를 따른다. 다음 회차에 같은 근거 정리 방법으로 협의 안건을 만든다</a:t>
-            </a:r>
-          </a:p>
-          <a:p>
-            <a:r>
-              <a:t>[다음] 실습으로</a:t>
+              <a:t>[짚을 곳] 왼쪽 단정한 초안 → 오른쪽 근거 있는 초안(강조) → 꼬리표</a:t>
+            </a:r>
+          </a:p>
+          <a:p>
+            <a:r>
+              <a:t>· 단정: 원인 확정, 근거는 유온 상승뿐, 핀 세척 작업지시를 냈다고 적음</a:t>
+            </a:r>
+          </a:p>
+          <a:p>
+            <a:r>
+              <a:t>· 유온 상승은 주변 온도 · 팬 구동에서도 → 함께 변한 값으로 원인을 정하지 않는다</a:t>
+            </a:r>
+          </a:p>
+          <a:p>
+            <a:r>
+              <a:t>· 핀 세척은 설비를 세우는 근본 조치, 설비보전팀장 승인 뒤 작업지시 → 권한을 넘음</a:t>
+            </a:r>
+          </a:p>
+          <a:p>
+            <a:r>
+              <a:t>· 근거 있는 초안: 대상 · 부품 · 관측 시각 · 기준에 맞는 이유(다른 두 후보 배제) · 확인 항목 · 상태(작업지시 아님)</a:t>
+            </a:r>
+          </a:p>
+          <a:p>
+            <a:r>
+              <a:t>[다음] 쿨러 경보의 점검 요청으로 되짚는 근거와 경계</a:t>
+            </a:r>
+          </a:p>
+        </p:txBody>
+      </p:sp>
+      <p:sp>
+        <p:nvSpPr>
+          <p:cNvPr id="4" name="Slide Number Placeholder 3"/>
+          <p:cNvSpPr>
+            <a:spLocks noGrp="1"/>
+          </p:cNvSpPr>
+          <p:nvPr>
+            <p:ph type="sldNum" idx="5" sz="quarter"/>
+          </p:nvPr>
+        </p:nvSpPr>
+        <p:spPr/>
+      </p:sp>
+    </p:spTree>
+  </p:cSld>
+  <p:clrMapOvr>
+    <a:masterClrMapping/>
+  </p:clrMapOvr>
+</p:notes>
+</file>
+
+<file path=ppt/notesSlides/notesSlide26.xml><?xml version="1.0" encoding="utf-8"?>
+<p:notes xmlns:a="http://schemas.openxmlformats.org/drawingml/2006/main" xmlns:p="http://schemas.openxmlformats.org/presentationml/2006/main" xmlns:r="http://schemas.openxmlformats.org/officeDocument/2006/relationships">
+  <p:cSld>
+    <p:spTree>
+      <p:nvGrpSpPr>
+        <p:cNvPr id="1" name=""/>
+        <p:cNvGrpSpPr/>
+        <p:nvPr/>
+      </p:nvGrpSpPr>
+      <p:grpSpPr>
+        <a:xfrm>
+          <a:off x="0" y="0"/>
+          <a:ext cx="0" cy="0"/>
+          <a:chOff x="0" y="0"/>
+          <a:chExt cx="0" cy="0"/>
+        </a:xfrm>
+      </p:grpSpPr>
+      <p:sp>
+        <p:nvSpPr>
+          <p:cNvPr id="2" name="Slide Image Placeholder 1"/>
+          <p:cNvSpPr>
+            <a:spLocks noGrp="1"/>
+          </p:cNvSpPr>
+          <p:nvPr>
+            <p:ph type="sldImg" idx="2"/>
+          </p:nvPr>
+        </p:nvSpPr>
+        <p:spPr/>
+      </p:sp>
+      <p:sp>
+        <p:nvSpPr>
+          <p:cNvPr id="3" name="Notes Placeholder 2"/>
+          <p:cNvSpPr>
+            <a:spLocks noGrp="1"/>
+          </p:cNvSpPr>
+          <p:nvPr>
+            <p:ph type="body" idx="3" sz="quarter"/>
+          </p:nvPr>
+        </p:nvSpPr>
+        <p:spPr/>
+        <p:txBody>
+          <a:bodyPr/>
+          <a:lstStyle/>
+          <a:p>
+            <a:r>
+              <a:t>[짚을 곳] 표 다섯 줄: 왼쪽 물음 → 가운데 답이 놓인 자리 → 오른쪽 헷갈리기 쉬운 짝, 강조한 다섯째 줄</a:t>
+            </a:r>
+          </a:p>
+          <a:p>
+            <a:r>
+              <a:t>· 생각할 시간(약 20초): 가운데 열을 가리고 물음마다 먼저 답해 본다</a:t>
+            </a:r>
+          </a:p>
+          <a:p>
+            <a:r>
+              <a:t>· 활용: 같은 실행 구조라도 입력과 결과 판정 기준이 달라 이름만 바꿔 옮기지 못한다</a:t>
+            </a:r>
+          </a:p>
+          <a:p>
+            <a:r>
+              <a:t>· 순서: 늘 같은 순서는 워크플로로 고정, 결과를 보고 다음을 골라야 하는 자리만 에이전트</a:t>
+            </a:r>
+          </a:p>
+          <a:p>
+            <a:r>
+              <a:t>· 기준과 값: 70은 매뉴얼 기준, 잰 값은 46.2 %(11:13:18까지 30초 평균). 값마다 관측 시각, 기준마다 출처</a:t>
+            </a:r>
+          </a:p>
+          <a:p>
+            <a:r>
+              <a:t>· 신선도 = 끝이 묵었나, 표본 = 중간이 비었나. 어긋나면 판정하지 않고 보류</a:t>
+            </a:r>
+          </a:p>
+          <a:p>
+            <a:r>
+              <a:t>· 핀 오염은 기준에 맞은 가설. 확인 항목과 다른 후보를 함께 적고, 작업지시는 승인 뒤</a:t>
+            </a:r>
+          </a:p>
+          <a:p>
+            <a:r>
+              <a:t>[다음] 오늘 다룬 핵심 개념과 주요 용어 정리</a:t>
+            </a:r>
+          </a:p>
+        </p:txBody>
+      </p:sp>
+      <p:sp>
+        <p:nvSpPr>
+          <p:cNvPr id="4" name="Slide Number Placeholder 3"/>
+          <p:cNvSpPr>
+            <a:spLocks noGrp="1"/>
+          </p:cNvSpPr>
+          <p:nvPr>
+            <p:ph type="sldNum" idx="5" sz="quarter"/>
+          </p:nvPr>
+        </p:nvSpPr>
+        <p:spPr/>
+      </p:sp>
+    </p:spTree>
+  </p:cSld>
+  <p:clrMapOvr>
+    <a:masterClrMapping/>
+  </p:clrMapOvr>
+</p:notes>
+</file>
+
+<file path=ppt/notesSlides/notesSlide27.xml><?xml version="1.0" encoding="utf-8"?>
+<p:notes xmlns:a="http://schemas.openxmlformats.org/drawingml/2006/main" xmlns:p="http://schemas.openxmlformats.org/presentationml/2006/main" xmlns:r="http://schemas.openxmlformats.org/officeDocument/2006/relationships">
+  <p:cSld>
+    <p:spTree>
+      <p:nvGrpSpPr>
+        <p:cNvPr id="1" name=""/>
+        <p:cNvGrpSpPr/>
+        <p:nvPr/>
+      </p:nvGrpSpPr>
+      <p:grpSpPr>
+        <a:xfrm>
+          <a:off x="0" y="0"/>
+          <a:ext cx="0" cy="0"/>
+          <a:chOff x="0" y="0"/>
+          <a:chExt cx="0" cy="0"/>
+        </a:xfrm>
+      </p:grpSpPr>
+      <p:sp>
+        <p:nvSpPr>
+          <p:cNvPr id="2" name="Slide Image Placeholder 1"/>
+          <p:cNvSpPr>
+            <a:spLocks noGrp="1"/>
+          </p:cNvSpPr>
+          <p:nvPr>
+            <p:ph type="sldImg" idx="2"/>
+          </p:nvPr>
+        </p:nvSpPr>
+        <p:spPr/>
+      </p:sp>
+      <p:sp>
+        <p:nvSpPr>
+          <p:cNvPr id="3" name="Notes Placeholder 2"/>
+          <p:cNvSpPr>
+            <a:spLocks noGrp="1"/>
+          </p:cNvSpPr>
+          <p:nvPr>
+            <p:ph type="body" idx="3" sz="quarter"/>
+          </p:nvPr>
+        </p:nvSpPr>
+        <p:spPr/>
+        <p:txBody>
+          <a:bodyPr/>
+          <a:lstStyle/>
+          <a:p>
+            <a:r>
+              <a:t>[짚을 곳] 표 다섯 줄 위에서부터, 정식 명칭은 화면에 맡기고 뜻만</a:t>
+            </a:r>
+          </a:p>
+          <a:p>
+            <a:r>
+              <a:t>· LLM = 응답을 만드는 대규모 언어 모델, RAG = 검색한 자료를 답의 근거로 넣는 방식</a:t>
+            </a:r>
+          </a:p>
+          <a:p>
+            <a:r>
+              <a:t>· 에이전트 = 목표를 받아 도구 결과를 보며 다음 행동을 정하고 완료 · 멈춤 조건에서 끝내는 시스템. 실행 고리 = 해석 · 계획 · 도구 호출 · 관찰을 되풀이하다 종료하는 틀</a:t>
+            </a:r>
+          </a:p>
+          <a:p>
+            <a:r>
+              <a:t>· 신선도 = 값이 판단 시점에서 얼마나 묵었나, 표본 = 구간을 채울 만큼 값이 들어왔나</a:t>
+            </a:r>
+          </a:p>
+          <a:p>
+            <a:r>
+              <a:t>· 구조화 출력 = 다음 단계가 읽도록 항목 이름과 형식을 정해 둔 결과</a:t>
+            </a:r>
+          </a:p>
+          <a:p>
+            <a:r>
+              <a:t>[다음] Review Quiz</a:t>
+            </a:r>
+          </a:p>
+        </p:txBody>
+      </p:sp>
+      <p:sp>
+        <p:nvSpPr>
+          <p:cNvPr id="4" name="Slide Number Placeholder 3"/>
+          <p:cNvSpPr>
+            <a:spLocks noGrp="1"/>
+          </p:cNvSpPr>
+          <p:nvPr>
+            <p:ph type="sldNum" idx="5" sz="quarter"/>
+          </p:nvPr>
+        </p:nvSpPr>
+        <p:spPr/>
+      </p:sp>
+    </p:spTree>
+  </p:cSld>
+  <p:clrMapOvr>
+    <a:masterClrMapping/>
+  </p:clrMapOvr>
+</p:notes>
+</file>
+
+<file path=ppt/notesSlides/notesSlide28.xml><?xml version="1.0" encoding="utf-8"?>
+<p:notes xmlns:a="http://schemas.openxmlformats.org/drawingml/2006/main" xmlns:p="http://schemas.openxmlformats.org/presentationml/2006/main" xmlns:r="http://schemas.openxmlformats.org/officeDocument/2006/relationships">
+  <p:cSld>
+    <p:spTree>
+      <p:nvGrpSpPr>
+        <p:cNvPr id="1" name=""/>
+        <p:cNvGrpSpPr/>
+        <p:nvPr/>
+      </p:nvGrpSpPr>
+      <p:grpSpPr>
+        <a:xfrm>
+          <a:off x="0" y="0"/>
+          <a:ext cx="0" cy="0"/>
+          <a:chOff x="0" y="0"/>
+          <a:chExt cx="0" cy="0"/>
+        </a:xfrm>
+      </p:grpSpPr>
+      <p:sp>
+        <p:nvSpPr>
+          <p:cNvPr id="2" name="Slide Image Placeholder 1"/>
+          <p:cNvSpPr>
+            <a:spLocks noGrp="1"/>
+          </p:cNvSpPr>
+          <p:nvPr>
+            <p:ph type="sldImg" idx="2"/>
+          </p:nvPr>
+        </p:nvSpPr>
+        <p:spPr/>
+      </p:sp>
+      <p:sp>
+        <p:nvSpPr>
+          <p:cNvPr id="3" name="Notes Placeholder 2"/>
+          <p:cNvSpPr>
+            <a:spLocks noGrp="1"/>
+          </p:cNvSpPr>
+          <p:nvPr>
+            <p:ph type="body" idx="3" sz="quarter"/>
+          </p:nvPr>
+        </p:nvSpPr>
+        <p:spPr/>
+        <p:txBody>
+          <a:bodyPr/>
+          <a:lstStyle/>
+          <a:p>
+            <a:r>
+              <a:t>[짚을 곳] 퀴즈 간지 제목 → 부제</a:t>
+            </a:r>
+          </a:p>
+          <a:p>
+            <a:r>
+              <a:t>· 문항마다 먼저 가를 것: 근거의 문제인가, 근거 상태의 구분인가, 제출과 실행의 경계인가</a:t>
+            </a:r>
+          </a:p>
+          <a:p>
+            <a:r>
+              <a:t>· 세 문제를 다 푼 뒤 정답을 함께 본다</a:t>
+            </a:r>
+          </a:p>
+          <a:p>
+            <a:r>
+              <a:t>[다음] Quiz 1. 진행 설명만 남은 확인</a:t>
+            </a:r>
+          </a:p>
+        </p:txBody>
+      </p:sp>
+      <p:sp>
+        <p:nvSpPr>
+          <p:cNvPr id="4" name="Slide Number Placeholder 3"/>
+          <p:cNvSpPr>
+            <a:spLocks noGrp="1"/>
+          </p:cNvSpPr>
+          <p:nvPr>
+            <p:ph type="sldNum" idx="5" sz="quarter"/>
+          </p:nvPr>
+        </p:nvSpPr>
+        <p:spPr/>
+      </p:sp>
+    </p:spTree>
+  </p:cSld>
+  <p:clrMapOvr>
+    <a:masterClrMapping/>
+  </p:clrMapOvr>
+</p:notes>
+</file>
+
+<file path=ppt/notesSlides/notesSlide29.xml><?xml version="1.0" encoding="utf-8"?>
+<p:notes xmlns:a="http://schemas.openxmlformats.org/drawingml/2006/main" xmlns:p="http://schemas.openxmlformats.org/presentationml/2006/main" xmlns:r="http://schemas.openxmlformats.org/officeDocument/2006/relationships">
+  <p:cSld>
+    <p:spTree>
+      <p:nvGrpSpPr>
+        <p:cNvPr id="1" name=""/>
+        <p:cNvGrpSpPr/>
+        <p:nvPr/>
+      </p:nvGrpSpPr>
+      <p:grpSpPr>
+        <a:xfrm>
+          <a:off x="0" y="0"/>
+          <a:ext cx="0" cy="0"/>
+          <a:chOff x="0" y="0"/>
+          <a:chExt cx="0" cy="0"/>
+        </a:xfrm>
+      </p:grpSpPr>
+      <p:sp>
+        <p:nvSpPr>
+          <p:cNvPr id="2" name="Slide Image Placeholder 1"/>
+          <p:cNvSpPr>
+            <a:spLocks noGrp="1"/>
+          </p:cNvSpPr>
+          <p:nvPr>
+            <p:ph type="sldImg" idx="2"/>
+          </p:nvPr>
+        </p:nvSpPr>
+        <p:spPr/>
+      </p:sp>
+      <p:sp>
+        <p:nvSpPr>
+          <p:cNvPr id="3" name="Notes Placeholder 2"/>
+          <p:cNvSpPr>
+            <a:spLocks noGrp="1"/>
+          </p:cNvSpPr>
+          <p:nvPr>
+            <p:ph type="body" idx="3" sz="quarter"/>
+          </p:nvPr>
+        </p:nvSpPr>
+        <p:spPr/>
+        <p:txBody>
+          <a:bodyPr/>
+          <a:lstStyle/>
+          <a:p>
+            <a:r>
+              <a:t>[짚을 곳] 상황 → 물음 → 보기 넷</a:t>
+            </a:r>
+          </a:p>
+          <a:p>
+            <a:r>
+              <a:t>· 상황: 초안엔 「냉각 효율 확인」, 기록엔 그 값을 준 호출이 없다</a:t>
+            </a:r>
+          </a:p>
+          <a:p>
+            <a:r>
+              <a:t>· 생각할 거리: 말로 적힌 것과 실제 호출을 가르면</a:t>
+            </a:r>
+          </a:p>
+          <a:p>
+            <a:r>
+              <a:t>· 20초 생각 시간</a:t>
+            </a:r>
+          </a:p>
+          <a:p>
+            <a:r>
+              <a:t>[다음] Quiz 2. 어느 기준에도 맞지 않은 값</a:t>
             </a:r>
           </a:p>
         </p:txBody>
@@ -2256,12 +2643,297 @@
           </a:p>
           <a:p>
             <a:r>
-              <a:t>· 04 멈춤 조건, 구조화 출력과 보류, 기록과 대조, 단정한 초안과 근거 있는 초안</a:t>
+              <a:t>· 04 멈춤 조건, 구조화 출력과 보류, 기록과 대조, 결과에서 호출로 거슬러 확인, 단정한 초안과 근거 있는 초안</a:t>
             </a:r>
           </a:p>
           <a:p>
             <a:r>
               <a:t>[다음] 같은 구조, 다른 활용</a:t>
+            </a:r>
+          </a:p>
+        </p:txBody>
+      </p:sp>
+      <p:sp>
+        <p:nvSpPr>
+          <p:cNvPr id="4" name="Slide Number Placeholder 3"/>
+          <p:cNvSpPr>
+            <a:spLocks noGrp="1"/>
+          </p:cNvSpPr>
+          <p:nvPr>
+            <p:ph type="sldNum" idx="5" sz="quarter"/>
+          </p:nvPr>
+        </p:nvSpPr>
+        <p:spPr/>
+      </p:sp>
+    </p:spTree>
+  </p:cSld>
+  <p:clrMapOvr>
+    <a:masterClrMapping/>
+  </p:clrMapOvr>
+</p:notes>
+</file>
+
+<file path=ppt/notesSlides/notesSlide30.xml><?xml version="1.0" encoding="utf-8"?>
+<p:notes xmlns:a="http://schemas.openxmlformats.org/drawingml/2006/main" xmlns:p="http://schemas.openxmlformats.org/presentationml/2006/main" xmlns:r="http://schemas.openxmlformats.org/officeDocument/2006/relationships">
+  <p:cSld>
+    <p:spTree>
+      <p:nvGrpSpPr>
+        <p:cNvPr id="1" name=""/>
+        <p:cNvGrpSpPr/>
+        <p:nvPr/>
+      </p:nvGrpSpPr>
+      <p:grpSpPr>
+        <a:xfrm>
+          <a:off x="0" y="0"/>
+          <a:ext cx="0" cy="0"/>
+          <a:chOff x="0" y="0"/>
+          <a:chExt cx="0" cy="0"/>
+        </a:xfrm>
+      </p:grpSpPr>
+      <p:sp>
+        <p:nvSpPr>
+          <p:cNvPr id="2" name="Slide Image Placeholder 1"/>
+          <p:cNvSpPr>
+            <a:spLocks noGrp="1"/>
+          </p:cNvSpPr>
+          <p:nvPr>
+            <p:ph type="sldImg" idx="2"/>
+          </p:nvPr>
+        </p:nvSpPr>
+        <p:spPr/>
+      </p:sp>
+      <p:sp>
+        <p:nvSpPr>
+          <p:cNvPr id="3" name="Notes Placeholder 2"/>
+          <p:cNvSpPr>
+            <a:spLocks noGrp="1"/>
+          </p:cNvSpPr>
+          <p:nvPr>
+            <p:ph type="body" idx="3" sz="quarter"/>
+          </p:nvPr>
+        </p:nvSpPr>
+        <p:spPr/>
+        <p:txBody>
+          <a:bodyPr/>
+          <a:lstStyle/>
+          <a:p>
+            <a:r>
+              <a:t>[짚을 곳] 상황 → 물음 → 보기 넷</a:t>
+            </a:r>
+          </a:p>
+          <a:p>
+            <a:r>
+              <a:t>· 상황: 값은 셋 다 신선하게 읽혔고, 냉각 효율은 70 % 아래가 아니며 팬 · 캐비닛도 기준 안</a:t>
+            </a:r>
+          </a:p>
+          <a:p>
+            <a:r>
+              <a:t>· 생각할 거리: 값을 못 읽은 것과 읽었는데 어느 후보에도 안 맞는 것</a:t>
+            </a:r>
+          </a:p>
+          <a:p>
+            <a:r>
+              <a:t>· 20초 생각 시간</a:t>
+            </a:r>
+          </a:p>
+          <a:p>
+            <a:r>
+              <a:t>[다음] Quiz 3. 승인 전의 추천안</a:t>
+            </a:r>
+          </a:p>
+        </p:txBody>
+      </p:sp>
+      <p:sp>
+        <p:nvSpPr>
+          <p:cNvPr id="4" name="Slide Number Placeholder 3"/>
+          <p:cNvSpPr>
+            <a:spLocks noGrp="1"/>
+          </p:cNvSpPr>
+          <p:nvPr>
+            <p:ph type="sldNum" idx="5" sz="quarter"/>
+          </p:nvPr>
+        </p:nvSpPr>
+        <p:spPr/>
+      </p:sp>
+    </p:spTree>
+  </p:cSld>
+  <p:clrMapOvr>
+    <a:masterClrMapping/>
+  </p:clrMapOvr>
+</p:notes>
+</file>
+
+<file path=ppt/notesSlides/notesSlide31.xml><?xml version="1.0" encoding="utf-8"?>
+<p:notes xmlns:a="http://schemas.openxmlformats.org/drawingml/2006/main" xmlns:p="http://schemas.openxmlformats.org/presentationml/2006/main" xmlns:r="http://schemas.openxmlformats.org/officeDocument/2006/relationships">
+  <p:cSld>
+    <p:spTree>
+      <p:nvGrpSpPr>
+        <p:cNvPr id="1" name=""/>
+        <p:cNvGrpSpPr/>
+        <p:nvPr/>
+      </p:nvGrpSpPr>
+      <p:grpSpPr>
+        <a:xfrm>
+          <a:off x="0" y="0"/>
+          <a:ext cx="0" cy="0"/>
+          <a:chOff x="0" y="0"/>
+          <a:chExt cx="0" cy="0"/>
+        </a:xfrm>
+      </p:grpSpPr>
+      <p:sp>
+        <p:nvSpPr>
+          <p:cNvPr id="2" name="Slide Image Placeholder 1"/>
+          <p:cNvSpPr>
+            <a:spLocks noGrp="1"/>
+          </p:cNvSpPr>
+          <p:nvPr>
+            <p:ph type="sldImg" idx="2"/>
+          </p:nvPr>
+        </p:nvSpPr>
+        <p:spPr/>
+      </p:sp>
+      <p:sp>
+        <p:nvSpPr>
+          <p:cNvPr id="3" name="Notes Placeholder 2"/>
+          <p:cNvSpPr>
+            <a:spLocks noGrp="1"/>
+          </p:cNvSpPr>
+          <p:nvPr>
+            <p:ph type="body" idx="3" sz="quarter"/>
+          </p:nvPr>
+        </p:nvSpPr>
+        <p:spPr/>
+        <p:txBody>
+          <a:bodyPr/>
+          <a:lstStyle/>
+          <a:p>
+            <a:r>
+              <a:t>[짚을 곳] 상황 → 물음 → 보기 넷</a:t>
+            </a:r>
+          </a:p>
+          <a:p>
+            <a:r>
+              <a:t>· 상황: 추천안 제출 · 판단 번호 받음, 사람 미승인</a:t>
+            </a:r>
+          </a:p>
+          <a:p>
+            <a:r>
+              <a:t>· 생각할 거리: 에이전트의 일은 어디서 끝나나</a:t>
+            </a:r>
+          </a:p>
+          <a:p>
+            <a:r>
+              <a:t>· 20초 생각 시간</a:t>
+            </a:r>
+          </a:p>
+          <a:p>
+            <a:r>
+              <a:t>[다음] 정답과 판단 기준</a:t>
+            </a:r>
+          </a:p>
+        </p:txBody>
+      </p:sp>
+      <p:sp>
+        <p:nvSpPr>
+          <p:cNvPr id="4" name="Slide Number Placeholder 3"/>
+          <p:cNvSpPr>
+            <a:spLocks noGrp="1"/>
+          </p:cNvSpPr>
+          <p:nvPr>
+            <p:ph type="sldNum" idx="5" sz="quarter"/>
+          </p:nvPr>
+        </p:nvSpPr>
+        <p:spPr/>
+      </p:sp>
+    </p:spTree>
+  </p:cSld>
+  <p:clrMapOvr>
+    <a:masterClrMapping/>
+  </p:clrMapOvr>
+</p:notes>
+</file>
+
+<file path=ppt/notesSlides/notesSlide32.xml><?xml version="1.0" encoding="utf-8"?>
+<p:notes xmlns:a="http://schemas.openxmlformats.org/drawingml/2006/main" xmlns:p="http://schemas.openxmlformats.org/presentationml/2006/main" xmlns:r="http://schemas.openxmlformats.org/officeDocument/2006/relationships">
+  <p:cSld>
+    <p:spTree>
+      <p:nvGrpSpPr>
+        <p:cNvPr id="1" name=""/>
+        <p:cNvGrpSpPr/>
+        <p:nvPr/>
+      </p:nvGrpSpPr>
+      <p:grpSpPr>
+        <a:xfrm>
+          <a:off x="0" y="0"/>
+          <a:ext cx="0" cy="0"/>
+          <a:chOff x="0" y="0"/>
+          <a:chExt cx="0" cy="0"/>
+        </a:xfrm>
+      </p:grpSpPr>
+      <p:sp>
+        <p:nvSpPr>
+          <p:cNvPr id="2" name="Slide Image Placeholder 1"/>
+          <p:cNvSpPr>
+            <a:spLocks noGrp="1"/>
+          </p:cNvSpPr>
+          <p:nvPr>
+            <p:ph type="sldImg" idx="2"/>
+          </p:nvPr>
+        </p:nvSpPr>
+        <p:spPr/>
+      </p:sp>
+      <p:sp>
+        <p:nvSpPr>
+          <p:cNvPr id="3" name="Notes Placeholder 2"/>
+          <p:cNvSpPr>
+            <a:spLocks noGrp="1"/>
+          </p:cNvSpPr>
+          <p:nvPr>
+            <p:ph type="body" idx="3" sz="quarter"/>
+          </p:nvPr>
+        </p:nvSpPr>
+        <p:spPr/>
+        <p:txBody>
+          <a:bodyPr/>
+          <a:lstStyle/>
+          <a:p>
+            <a:r>
+              <a:t>[짚을 곳] 표 세 줄, 문항 → 판단 기준 → 정답</a:t>
+            </a:r>
+          </a:p>
+          <a:p>
+            <a:r>
+              <a:t>· Quiz 1 → 2번: 진행 설명 · 적힌 값은 증거가 아니다. 값을 준 호출을 찾아야. 3번 혼동: 숫자가 적힘 ≠ 읽음</a:t>
+            </a:r>
+          </a:p>
+          <a:p>
+            <a:r>
+              <a:t>· Quiz 2 → 3번: 값이 신선하게 들어왔으니 미확인(1)이 아니다. 2는 기준에 안 맞는 원인을 지어냄, 4는 등록되지 않은 원인을 놓침</a:t>
+            </a:r>
+          </a:p>
+          <a:p>
+            <a:r>
+              <a:t>· Quiz 3 → 1번: 에이전트는 제출까지, 명령 · 작업지시는 승인 뒤 시스템. 3번은 순서를 뒤집음</a:t>
+            </a:r>
+          </a:p>
+          <a:p>
+            <a:r>
+              <a:t>· 이어지는 실습: 포털의 준비된 에이전트에서 실제 조회 도구와 근거를 확인하고, 로컬 제공 그래프 · 사례로 원인 후보와 근거를 읽는 기능을 만들어 오래된 값 · 표본 부족이 미확인으로 남는지 대조한다</a:t>
+            </a:r>
+          </a:p>
+          <a:p>
+            <a:r>
+              <a:t>· 설비 · 부품 · 증거와 매뉴얼 절을 점검 대상에 이은 뒤, 대상 · 관측 시각 · 근거 · 확인 항목이 있는 점검 요청 초안을 누락 · 복수 원인 사례로 검증하고 작업지시와 구분해 저장한다 — 진행은 핸즈온 가이드</a:t>
+            </a:r>
+          </a:p>
+          <a:p>
+            <a:r>
+              <a:t>· 다음 회차: 같은 근거 정리 방법으로 협의 안건을 만든다</a:t>
+            </a:r>
+          </a:p>
+          <a:p>
+            <a:r>
+              <a:t>[다음] 실습으로</a:t>
             </a:r>
           </a:p>
         </p:txBody>
@@ -2546,7 +3218,7 @@
           </a:p>
           <a:p>
             <a:r>
-              <a:t>· 이름 · 자료만 바꾼 반복이 아니다. 실습은 점검 요청 · 회의 후속 · 다음 협의 안건</a:t>
+              <a:t>· 이름 · 자료만 바꾼 반복이 아니다. 이어지는 실습은 점검 요청</a:t>
             </a:r>
           </a:p>
           <a:p>
@@ -7887,7 +8559,7 @@
       </p:sp>
       <p:pic>
         <p:nvPicPr>
-          <p:cNvPr id="6" name="삽화:실행고리.svg" descr="illust_4532797991739416996_1793113376.png"/>
+          <p:cNvPr id="6" name="삽화:실행고리.svg" descr="illust_7722426408142882587_1793113376.png"/>
           <p:cNvPicPr>
             <a:picLocks noChangeAspect="1"/>
           </p:cNvPicPr>
@@ -9686,7 +10358,7 @@
       </p:sp>
       <p:pic>
         <p:nvPicPr>
-          <p:cNvPr id="6" name="삽화:정보원.svg" descr="illust_7593330154092958571_1793113376.png"/>
+          <p:cNvPr id="6" name="삽화:정보원.svg" descr="illust_6426216068488657882_1793113376.png"/>
           <p:cNvPicPr>
             <a:picLocks noChangeAspect="1"/>
           </p:cNvPicPr>
@@ -18345,7 +19017,7 @@
                 <a:ea typeface="맑은 고딕"/>
                 <a:cs typeface="맑은 고딕"/>
               </a:rPr>
-              <a:t>응용: 단정한 초안과 근거 있는 점검 요청 초안</a:t>
+              <a:t>결과에서 호출로 거슬러 확인하기</a:t>
             </a:r>
           </a:p>
         </p:txBody>
@@ -18384,7 +19056,7 @@
                 <a:ea typeface="맑은 고딕"/>
                 <a:cs typeface="맑은 고딕"/>
               </a:rPr>
-              <a:t>점검 요청 초안은 가설과 확인을 가르고 작업지시를 대신하지 않아야, 받는 사람이 무엇을 확인할지 정할 수 있다.</a:t>
+              <a:t>결과 문장이나 진행 설명만 믿지 않고, 그 값을 돌려준 호출의 입력 · 출력 · 관측 시각까지 거슬러 맞춘다.</a:t>
             </a:r>
           </a:p>
         </p:txBody>
@@ -18465,12 +19137,12 @@
         </p:nvSpPr>
         <p:spPr>
           <a:xfrm>
-            <a:off x="548640" y="2105406"/>
-            <a:ext cx="5181447" cy="3771900"/>
+            <a:off x="548640" y="2546667"/>
+            <a:ext cx="2485567" cy="2889376"/>
           </a:xfrm>
           <a:prstGeom prst="roundRect">
             <a:avLst>
-              <a:gd name="adj" fmla="val 4000"/>
+              <a:gd name="adj" fmla="val 5000"/>
             </a:avLst>
           </a:prstGeom>
           <a:solidFill>
@@ -18490,166 +19162,20 @@
       </p:sp>
       <p:sp>
         <p:nvSpPr>
-          <p:cNvPr id="7" name="TextBox 6"/>
-          <p:cNvSpPr txBox="1"/>
-          <p:nvPr/>
-        </p:nvSpPr>
-        <p:spPr>
-          <a:xfrm>
-            <a:off x="822959" y="2306574"/>
-            <a:ext cx="4724247" cy="731520"/>
-          </a:xfrm>
-          <a:prstGeom prst="rect">
-            <a:avLst/>
-          </a:prstGeom>
-          <a:noFill/>
-        </p:spPr>
-        <p:txBody>
-          <a:bodyPr wrap="square" anchor="ctr"/>
-          <a:lstStyle/>
-          <a:p>
-            <a:pPr algn="l" eaLnBrk="0">
-              <a:lnSpc>
-                <a:spcPct val="110000"/>
-              </a:lnSpc>
-            </a:pPr>
-            <a:r>
-              <a:rPr sz="2000" b="1">
-                <a:solidFill>
-                  <a:srgbClr val="13294B"/>
-                </a:solidFill>
-                <a:latin typeface="맑은 고딕"/>
-                <a:ea typeface="맑은 고딕"/>
-                <a:cs typeface="맑은 고딕"/>
-              </a:rPr>
-              <a:t>단정한 초안</a:t>
-            </a:r>
-          </a:p>
-        </p:txBody>
-      </p:sp>
-      <p:sp>
-        <p:nvSpPr>
-          <p:cNvPr id="8" name="TextBox 7"/>
-          <p:cNvSpPr txBox="1"/>
-          <p:nvPr/>
-        </p:nvSpPr>
-        <p:spPr>
-          <a:xfrm>
-            <a:off x="822959" y="3156966"/>
-            <a:ext cx="4632807" cy="2171700"/>
-          </a:xfrm>
-          <a:prstGeom prst="rect">
-            <a:avLst/>
-          </a:prstGeom>
-          <a:noFill/>
-        </p:spPr>
-        <p:txBody>
-          <a:bodyPr wrap="square" anchor="t"/>
-          <a:lstStyle/>
-          <a:p>
-            <a:pPr algn="l" eaLnBrk="0" marL="171450" indent="-171450">
-              <a:lnSpc>
-                <a:spcPct val="110000"/>
-              </a:lnSpc>
-              <a:spcAft>
-                <a:spcPts val="600"/>
-              </a:spcAft>
-            </a:pPr>
-            <a:r>
-              <a:rPr sz="1500" b="0">
-                <a:solidFill>
-                  <a:srgbClr val="1F2A3A"/>
-                </a:solidFill>
-                <a:latin typeface="맑은 고딕"/>
-                <a:ea typeface="맑은 고딕"/>
-                <a:cs typeface="맑은 고딕"/>
-              </a:rPr>
-              <a:t>• 원인: 쿨러 핀 오염(확정)</a:t>
-            </a:r>
-          </a:p>
-          <a:p>
-            <a:pPr algn="l" eaLnBrk="0" marL="171450" indent="-171450">
-              <a:lnSpc>
-                <a:spcPct val="110000"/>
-              </a:lnSpc>
-              <a:spcAft>
-                <a:spcPts val="600"/>
-              </a:spcAft>
-            </a:pPr>
-            <a:r>
-              <a:rPr sz="1500" b="0">
-                <a:solidFill>
-                  <a:srgbClr val="1F2A3A"/>
-                </a:solidFill>
-                <a:latin typeface="맑은 고딕"/>
-                <a:ea typeface="맑은 고딕"/>
-                <a:cs typeface="맑은 고딕"/>
-              </a:rPr>
-              <a:t>• 근거: 유온이 올랐다</a:t>
-            </a:r>
-          </a:p>
-          <a:p>
-            <a:pPr algn="l" eaLnBrk="0" marL="171450" indent="-171450">
-              <a:lnSpc>
-                <a:spcPct val="110000"/>
-              </a:lnSpc>
-              <a:spcAft>
-                <a:spcPts val="600"/>
-              </a:spcAft>
-            </a:pPr>
-            <a:r>
-              <a:rPr sz="1500" b="0">
-                <a:solidFill>
-                  <a:srgbClr val="1F2A3A"/>
-                </a:solidFill>
-                <a:latin typeface="맑은 고딕"/>
-                <a:ea typeface="맑은 고딕"/>
-                <a:cs typeface="맑은 고딕"/>
-              </a:rPr>
-              <a:t>• 조치: 핀 세척 작업지시를 발행했다</a:t>
-            </a:r>
-          </a:p>
-          <a:p>
-            <a:pPr algn="l" eaLnBrk="0" marL="171450" indent="-171450">
-              <a:lnSpc>
-                <a:spcPct val="110000"/>
-              </a:lnSpc>
-              <a:spcAft>
-                <a:spcPts val="600"/>
-              </a:spcAft>
-            </a:pPr>
-            <a:r>
-              <a:rPr sz="1500" b="0">
-                <a:solidFill>
-                  <a:srgbClr val="1F2A3A"/>
-                </a:solidFill>
-                <a:latin typeface="맑은 고딕"/>
-                <a:ea typeface="맑은 고딕"/>
-                <a:cs typeface="맑은 고딕"/>
-              </a:rPr>
-              <a:t>• 관측 시각 · 다른 후보 없음</a:t>
-            </a:r>
-          </a:p>
-        </p:txBody>
-      </p:sp>
-      <p:sp>
-        <p:nvSpPr>
-          <p:cNvPr id="9" name="Rounded Rectangle 8"/>
+          <p:cNvPr id="7" name="Oval 6"/>
           <p:cNvSpPr/>
           <p:nvPr/>
         </p:nvSpPr>
         <p:spPr>
           <a:xfrm>
-            <a:off x="868680" y="5420106"/>
-            <a:ext cx="1722120" cy="292608"/>
-          </a:xfrm>
-          <a:prstGeom prst="roundRect">
-            <a:avLst>
-              <a:gd name="adj" fmla="val 50000"/>
-            </a:avLst>
+            <a:off x="1425663" y="2729547"/>
+            <a:ext cx="731520" cy="731520"/>
+          </a:xfrm>
+          <a:prstGeom prst="ellipse">
+            <a:avLst/>
           </a:prstGeom>
           <a:solidFill>
-            <a:srgbClr val="D3D9E1"/>
+            <a:srgbClr val="FFFFFF"/>
           </a:solidFill>
           <a:ln>
             <a:noFill/>
@@ -18663,33 +19189,60 @@
           </a:p>
         </p:txBody>
       </p:sp>
-      <p:sp>
-        <p:nvSpPr>
-          <p:cNvPr id="10" name="TextBox 9"/>
-          <p:cNvSpPr txBox="1"/>
-          <p:nvPr/>
-        </p:nvSpPr>
-        <p:spPr>
-          <a:xfrm>
-            <a:off x="868680" y="5420106"/>
-            <a:ext cx="1722120" cy="292608"/>
-          </a:xfrm>
-          <a:prstGeom prst="rect">
-            <a:avLst/>
-          </a:prstGeom>
-          <a:noFill/>
-        </p:spPr>
-        <p:txBody>
-          <a:bodyPr wrap="square" anchor="ctr"/>
+      <p:pic>
+        <p:nvPicPr>
+          <p:cNvPr id="8" name="아이콘:clipboard-check" descr="clipboard-check_13294B_1.6.png"/>
+          <p:cNvPicPr>
+            <a:picLocks noChangeAspect="1"/>
+          </p:cNvPicPr>
+          <p:nvPr/>
+        </p:nvPicPr>
+        <p:blipFill>
+          <a:blip r:embed="rId3"/>
+          <a:stretch>
+            <a:fillRect/>
+          </a:stretch>
+        </p:blipFill>
+        <p:spPr>
+          <a:xfrm>
+            <a:off x="1579283" y="2883166"/>
+            <a:ext cx="424281" cy="424281"/>
+          </a:xfrm>
+          <a:prstGeom prst="rect">
+            <a:avLst/>
+          </a:prstGeom>
+        </p:spPr>
+      </p:pic>
+      <p:sp>
+        <p:nvSpPr>
+          <p:cNvPr id="9" name="TextBox 8"/>
+          <p:cNvSpPr txBox="1"/>
+          <p:nvPr/>
+        </p:nvSpPr>
+        <p:spPr>
+          <a:xfrm>
+            <a:off x="621792" y="3534219"/>
+            <a:ext cx="2339263" cy="1828672"/>
+          </a:xfrm>
+          <a:prstGeom prst="rect">
+            <a:avLst/>
+          </a:prstGeom>
+          <a:noFill/>
+        </p:spPr>
+        <p:txBody>
+          <a:bodyPr wrap="square" anchor="t"/>
           <a:lstStyle/>
           <a:p>
             <a:pPr algn="ctr" eaLnBrk="0">
               <a:lnSpc>
                 <a:spcPct val="110000"/>
               </a:lnSpc>
-            </a:pPr>
-            <a:r>
-              <a:rPr sz="1200" b="1">
+              <a:spcAft>
+                <a:spcPts val="400"/>
+              </a:spcAft>
+            </a:pPr>
+            <a:r>
+              <a:rPr sz="1900" b="1">
                 <a:solidFill>
                   <a:srgbClr val="13294B"/>
                 </a:solidFill>
@@ -18697,8 +19250,79 @@
                 <a:ea typeface="맑은 고딕"/>
                 <a:cs typeface="맑은 고딕"/>
               </a:rPr>
-              <a:t>가설 · 권한을 넘음</a:t>
-            </a:r>
+              <a:t>결과의 주장</a:t>
+            </a:r>
+          </a:p>
+          <a:p>
+            <a:pPr algn="ctr" eaLnBrk="0">
+              <a:lnSpc>
+                <a:spcPct val="110000"/>
+              </a:lnSpc>
+              <a:spcAft>
+                <a:spcPts val="400"/>
+              </a:spcAft>
+            </a:pPr>
+            <a:r>
+              <a:rPr sz="1550" b="0">
+                <a:solidFill>
+                  <a:srgbClr val="1F2A3A"/>
+                </a:solidFill>
+                <a:latin typeface="맑은 고딕"/>
+                <a:ea typeface="맑은 고딕"/>
+                <a:cs typeface="맑은 고딕"/>
+              </a:rPr>
+              <a:t>「냉각 효율 46.2 %로</a:t>
+            </a:r>
+          </a:p>
+          <a:p>
+            <a:pPr algn="ctr" eaLnBrk="0">
+              <a:lnSpc>
+                <a:spcPct val="110000"/>
+              </a:lnSpc>
+              <a:spcAft>
+                <a:spcPts val="400"/>
+              </a:spcAft>
+            </a:pPr>
+            <a:r>
+              <a:rPr sz="1550" b="0">
+                <a:solidFill>
+                  <a:srgbClr val="1F2A3A"/>
+                </a:solidFill>
+                <a:latin typeface="맑은 고딕"/>
+                <a:ea typeface="맑은 고딕"/>
+                <a:cs typeface="맑은 고딕"/>
+              </a:rPr>
+              <a:t>핀 오염이 지지된다」</a:t>
+            </a:r>
+          </a:p>
+        </p:txBody>
+      </p:sp>
+      <p:sp>
+        <p:nvSpPr>
+          <p:cNvPr id="10" name="Right Arrow 9"/>
+          <p:cNvSpPr/>
+          <p:nvPr/>
+        </p:nvSpPr>
+        <p:spPr>
+          <a:xfrm>
+            <a:off x="3098215" y="3854196"/>
+            <a:ext cx="256031" cy="274320"/>
+          </a:xfrm>
+          <a:prstGeom prst="rightArrow">
+            <a:avLst/>
+          </a:prstGeom>
+          <a:solidFill>
+            <a:srgbClr val="13294B"/>
+          </a:solidFill>
+          <a:ln>
+            <a:noFill/>
+          </a:ln>
+        </p:spPr>
+        <p:txBody>
+          <a:bodyPr rtlCol="0" anchor="ctr"/>
+          <a:lstStyle/>
+          <a:p>
+            <a:pPr algn="ctr"/>
           </a:p>
         </p:txBody>
       </p:sp>
@@ -18710,18 +19334,236 @@
         </p:nvSpPr>
         <p:spPr>
           <a:xfrm>
-            <a:off x="6461607" y="2105406"/>
-            <a:ext cx="5181447" cy="3771900"/>
+            <a:off x="3418255" y="2546667"/>
+            <a:ext cx="2485567" cy="2889376"/>
           </a:xfrm>
           <a:prstGeom prst="roundRect">
             <a:avLst>
-              <a:gd name="adj" fmla="val 4000"/>
+              <a:gd name="adj" fmla="val 5000"/>
+            </a:avLst>
+          </a:prstGeom>
+          <a:solidFill>
+            <a:srgbClr val="F3F6F9"/>
+          </a:solidFill>
+          <a:ln>
+            <a:noFill/>
+          </a:ln>
+        </p:spPr>
+        <p:txBody>
+          <a:bodyPr rtlCol="0" anchor="ctr"/>
+          <a:lstStyle/>
+          <a:p>
+            <a:pPr algn="ctr"/>
+          </a:p>
+        </p:txBody>
+      </p:sp>
+      <p:sp>
+        <p:nvSpPr>
+          <p:cNvPr id="12" name="Oval 11"/>
+          <p:cNvSpPr/>
+          <p:nvPr/>
+        </p:nvSpPr>
+        <p:spPr>
+          <a:xfrm>
+            <a:off x="4295279" y="2729547"/>
+            <a:ext cx="731520" cy="731520"/>
+          </a:xfrm>
+          <a:prstGeom prst="ellipse">
+            <a:avLst/>
+          </a:prstGeom>
+          <a:solidFill>
+            <a:srgbClr val="FFFFFF"/>
+          </a:solidFill>
+          <a:ln>
+            <a:noFill/>
+          </a:ln>
+        </p:spPr>
+        <p:txBody>
+          <a:bodyPr rtlCol="0" anchor="ctr"/>
+          <a:lstStyle/>
+          <a:p>
+            <a:pPr algn="ctr"/>
+          </a:p>
+        </p:txBody>
+      </p:sp>
+      <p:pic>
+        <p:nvPicPr>
+          <p:cNvPr id="13" name="아이콘:history" descr="history_13294B_1.6.png"/>
+          <p:cNvPicPr>
+            <a:picLocks noChangeAspect="1"/>
+          </p:cNvPicPr>
+          <p:nvPr/>
+        </p:nvPicPr>
+        <p:blipFill>
+          <a:blip r:embed="rId4"/>
+          <a:stretch>
+            <a:fillRect/>
+          </a:stretch>
+        </p:blipFill>
+        <p:spPr>
+          <a:xfrm>
+            <a:off x="4448898" y="2883166"/>
+            <a:ext cx="424281" cy="424281"/>
+          </a:xfrm>
+          <a:prstGeom prst="rect">
+            <a:avLst/>
+          </a:prstGeom>
+        </p:spPr>
+      </p:pic>
+      <p:sp>
+        <p:nvSpPr>
+          <p:cNvPr id="14" name="TextBox 13"/>
+          <p:cNvSpPr txBox="1"/>
+          <p:nvPr/>
+        </p:nvSpPr>
+        <p:spPr>
+          <a:xfrm>
+            <a:off x="3491407" y="3534219"/>
+            <a:ext cx="2339263" cy="1828672"/>
+          </a:xfrm>
+          <a:prstGeom prst="rect">
+            <a:avLst/>
+          </a:prstGeom>
+          <a:noFill/>
+        </p:spPr>
+        <p:txBody>
+          <a:bodyPr wrap="square" anchor="t"/>
+          <a:lstStyle/>
+          <a:p>
+            <a:pPr algn="ctr" eaLnBrk="0">
+              <a:lnSpc>
+                <a:spcPct val="110000"/>
+              </a:lnSpc>
+              <a:spcAft>
+                <a:spcPts val="400"/>
+              </a:spcAft>
+            </a:pPr>
+            <a:r>
+              <a:rPr sz="1900" b="1">
+                <a:solidFill>
+                  <a:srgbClr val="13294B"/>
+                </a:solidFill>
+                <a:latin typeface="맑은 고딕"/>
+                <a:ea typeface="맑은 고딕"/>
+                <a:cs typeface="맑은 고딕"/>
+              </a:rPr>
+              <a:t>그 값을 준 호출</a:t>
+            </a:r>
+          </a:p>
+          <a:p>
+            <a:pPr algn="ctr" eaLnBrk="0">
+              <a:lnSpc>
+                <a:spcPct val="110000"/>
+              </a:lnSpc>
+              <a:spcAft>
+                <a:spcPts val="400"/>
+              </a:spcAft>
+            </a:pPr>
+            <a:r>
+              <a:rPr sz="1550" b="0">
+                <a:solidFill>
+                  <a:srgbClr val="1F2A3A"/>
+                </a:solidFill>
+                <a:latin typeface="맑은 고딕"/>
+                <a:ea typeface="맑은 고딕"/>
+                <a:cs typeface="맑은 고딕"/>
+              </a:rPr>
+              <a:t>처리 기록에서</a:t>
+            </a:r>
+          </a:p>
+          <a:p>
+            <a:pPr algn="ctr" eaLnBrk="0">
+              <a:lnSpc>
+                <a:spcPct val="110000"/>
+              </a:lnSpc>
+              <a:spcAft>
+                <a:spcPts val="400"/>
+              </a:spcAft>
+            </a:pPr>
+            <a:r>
+              <a:rPr sz="1550" b="0">
+                <a:solidFill>
+                  <a:srgbClr val="1F2A3A"/>
+                </a:solidFill>
+                <a:latin typeface="맑은 고딕"/>
+                <a:ea typeface="맑은 고딕"/>
+                <a:cs typeface="맑은 고딕"/>
+              </a:rPr>
+              <a:t>11:13:18 원인 진단의</a:t>
+            </a:r>
+          </a:p>
+          <a:p>
+            <a:pPr algn="ctr" eaLnBrk="0">
+              <a:lnSpc>
+                <a:spcPct val="110000"/>
+              </a:lnSpc>
+              <a:spcAft>
+                <a:spcPts val="400"/>
+              </a:spcAft>
+            </a:pPr>
+            <a:r>
+              <a:rPr sz="1550" b="0">
+                <a:solidFill>
+                  <a:srgbClr val="1F2A3A"/>
+                </a:solidFill>
+                <a:latin typeface="맑은 고딕"/>
+                <a:ea typeface="맑은 고딕"/>
+                <a:cs typeface="맑은 고딕"/>
+              </a:rPr>
+              <a:t>받음을 찾는다</a:t>
+            </a:r>
+          </a:p>
+        </p:txBody>
+      </p:sp>
+      <p:sp>
+        <p:nvSpPr>
+          <p:cNvPr id="15" name="Right Arrow 14"/>
+          <p:cNvSpPr/>
+          <p:nvPr/>
+        </p:nvSpPr>
+        <p:spPr>
+          <a:xfrm>
+            <a:off x="5967831" y="3854196"/>
+            <a:ext cx="256031" cy="274320"/>
+          </a:xfrm>
+          <a:prstGeom prst="rightArrow">
+            <a:avLst/>
+          </a:prstGeom>
+          <a:solidFill>
+            <a:srgbClr val="13294B"/>
+          </a:solidFill>
+          <a:ln>
+            <a:noFill/>
+          </a:ln>
+        </p:spPr>
+        <p:txBody>
+          <a:bodyPr rtlCol="0" anchor="ctr"/>
+          <a:lstStyle/>
+          <a:p>
+            <a:pPr algn="ctr"/>
+          </a:p>
+        </p:txBody>
+      </p:sp>
+      <p:sp>
+        <p:nvSpPr>
+          <p:cNvPr id="16" name="Rounded Rectangle 15"/>
+          <p:cNvSpPr/>
+          <p:nvPr/>
+        </p:nvSpPr>
+        <p:spPr>
+          <a:xfrm>
+            <a:off x="6287871" y="2546667"/>
+            <a:ext cx="2485567" cy="2889376"/>
+          </a:xfrm>
+          <a:prstGeom prst="roundRect">
+            <a:avLst>
+              <a:gd name="adj" fmla="val 5000"/>
             </a:avLst>
           </a:prstGeom>
           <a:solidFill>
             <a:srgbClr val="E7F3FD"/>
           </a:solidFill>
-          <a:ln w="28575">
+          <a:ln w="25400">
             <a:solidFill>
               <a:srgbClr val="5CB8F2"/>
             </a:solidFill>
@@ -18737,184 +19579,17 @@
       </p:sp>
       <p:sp>
         <p:nvSpPr>
-          <p:cNvPr id="12" name="TextBox 11"/>
-          <p:cNvSpPr txBox="1"/>
-          <p:nvPr/>
-        </p:nvSpPr>
-        <p:spPr>
-          <a:xfrm>
-            <a:off x="6735927" y="2306574"/>
-            <a:ext cx="4724247" cy="731520"/>
-          </a:xfrm>
-          <a:prstGeom prst="rect">
-            <a:avLst/>
-          </a:prstGeom>
-          <a:noFill/>
-        </p:spPr>
-        <p:txBody>
-          <a:bodyPr wrap="square" anchor="ctr"/>
-          <a:lstStyle/>
-          <a:p>
-            <a:pPr algn="l" eaLnBrk="0">
-              <a:lnSpc>
-                <a:spcPct val="110000"/>
-              </a:lnSpc>
-            </a:pPr>
-            <a:r>
-              <a:rPr sz="2000" b="1">
-                <a:solidFill>
-                  <a:srgbClr val="13294B"/>
-                </a:solidFill>
-                <a:latin typeface="맑은 고딕"/>
-                <a:ea typeface="맑은 고딕"/>
-                <a:cs typeface="맑은 고딕"/>
-              </a:rPr>
-              <a:t>근거 있는 점검 요청 초안</a:t>
-            </a:r>
-          </a:p>
-        </p:txBody>
-      </p:sp>
-      <p:sp>
-        <p:nvSpPr>
-          <p:cNvPr id="13" name="TextBox 12"/>
-          <p:cNvSpPr txBox="1"/>
-          <p:nvPr/>
-        </p:nvSpPr>
-        <p:spPr>
-          <a:xfrm>
-            <a:off x="6735927" y="3156966"/>
-            <a:ext cx="4632807" cy="2171700"/>
-          </a:xfrm>
-          <a:prstGeom prst="rect">
-            <a:avLst/>
-          </a:prstGeom>
-          <a:noFill/>
-        </p:spPr>
-        <p:txBody>
-          <a:bodyPr wrap="square" anchor="t"/>
-          <a:lstStyle/>
-          <a:p>
-            <a:pPr algn="l" eaLnBrk="0" marL="171450" indent="-171450">
-              <a:lnSpc>
-                <a:spcPct val="110000"/>
-              </a:lnSpc>
-              <a:spcAft>
-                <a:spcPts val="600"/>
-              </a:spcAft>
-            </a:pPr>
-            <a:r>
-              <a:rPr sz="1500" b="0">
-                <a:solidFill>
-                  <a:srgbClr val="1F2A3A"/>
-                </a:solidFill>
-                <a:latin typeface="맑은 고딕"/>
-                <a:ea typeface="맑은 고딕"/>
-                <a:cs typeface="맑은 고딕"/>
-              </a:rPr>
-              <a:t>• 대상: HYD-01 오일 쿨러 · 부품 쿨러 코어</a:t>
-            </a:r>
-          </a:p>
-          <a:p>
-            <a:pPr algn="l" eaLnBrk="0" marL="171450" indent="-171450">
-              <a:lnSpc>
-                <a:spcPct val="110000"/>
-              </a:lnSpc>
-              <a:spcAft>
-                <a:spcPts val="600"/>
-              </a:spcAft>
-            </a:pPr>
-            <a:r>
-              <a:rPr sz="1500" b="0">
-                <a:solidFill>
-                  <a:srgbClr val="1F2A3A"/>
-                </a:solidFill>
-                <a:latin typeface="맑은 고딕"/>
-                <a:ea typeface="맑은 고딕"/>
-                <a:cs typeface="맑은 고딕"/>
-              </a:rPr>
-              <a:t>• 관측: 11:13:18까지 30초 냉각 효율 46.2 %</a:t>
-            </a:r>
-          </a:p>
-          <a:p>
-            <a:pPr algn="l" eaLnBrk="0" marL="171450" indent="-171450">
-              <a:lnSpc>
-                <a:spcPct val="110000"/>
-              </a:lnSpc>
-              <a:spcAft>
-                <a:spcPts val="600"/>
-              </a:spcAft>
-            </a:pPr>
-            <a:r>
-              <a:rPr sz="1500" b="0">
-                <a:solidFill>
-                  <a:srgbClr val="1F2A3A"/>
-                </a:solidFill>
-                <a:latin typeface="맑은 고딕"/>
-                <a:ea typeface="맑은 고딕"/>
-                <a:cs typeface="맑은 고딕"/>
-              </a:rPr>
-              <a:t>• 이유: 핀 오염 기준에 맞고 팬 진동은 정상, 캐비닛 온도는 기준 아래</a:t>
-            </a:r>
-          </a:p>
-          <a:p>
-            <a:pPr algn="l" eaLnBrk="0" marL="171450" indent="-171450">
-              <a:lnSpc>
-                <a:spcPct val="110000"/>
-              </a:lnSpc>
-              <a:spcAft>
-                <a:spcPts val="600"/>
-              </a:spcAft>
-            </a:pPr>
-            <a:r>
-              <a:rPr sz="1500" b="0">
-                <a:solidFill>
-                  <a:srgbClr val="1F2A3A"/>
-                </a:solidFill>
-                <a:latin typeface="맑은 고딕"/>
-                <a:ea typeface="맑은 고딕"/>
-                <a:cs typeface="맑은 고딕"/>
-              </a:rPr>
-              <a:t>• 확인 항목: 핀 막힘 현장 확인</a:t>
-            </a:r>
-          </a:p>
-          <a:p>
-            <a:pPr algn="l" eaLnBrk="0" marL="171450" indent="-171450">
-              <a:lnSpc>
-                <a:spcPct val="110000"/>
-              </a:lnSpc>
-              <a:spcAft>
-                <a:spcPts val="600"/>
-              </a:spcAft>
-            </a:pPr>
-            <a:r>
-              <a:rPr sz="1500" b="0">
-                <a:solidFill>
-                  <a:srgbClr val="1F2A3A"/>
-                </a:solidFill>
-                <a:latin typeface="맑은 고딕"/>
-                <a:ea typeface="맑은 고딕"/>
-                <a:cs typeface="맑은 고딕"/>
-              </a:rPr>
-              <a:t>• 상태: 요청 초안 · 작업지시 아님</a:t>
-            </a:r>
-          </a:p>
-        </p:txBody>
-      </p:sp>
-      <p:sp>
-        <p:nvSpPr>
-          <p:cNvPr id="14" name="Rounded Rectangle 13"/>
+          <p:cNvPr id="17" name="Oval 16"/>
           <p:cNvSpPr/>
           <p:nvPr/>
         </p:nvSpPr>
         <p:spPr>
           <a:xfrm>
-            <a:off x="6781647" y="5420106"/>
-            <a:ext cx="1676399" cy="292608"/>
-          </a:xfrm>
-          <a:prstGeom prst="roundRect">
-            <a:avLst>
-              <a:gd name="adj" fmla="val 50000"/>
-            </a:avLst>
+            <a:off x="7164895" y="2729547"/>
+            <a:ext cx="731520" cy="731520"/>
+          </a:xfrm>
+          <a:prstGeom prst="ellipse">
+            <a:avLst/>
           </a:prstGeom>
           <a:solidFill>
             <a:srgbClr val="5CB8F2"/>
@@ -18931,33 +19606,60 @@
           </a:p>
         </p:txBody>
       </p:sp>
-      <p:sp>
-        <p:nvSpPr>
-          <p:cNvPr id="15" name="TextBox 14"/>
-          <p:cNvSpPr txBox="1"/>
-          <p:nvPr/>
-        </p:nvSpPr>
-        <p:spPr>
-          <a:xfrm>
-            <a:off x="6781647" y="5420106"/>
-            <a:ext cx="1676399" cy="292608"/>
-          </a:xfrm>
-          <a:prstGeom prst="rect">
-            <a:avLst/>
-          </a:prstGeom>
-          <a:noFill/>
-        </p:spPr>
-        <p:txBody>
-          <a:bodyPr wrap="square" anchor="ctr"/>
+      <p:pic>
+        <p:nvPicPr>
+          <p:cNvPr id="18" name="아이콘:search" descr="search_13294B_1.6.png"/>
+          <p:cNvPicPr>
+            <a:picLocks noChangeAspect="1"/>
+          </p:cNvPicPr>
+          <p:nvPr/>
+        </p:nvPicPr>
+        <p:blipFill>
+          <a:blip r:embed="rId5"/>
+          <a:stretch>
+            <a:fillRect/>
+          </a:stretch>
+        </p:blipFill>
+        <p:spPr>
+          <a:xfrm>
+            <a:off x="7318514" y="2883166"/>
+            <a:ext cx="424281" cy="424281"/>
+          </a:xfrm>
+          <a:prstGeom prst="rect">
+            <a:avLst/>
+          </a:prstGeom>
+        </p:spPr>
+      </p:pic>
+      <p:sp>
+        <p:nvSpPr>
+          <p:cNvPr id="19" name="TextBox 18"/>
+          <p:cNvSpPr txBox="1"/>
+          <p:nvPr/>
+        </p:nvSpPr>
+        <p:spPr>
+          <a:xfrm>
+            <a:off x="6361023" y="3534219"/>
+            <a:ext cx="2339263" cy="1828672"/>
+          </a:xfrm>
+          <a:prstGeom prst="rect">
+            <a:avLst/>
+          </a:prstGeom>
+          <a:noFill/>
+        </p:spPr>
+        <p:txBody>
+          <a:bodyPr wrap="square" anchor="t"/>
           <a:lstStyle/>
           <a:p>
             <a:pPr algn="ctr" eaLnBrk="0">
               <a:lnSpc>
                 <a:spcPct val="110000"/>
               </a:lnSpc>
-            </a:pPr>
-            <a:r>
-              <a:rPr sz="1200" b="1">
+              <a:spcAft>
+                <a:spcPts val="400"/>
+              </a:spcAft>
+            </a:pPr>
+            <a:r>
+              <a:rPr sz="1900" b="1">
                 <a:solidFill>
                   <a:srgbClr val="13294B"/>
                 </a:solidFill>
@@ -18965,23 +19667,65 @@
                 <a:ea typeface="맑은 고딕"/>
                 <a:cs typeface="맑은 고딕"/>
               </a:rPr>
-              <a:t>점검 담당자가 판단</a:t>
-            </a:r>
-          </a:p>
-        </p:txBody>
-      </p:sp>
-      <p:sp>
-        <p:nvSpPr>
-          <p:cNvPr id="16" name="Oval 15"/>
+              <a:t>호출의 입력</a:t>
+            </a:r>
+          </a:p>
+          <a:p>
+            <a:pPr algn="ctr" eaLnBrk="0">
+              <a:lnSpc>
+                <a:spcPct val="110000"/>
+              </a:lnSpc>
+              <a:spcAft>
+                <a:spcPts val="400"/>
+              </a:spcAft>
+            </a:pPr>
+            <a:r>
+              <a:rPr sz="1550" b="0">
+                <a:solidFill>
+                  <a:srgbClr val="1F2A3A"/>
+                </a:solidFill>
+                <a:latin typeface="맑은 고딕"/>
+                <a:ea typeface="맑은 고딕"/>
+                <a:cs typeface="맑은 고딕"/>
+              </a:rPr>
+              <a:t>설비 · 경보 번호가</a:t>
+            </a:r>
+          </a:p>
+          <a:p>
+            <a:pPr algn="ctr" eaLnBrk="0">
+              <a:lnSpc>
+                <a:spcPct val="110000"/>
+              </a:lnSpc>
+              <a:spcAft>
+                <a:spcPts val="400"/>
+              </a:spcAft>
+            </a:pPr>
+            <a:r>
+              <a:rPr sz="1550" b="0">
+                <a:solidFill>
+                  <a:srgbClr val="1F2A3A"/>
+                </a:solidFill>
+                <a:latin typeface="맑은 고딕"/>
+                <a:ea typeface="맑은 고딕"/>
+                <a:cs typeface="맑은 고딕"/>
+              </a:rPr>
+              <a:t>이 경보와 같은가</a:t>
+            </a:r>
+          </a:p>
+        </p:txBody>
+      </p:sp>
+      <p:sp>
+        <p:nvSpPr>
+          <p:cNvPr id="20" name="Right Arrow 19"/>
           <p:cNvSpPr/>
           <p:nvPr/>
         </p:nvSpPr>
         <p:spPr>
           <a:xfrm>
-            <a:off x="5821527" y="3717036"/>
-            <a:ext cx="548640" cy="548640"/>
-          </a:xfrm>
-          <a:prstGeom prst="ellipse">
+            <a:off x="8837447" y="3854196"/>
+            <a:ext cx="256031" cy="274320"/>
+          </a:xfrm>
+          <a:prstGeom prst="rightArrow">
             <a:avLst/>
           </a:prstGeom>
           <a:solidFill>
@@ -19001,39 +19745,168 @@
       </p:sp>
       <p:sp>
         <p:nvSpPr>
-          <p:cNvPr id="17" name="TextBox 16"/>
-          <p:cNvSpPr txBox="1"/>
-          <p:nvPr/>
-        </p:nvSpPr>
-        <p:spPr>
-          <a:xfrm>
-            <a:off x="5821527" y="3717036"/>
-            <a:ext cx="548640" cy="548640"/>
-          </a:xfrm>
-          <a:prstGeom prst="rect">
-            <a:avLst/>
-          </a:prstGeom>
-          <a:noFill/>
-        </p:spPr>
-        <p:txBody>
-          <a:bodyPr wrap="square" anchor="ctr"/>
+          <p:cNvPr id="21" name="Rounded Rectangle 20"/>
+          <p:cNvSpPr/>
+          <p:nvPr/>
+        </p:nvSpPr>
+        <p:spPr>
+          <a:xfrm>
+            <a:off x="9157487" y="2546667"/>
+            <a:ext cx="2485567" cy="2889376"/>
+          </a:xfrm>
+          <a:prstGeom prst="roundRect">
+            <a:avLst>
+              <a:gd name="adj" fmla="val 5000"/>
+            </a:avLst>
+          </a:prstGeom>
+          <a:solidFill>
+            <a:srgbClr val="F3F6F9"/>
+          </a:solidFill>
+          <a:ln>
+            <a:noFill/>
+          </a:ln>
+        </p:spPr>
+        <p:txBody>
+          <a:bodyPr rtlCol="0" anchor="ctr"/>
+          <a:lstStyle/>
+          <a:p>
+            <a:pPr algn="ctr"/>
+          </a:p>
+        </p:txBody>
+      </p:sp>
+      <p:sp>
+        <p:nvSpPr>
+          <p:cNvPr id="22" name="Oval 21"/>
+          <p:cNvSpPr/>
+          <p:nvPr/>
+        </p:nvSpPr>
+        <p:spPr>
+          <a:xfrm>
+            <a:off x="10034511" y="2729547"/>
+            <a:ext cx="731520" cy="731520"/>
+          </a:xfrm>
+          <a:prstGeom prst="ellipse">
+            <a:avLst/>
+          </a:prstGeom>
+          <a:solidFill>
+            <a:srgbClr val="FFFFFF"/>
+          </a:solidFill>
+          <a:ln>
+            <a:noFill/>
+          </a:ln>
+        </p:spPr>
+        <p:txBody>
+          <a:bodyPr rtlCol="0" anchor="ctr"/>
+          <a:lstStyle/>
+          <a:p>
+            <a:pPr algn="ctr"/>
+          </a:p>
+        </p:txBody>
+      </p:sp>
+      <p:pic>
+        <p:nvPicPr>
+          <p:cNvPr id="23" name="아이콘:clock" descr="clock_13294B_1.6.png"/>
+          <p:cNvPicPr>
+            <a:picLocks noChangeAspect="1"/>
+          </p:cNvPicPr>
+          <p:nvPr/>
+        </p:nvPicPr>
+        <p:blipFill>
+          <a:blip r:embed="rId6"/>
+          <a:stretch>
+            <a:fillRect/>
+          </a:stretch>
+        </p:blipFill>
+        <p:spPr>
+          <a:xfrm>
+            <a:off x="10188130" y="2883166"/>
+            <a:ext cx="424281" cy="424281"/>
+          </a:xfrm>
+          <a:prstGeom prst="rect">
+            <a:avLst/>
+          </a:prstGeom>
+        </p:spPr>
+      </p:pic>
+      <p:sp>
+        <p:nvSpPr>
+          <p:cNvPr id="24" name="TextBox 23"/>
+          <p:cNvSpPr txBox="1"/>
+          <p:nvPr/>
+        </p:nvSpPr>
+        <p:spPr>
+          <a:xfrm>
+            <a:off x="9230639" y="3534219"/>
+            <a:ext cx="2339263" cy="1828672"/>
+          </a:xfrm>
+          <a:prstGeom prst="rect">
+            <a:avLst/>
+          </a:prstGeom>
+          <a:noFill/>
+        </p:spPr>
+        <p:txBody>
+          <a:bodyPr wrap="square" anchor="t"/>
           <a:lstStyle/>
           <a:p>
             <a:pPr algn="ctr" eaLnBrk="0">
               <a:lnSpc>
                 <a:spcPct val="110000"/>
               </a:lnSpc>
-            </a:pPr>
-            <a:r>
-              <a:rPr sz="1400" b="1">
-                <a:solidFill>
-                  <a:srgbClr val="FFFFFF"/>
-                </a:solidFill>
-                <a:latin typeface="맑은 고딕"/>
-                <a:ea typeface="맑은 고딕"/>
-                <a:cs typeface="맑은 고딕"/>
-              </a:rPr>
-              <a:t>vs</a:t>
+              <a:spcAft>
+                <a:spcPts val="400"/>
+              </a:spcAft>
+            </a:pPr>
+            <a:r>
+              <a:rPr sz="1900" b="1">
+                <a:solidFill>
+                  <a:srgbClr val="13294B"/>
+                </a:solidFill>
+                <a:latin typeface="맑은 고딕"/>
+                <a:ea typeface="맑은 고딕"/>
+                <a:cs typeface="맑은 고딕"/>
+              </a:rPr>
+              <a:t>관측 시각 · 원천</a:t>
+            </a:r>
+          </a:p>
+          <a:p>
+            <a:pPr algn="ctr" eaLnBrk="0">
+              <a:lnSpc>
+                <a:spcPct val="110000"/>
+              </a:lnSpc>
+              <a:spcAft>
+                <a:spcPts val="400"/>
+              </a:spcAft>
+            </a:pPr>
+            <a:r>
+              <a:rPr sz="1550" b="0">
+                <a:solidFill>
+                  <a:srgbClr val="1F2A3A"/>
+                </a:solidFill>
+                <a:latin typeface="맑은 고딕"/>
+                <a:ea typeface="맑은 고딕"/>
+                <a:cs typeface="맑은 고딕"/>
+              </a:rPr>
+              <a:t>30초 구간 · 시계열 DB</a:t>
+            </a:r>
+          </a:p>
+          <a:p>
+            <a:pPr algn="ctr" eaLnBrk="0">
+              <a:lnSpc>
+                <a:spcPct val="110000"/>
+              </a:lnSpc>
+              <a:spcAft>
+                <a:spcPts val="400"/>
+              </a:spcAft>
+            </a:pPr>
+            <a:r>
+              <a:rPr sz="1550" b="0">
+                <a:solidFill>
+                  <a:srgbClr val="1F2A3A"/>
+                </a:solidFill>
+                <a:latin typeface="맑은 고딕"/>
+                <a:ea typeface="맑은 고딕"/>
+                <a:cs typeface="맑은 고딕"/>
+              </a:rPr>
+              <a:t>묵은 값이 아닌가</a:t>
             </a:r>
           </a:p>
         </p:txBody>
@@ -19098,7 +19971,7 @@
                 <a:ea typeface="맑은 고딕"/>
                 <a:cs typeface="맑은 고딕"/>
               </a:rPr>
-              <a:t>오늘의 실습과 남길 결과</a:t>
+              <a:t>응용: 단정한 초안과 근거 있는 점검 요청 초안</a:t>
             </a:r>
           </a:p>
         </p:txBody>
@@ -19137,7 +20010,7 @@
                 <a:ea typeface="맑은 고딕"/>
                 <a:cs typeface="맑은 고딕"/>
               </a:rPr>
-              <a:t>이론 뒤 세 교시는 원인과 점검 순서 기능을 만들고, 설비 · 문서 · 부품 근거를 이은 뒤, 점검 요청 초안을 검증한다.</a:t>
+              <a:t>점검 요청 초안은 가설과 확인을 가르고 작업지시를 대신하지 않아야, 받는 사람이 무엇을 확인할지 정할 수 있다.</a:t>
             </a:r>
           </a:p>
         </p:txBody>
@@ -19218,13 +20091,524 @@
         </p:nvSpPr>
         <p:spPr>
           <a:xfrm>
-            <a:off x="548640" y="2418587"/>
-            <a:ext cx="11094415" cy="347472"/>
+            <a:off x="548640" y="2105406"/>
+            <a:ext cx="5181447" cy="3771900"/>
           </a:xfrm>
           <a:prstGeom prst="roundRect">
             <a:avLst>
-              <a:gd name="adj" fmla="val 12000"/>
+              <a:gd name="adj" fmla="val 4000"/>
             </a:avLst>
+          </a:prstGeom>
+          <a:solidFill>
+            <a:srgbClr val="F3F6F9"/>
+          </a:solidFill>
+          <a:ln>
+            <a:noFill/>
+          </a:ln>
+        </p:spPr>
+        <p:txBody>
+          <a:bodyPr rtlCol="0" anchor="ctr"/>
+          <a:lstStyle/>
+          <a:p>
+            <a:pPr algn="ctr"/>
+          </a:p>
+        </p:txBody>
+      </p:sp>
+      <p:sp>
+        <p:nvSpPr>
+          <p:cNvPr id="7" name="TextBox 6"/>
+          <p:cNvSpPr txBox="1"/>
+          <p:nvPr/>
+        </p:nvSpPr>
+        <p:spPr>
+          <a:xfrm>
+            <a:off x="822959" y="2306574"/>
+            <a:ext cx="4724247" cy="731520"/>
+          </a:xfrm>
+          <a:prstGeom prst="rect">
+            <a:avLst/>
+          </a:prstGeom>
+          <a:noFill/>
+        </p:spPr>
+        <p:txBody>
+          <a:bodyPr wrap="square" anchor="ctr"/>
+          <a:lstStyle/>
+          <a:p>
+            <a:pPr algn="l" eaLnBrk="0">
+              <a:lnSpc>
+                <a:spcPct val="110000"/>
+              </a:lnSpc>
+            </a:pPr>
+            <a:r>
+              <a:rPr sz="2000" b="1">
+                <a:solidFill>
+                  <a:srgbClr val="13294B"/>
+                </a:solidFill>
+                <a:latin typeface="맑은 고딕"/>
+                <a:ea typeface="맑은 고딕"/>
+                <a:cs typeface="맑은 고딕"/>
+              </a:rPr>
+              <a:t>단정한 초안</a:t>
+            </a:r>
+          </a:p>
+        </p:txBody>
+      </p:sp>
+      <p:sp>
+        <p:nvSpPr>
+          <p:cNvPr id="8" name="TextBox 7"/>
+          <p:cNvSpPr txBox="1"/>
+          <p:nvPr/>
+        </p:nvSpPr>
+        <p:spPr>
+          <a:xfrm>
+            <a:off x="822959" y="3156966"/>
+            <a:ext cx="4632807" cy="2171700"/>
+          </a:xfrm>
+          <a:prstGeom prst="rect">
+            <a:avLst/>
+          </a:prstGeom>
+          <a:noFill/>
+        </p:spPr>
+        <p:txBody>
+          <a:bodyPr wrap="square" anchor="t"/>
+          <a:lstStyle/>
+          <a:p>
+            <a:pPr algn="l" eaLnBrk="0" marL="171450" indent="-171450">
+              <a:lnSpc>
+                <a:spcPct val="110000"/>
+              </a:lnSpc>
+              <a:spcAft>
+                <a:spcPts val="600"/>
+              </a:spcAft>
+            </a:pPr>
+            <a:r>
+              <a:rPr sz="1500" b="0">
+                <a:solidFill>
+                  <a:srgbClr val="1F2A3A"/>
+                </a:solidFill>
+                <a:latin typeface="맑은 고딕"/>
+                <a:ea typeface="맑은 고딕"/>
+                <a:cs typeface="맑은 고딕"/>
+              </a:rPr>
+              <a:t>• 원인: 쿨러 핀 오염(확정)</a:t>
+            </a:r>
+          </a:p>
+          <a:p>
+            <a:pPr algn="l" eaLnBrk="0" marL="171450" indent="-171450">
+              <a:lnSpc>
+                <a:spcPct val="110000"/>
+              </a:lnSpc>
+              <a:spcAft>
+                <a:spcPts val="600"/>
+              </a:spcAft>
+            </a:pPr>
+            <a:r>
+              <a:rPr sz="1500" b="0">
+                <a:solidFill>
+                  <a:srgbClr val="1F2A3A"/>
+                </a:solidFill>
+                <a:latin typeface="맑은 고딕"/>
+                <a:ea typeface="맑은 고딕"/>
+                <a:cs typeface="맑은 고딕"/>
+              </a:rPr>
+              <a:t>• 근거: 유온이 올랐다</a:t>
+            </a:r>
+          </a:p>
+          <a:p>
+            <a:pPr algn="l" eaLnBrk="0" marL="171450" indent="-171450">
+              <a:lnSpc>
+                <a:spcPct val="110000"/>
+              </a:lnSpc>
+              <a:spcAft>
+                <a:spcPts val="600"/>
+              </a:spcAft>
+            </a:pPr>
+            <a:r>
+              <a:rPr sz="1500" b="0">
+                <a:solidFill>
+                  <a:srgbClr val="1F2A3A"/>
+                </a:solidFill>
+                <a:latin typeface="맑은 고딕"/>
+                <a:ea typeface="맑은 고딕"/>
+                <a:cs typeface="맑은 고딕"/>
+              </a:rPr>
+              <a:t>• 조치: 핀 세척 작업지시를 발행했다</a:t>
+            </a:r>
+          </a:p>
+          <a:p>
+            <a:pPr algn="l" eaLnBrk="0" marL="171450" indent="-171450">
+              <a:lnSpc>
+                <a:spcPct val="110000"/>
+              </a:lnSpc>
+              <a:spcAft>
+                <a:spcPts val="600"/>
+              </a:spcAft>
+            </a:pPr>
+            <a:r>
+              <a:rPr sz="1500" b="0">
+                <a:solidFill>
+                  <a:srgbClr val="1F2A3A"/>
+                </a:solidFill>
+                <a:latin typeface="맑은 고딕"/>
+                <a:ea typeface="맑은 고딕"/>
+                <a:cs typeface="맑은 고딕"/>
+              </a:rPr>
+              <a:t>• 관측 시각 · 다른 후보 없음</a:t>
+            </a:r>
+          </a:p>
+        </p:txBody>
+      </p:sp>
+      <p:sp>
+        <p:nvSpPr>
+          <p:cNvPr id="9" name="Rounded Rectangle 8"/>
+          <p:cNvSpPr/>
+          <p:nvPr/>
+        </p:nvSpPr>
+        <p:spPr>
+          <a:xfrm>
+            <a:off x="868680" y="5420106"/>
+            <a:ext cx="1722120" cy="292608"/>
+          </a:xfrm>
+          <a:prstGeom prst="roundRect">
+            <a:avLst>
+              <a:gd name="adj" fmla="val 50000"/>
+            </a:avLst>
+          </a:prstGeom>
+          <a:solidFill>
+            <a:srgbClr val="D3D9E1"/>
+          </a:solidFill>
+          <a:ln>
+            <a:noFill/>
+          </a:ln>
+        </p:spPr>
+        <p:txBody>
+          <a:bodyPr rtlCol="0" anchor="ctr"/>
+          <a:lstStyle/>
+          <a:p>
+            <a:pPr algn="ctr"/>
+          </a:p>
+        </p:txBody>
+      </p:sp>
+      <p:sp>
+        <p:nvSpPr>
+          <p:cNvPr id="10" name="TextBox 9"/>
+          <p:cNvSpPr txBox="1"/>
+          <p:nvPr/>
+        </p:nvSpPr>
+        <p:spPr>
+          <a:xfrm>
+            <a:off x="868680" y="5420106"/>
+            <a:ext cx="1722120" cy="292608"/>
+          </a:xfrm>
+          <a:prstGeom prst="rect">
+            <a:avLst/>
+          </a:prstGeom>
+          <a:noFill/>
+        </p:spPr>
+        <p:txBody>
+          <a:bodyPr wrap="square" anchor="ctr"/>
+          <a:lstStyle/>
+          <a:p>
+            <a:pPr algn="ctr" eaLnBrk="0">
+              <a:lnSpc>
+                <a:spcPct val="110000"/>
+              </a:lnSpc>
+            </a:pPr>
+            <a:r>
+              <a:rPr sz="1200" b="1">
+                <a:solidFill>
+                  <a:srgbClr val="13294B"/>
+                </a:solidFill>
+                <a:latin typeface="맑은 고딕"/>
+                <a:ea typeface="맑은 고딕"/>
+                <a:cs typeface="맑은 고딕"/>
+              </a:rPr>
+              <a:t>가설 · 권한을 넘음</a:t>
+            </a:r>
+          </a:p>
+        </p:txBody>
+      </p:sp>
+      <p:sp>
+        <p:nvSpPr>
+          <p:cNvPr id="11" name="Rounded Rectangle 10"/>
+          <p:cNvSpPr/>
+          <p:nvPr/>
+        </p:nvSpPr>
+        <p:spPr>
+          <a:xfrm>
+            <a:off x="6461607" y="2105406"/>
+            <a:ext cx="5181447" cy="3771900"/>
+          </a:xfrm>
+          <a:prstGeom prst="roundRect">
+            <a:avLst>
+              <a:gd name="adj" fmla="val 4000"/>
+            </a:avLst>
+          </a:prstGeom>
+          <a:solidFill>
+            <a:srgbClr val="E7F3FD"/>
+          </a:solidFill>
+          <a:ln w="28575">
+            <a:solidFill>
+              <a:srgbClr val="5CB8F2"/>
+            </a:solidFill>
+          </a:ln>
+        </p:spPr>
+        <p:txBody>
+          <a:bodyPr rtlCol="0" anchor="ctr"/>
+          <a:lstStyle/>
+          <a:p>
+            <a:pPr algn="ctr"/>
+          </a:p>
+        </p:txBody>
+      </p:sp>
+      <p:sp>
+        <p:nvSpPr>
+          <p:cNvPr id="12" name="TextBox 11"/>
+          <p:cNvSpPr txBox="1"/>
+          <p:nvPr/>
+        </p:nvSpPr>
+        <p:spPr>
+          <a:xfrm>
+            <a:off x="6735927" y="2306574"/>
+            <a:ext cx="4724247" cy="731520"/>
+          </a:xfrm>
+          <a:prstGeom prst="rect">
+            <a:avLst/>
+          </a:prstGeom>
+          <a:noFill/>
+        </p:spPr>
+        <p:txBody>
+          <a:bodyPr wrap="square" anchor="ctr"/>
+          <a:lstStyle/>
+          <a:p>
+            <a:pPr algn="l" eaLnBrk="0">
+              <a:lnSpc>
+                <a:spcPct val="110000"/>
+              </a:lnSpc>
+            </a:pPr>
+            <a:r>
+              <a:rPr sz="2000" b="1">
+                <a:solidFill>
+                  <a:srgbClr val="13294B"/>
+                </a:solidFill>
+                <a:latin typeface="맑은 고딕"/>
+                <a:ea typeface="맑은 고딕"/>
+                <a:cs typeface="맑은 고딕"/>
+              </a:rPr>
+              <a:t>근거 있는 점검 요청 초안</a:t>
+            </a:r>
+          </a:p>
+        </p:txBody>
+      </p:sp>
+      <p:sp>
+        <p:nvSpPr>
+          <p:cNvPr id="13" name="TextBox 12"/>
+          <p:cNvSpPr txBox="1"/>
+          <p:nvPr/>
+        </p:nvSpPr>
+        <p:spPr>
+          <a:xfrm>
+            <a:off x="6735927" y="3156966"/>
+            <a:ext cx="4632807" cy="2171700"/>
+          </a:xfrm>
+          <a:prstGeom prst="rect">
+            <a:avLst/>
+          </a:prstGeom>
+          <a:noFill/>
+        </p:spPr>
+        <p:txBody>
+          <a:bodyPr wrap="square" anchor="t"/>
+          <a:lstStyle/>
+          <a:p>
+            <a:pPr algn="l" eaLnBrk="0" marL="171450" indent="-171450">
+              <a:lnSpc>
+                <a:spcPct val="110000"/>
+              </a:lnSpc>
+              <a:spcAft>
+                <a:spcPts val="600"/>
+              </a:spcAft>
+            </a:pPr>
+            <a:r>
+              <a:rPr sz="1500" b="0">
+                <a:solidFill>
+                  <a:srgbClr val="1F2A3A"/>
+                </a:solidFill>
+                <a:latin typeface="맑은 고딕"/>
+                <a:ea typeface="맑은 고딕"/>
+                <a:cs typeface="맑은 고딕"/>
+              </a:rPr>
+              <a:t>• 대상: HYD-01 오일 쿨러 · 부품 쿨러 코어</a:t>
+            </a:r>
+          </a:p>
+          <a:p>
+            <a:pPr algn="l" eaLnBrk="0" marL="171450" indent="-171450">
+              <a:lnSpc>
+                <a:spcPct val="110000"/>
+              </a:lnSpc>
+              <a:spcAft>
+                <a:spcPts val="600"/>
+              </a:spcAft>
+            </a:pPr>
+            <a:r>
+              <a:rPr sz="1500" b="0">
+                <a:solidFill>
+                  <a:srgbClr val="1F2A3A"/>
+                </a:solidFill>
+                <a:latin typeface="맑은 고딕"/>
+                <a:ea typeface="맑은 고딕"/>
+                <a:cs typeface="맑은 고딕"/>
+              </a:rPr>
+              <a:t>• 관측: 11:13:18까지 30초 냉각 효율 46.2 %</a:t>
+            </a:r>
+          </a:p>
+          <a:p>
+            <a:pPr algn="l" eaLnBrk="0" marL="171450" indent="-171450">
+              <a:lnSpc>
+                <a:spcPct val="110000"/>
+              </a:lnSpc>
+              <a:spcAft>
+                <a:spcPts val="600"/>
+              </a:spcAft>
+            </a:pPr>
+            <a:r>
+              <a:rPr sz="1500" b="0">
+                <a:solidFill>
+                  <a:srgbClr val="1F2A3A"/>
+                </a:solidFill>
+                <a:latin typeface="맑은 고딕"/>
+                <a:ea typeface="맑은 고딕"/>
+                <a:cs typeface="맑은 고딕"/>
+              </a:rPr>
+              <a:t>• 이유: 핀 오염 기준에 맞고 팬 진동은 정상, 캐비닛 온도는 기준 아래</a:t>
+            </a:r>
+          </a:p>
+          <a:p>
+            <a:pPr algn="l" eaLnBrk="0" marL="171450" indent="-171450">
+              <a:lnSpc>
+                <a:spcPct val="110000"/>
+              </a:lnSpc>
+              <a:spcAft>
+                <a:spcPts val="600"/>
+              </a:spcAft>
+            </a:pPr>
+            <a:r>
+              <a:rPr sz="1500" b="0">
+                <a:solidFill>
+                  <a:srgbClr val="1F2A3A"/>
+                </a:solidFill>
+                <a:latin typeface="맑은 고딕"/>
+                <a:ea typeface="맑은 고딕"/>
+                <a:cs typeface="맑은 고딕"/>
+              </a:rPr>
+              <a:t>• 확인 항목: 핀 막힘 현장 확인</a:t>
+            </a:r>
+          </a:p>
+          <a:p>
+            <a:pPr algn="l" eaLnBrk="0" marL="171450" indent="-171450">
+              <a:lnSpc>
+                <a:spcPct val="110000"/>
+              </a:lnSpc>
+              <a:spcAft>
+                <a:spcPts val="600"/>
+              </a:spcAft>
+            </a:pPr>
+            <a:r>
+              <a:rPr sz="1500" b="0">
+                <a:solidFill>
+                  <a:srgbClr val="1F2A3A"/>
+                </a:solidFill>
+                <a:latin typeface="맑은 고딕"/>
+                <a:ea typeface="맑은 고딕"/>
+                <a:cs typeface="맑은 고딕"/>
+              </a:rPr>
+              <a:t>• 상태: 요청 초안 · 작업지시 아님</a:t>
+            </a:r>
+          </a:p>
+        </p:txBody>
+      </p:sp>
+      <p:sp>
+        <p:nvSpPr>
+          <p:cNvPr id="14" name="Rounded Rectangle 13"/>
+          <p:cNvSpPr/>
+          <p:nvPr/>
+        </p:nvSpPr>
+        <p:spPr>
+          <a:xfrm>
+            <a:off x="6781647" y="5420106"/>
+            <a:ext cx="1676399" cy="292608"/>
+          </a:xfrm>
+          <a:prstGeom prst="roundRect">
+            <a:avLst>
+              <a:gd name="adj" fmla="val 50000"/>
+            </a:avLst>
+          </a:prstGeom>
+          <a:solidFill>
+            <a:srgbClr val="5CB8F2"/>
+          </a:solidFill>
+          <a:ln>
+            <a:noFill/>
+          </a:ln>
+        </p:spPr>
+        <p:txBody>
+          <a:bodyPr rtlCol="0" anchor="ctr"/>
+          <a:lstStyle/>
+          <a:p>
+            <a:pPr algn="ctr"/>
+          </a:p>
+        </p:txBody>
+      </p:sp>
+      <p:sp>
+        <p:nvSpPr>
+          <p:cNvPr id="15" name="TextBox 14"/>
+          <p:cNvSpPr txBox="1"/>
+          <p:nvPr/>
+        </p:nvSpPr>
+        <p:spPr>
+          <a:xfrm>
+            <a:off x="6781647" y="5420106"/>
+            <a:ext cx="1676399" cy="292608"/>
+          </a:xfrm>
+          <a:prstGeom prst="rect">
+            <a:avLst/>
+          </a:prstGeom>
+          <a:noFill/>
+        </p:spPr>
+        <p:txBody>
+          <a:bodyPr wrap="square" anchor="ctr"/>
+          <a:lstStyle/>
+          <a:p>
+            <a:pPr algn="ctr" eaLnBrk="0">
+              <a:lnSpc>
+                <a:spcPct val="110000"/>
+              </a:lnSpc>
+            </a:pPr>
+            <a:r>
+              <a:rPr sz="1200" b="1">
+                <a:solidFill>
+                  <a:srgbClr val="13294B"/>
+                </a:solidFill>
+                <a:latin typeface="맑은 고딕"/>
+                <a:ea typeface="맑은 고딕"/>
+                <a:cs typeface="맑은 고딕"/>
+              </a:rPr>
+              <a:t>점검 담당자가 판단</a:t>
+            </a:r>
+          </a:p>
+        </p:txBody>
+      </p:sp>
+      <p:sp>
+        <p:nvSpPr>
+          <p:cNvPr id="16" name="Oval 15"/>
+          <p:cNvSpPr/>
+          <p:nvPr/>
+        </p:nvSpPr>
+        <p:spPr>
+          <a:xfrm>
+            <a:off x="5821527" y="3717036"/>
+            <a:ext cx="548640" cy="548640"/>
+          </a:xfrm>
+          <a:prstGeom prst="ellipse">
+            <a:avLst/>
           </a:prstGeom>
           <a:solidFill>
             <a:srgbClr val="13294B"/>
@@ -19243,13 +20627,255 @@
       </p:sp>
       <p:sp>
         <p:nvSpPr>
+          <p:cNvPr id="17" name="TextBox 16"/>
+          <p:cNvSpPr txBox="1"/>
+          <p:nvPr/>
+        </p:nvSpPr>
+        <p:spPr>
+          <a:xfrm>
+            <a:off x="5821527" y="3717036"/>
+            <a:ext cx="548640" cy="548640"/>
+          </a:xfrm>
+          <a:prstGeom prst="rect">
+            <a:avLst/>
+          </a:prstGeom>
+          <a:noFill/>
+        </p:spPr>
+        <p:txBody>
+          <a:bodyPr wrap="square" anchor="ctr"/>
+          <a:lstStyle/>
+          <a:p>
+            <a:pPr algn="ctr" eaLnBrk="0">
+              <a:lnSpc>
+                <a:spcPct val="110000"/>
+              </a:lnSpc>
+            </a:pPr>
+            <a:r>
+              <a:rPr sz="1400" b="1">
+                <a:solidFill>
+                  <a:srgbClr val="FFFFFF"/>
+                </a:solidFill>
+                <a:latin typeface="맑은 고딕"/>
+                <a:ea typeface="맑은 고딕"/>
+                <a:cs typeface="맑은 고딕"/>
+              </a:rPr>
+              <a:t>vs</a:t>
+            </a:r>
+          </a:p>
+        </p:txBody>
+      </p:sp>
+    </p:spTree>
+  </p:cSld>
+  <p:clrMapOvr>
+    <a:masterClrMapping/>
+  </p:clrMapOvr>
+</p:sld>
+</file>
+
+<file path=ppt/slides/slide26.xml><?xml version="1.0" encoding="utf-8"?>
+<p:sld xmlns:a="http://schemas.openxmlformats.org/drawingml/2006/main" xmlns:p="http://schemas.openxmlformats.org/presentationml/2006/main" xmlns:r="http://schemas.openxmlformats.org/officeDocument/2006/relationships">
+  <p:cSld>
+    <p:bg>
+      <p:bgPr>
+        <a:solidFill>
+          <a:srgbClr val="FFFFFF"/>
+        </a:solidFill>
+        <a:effectLst/>
+      </p:bgPr>
+    </p:bg>
+    <p:spTree>
+      <p:nvGrpSpPr>
+        <p:cNvPr id="1" name=""/>
+        <p:cNvGrpSpPr/>
+        <p:nvPr/>
+      </p:nvGrpSpPr>
+      <p:grpSpPr/>
+      <p:sp>
+        <p:nvSpPr>
+          <p:cNvPr id="2" name="TextBox 1"/>
+          <p:cNvSpPr txBox="1"/>
+          <p:nvPr/>
+        </p:nvSpPr>
+        <p:spPr>
+          <a:xfrm>
+            <a:off x="457200" y="329184"/>
+            <a:ext cx="11277295" cy="603504"/>
+          </a:xfrm>
+          <a:prstGeom prst="rect">
+            <a:avLst/>
+          </a:prstGeom>
+          <a:noFill/>
+        </p:spPr>
+        <p:txBody>
+          <a:bodyPr wrap="square" anchor="ctr"/>
+          <a:lstStyle/>
+          <a:p>
+            <a:pPr algn="l" eaLnBrk="0">
+              <a:lnSpc>
+                <a:spcPct val="110000"/>
+              </a:lnSpc>
+            </a:pPr>
+            <a:r>
+              <a:rPr sz="2800" b="1">
+                <a:solidFill>
+                  <a:srgbClr val="13294B"/>
+                </a:solidFill>
+                <a:latin typeface="맑은 고딕"/>
+                <a:ea typeface="맑은 고딕"/>
+                <a:cs typeface="맑은 고딕"/>
+              </a:rPr>
+              <a:t>쿨러 경보의 점검 요청으로 되짚는 근거와 경계</a:t>
+            </a:r>
+          </a:p>
+        </p:txBody>
+      </p:sp>
+      <p:sp>
+        <p:nvSpPr>
+          <p:cNvPr id="3" name="TextBox 2"/>
+          <p:cNvSpPr txBox="1"/>
+          <p:nvPr/>
+        </p:nvSpPr>
+        <p:spPr>
+          <a:xfrm>
+            <a:off x="457200" y="932688"/>
+            <a:ext cx="11277295" cy="420624"/>
+          </a:xfrm>
+          <a:prstGeom prst="rect">
+            <a:avLst/>
+          </a:prstGeom>
+          <a:noFill/>
+        </p:spPr>
+        <p:txBody>
+          <a:bodyPr wrap="square" anchor="ctr"/>
+          <a:lstStyle/>
+          <a:p>
+            <a:pPr algn="l" eaLnBrk="0">
+              <a:lnSpc>
+                <a:spcPct val="110000"/>
+              </a:lnSpc>
+            </a:pPr>
+            <a:r>
+              <a:rPr sz="1600" b="0">
+                <a:solidFill>
+                  <a:srgbClr val="556175"/>
+                </a:solidFill>
+                <a:latin typeface="맑은 고딕"/>
+                <a:ea typeface="맑은 고딕"/>
+                <a:cs typeface="맑은 고딕"/>
+              </a:rPr>
+              <a:t>점검 요청 한 건을 만드는 동안 물음마다 답이 놓인 자리가 달라, 그 자리를 가려야 가설과 확인이 섞이지 않는다.</a:t>
+            </a:r>
+          </a:p>
+        </p:txBody>
+      </p:sp>
+      <p:sp>
+        <p:nvSpPr>
+          <p:cNvPr id="4" name="Rectangle 3"/>
+          <p:cNvSpPr/>
+          <p:nvPr/>
+        </p:nvSpPr>
+        <p:spPr>
+          <a:xfrm>
+            <a:off x="548640" y="1408176"/>
+            <a:ext cx="11094415" cy="18288"/>
+          </a:xfrm>
+          <a:prstGeom prst="rect">
+            <a:avLst/>
+          </a:prstGeom>
+          <a:solidFill>
+            <a:srgbClr val="D3D9E1"/>
+          </a:solidFill>
+          <a:ln>
+            <a:noFill/>
+          </a:ln>
+        </p:spPr>
+        <p:txBody>
+          <a:bodyPr rtlCol="0" anchor="ctr"/>
+          <a:lstStyle/>
+          <a:p>
+            <a:pPr algn="ctr"/>
+          </a:p>
+        </p:txBody>
+      </p:sp>
+      <p:sp>
+        <p:nvSpPr>
+          <p:cNvPr id="5" name="TextBox 4"/>
+          <p:cNvSpPr txBox="1"/>
+          <p:nvPr/>
+        </p:nvSpPr>
+        <p:spPr>
+          <a:xfrm>
+            <a:off x="10911535" y="6473952"/>
+            <a:ext cx="822960" cy="274320"/>
+          </a:xfrm>
+          <a:prstGeom prst="rect">
+            <a:avLst/>
+          </a:prstGeom>
+          <a:noFill/>
+        </p:spPr>
+        <p:txBody>
+          <a:bodyPr wrap="square" anchor="t"/>
+          <a:lstStyle/>
+          <a:p>
+            <a:pPr algn="r" eaLnBrk="0">
+              <a:lnSpc>
+                <a:spcPct val="110000"/>
+              </a:lnSpc>
+            </a:pPr>
+            <a:r>
+              <a:rPr sz="1000" b="0">
+                <a:solidFill>
+                  <a:srgbClr val="556175"/>
+                </a:solidFill>
+                <a:latin typeface="맑은 고딕"/>
+                <a:ea typeface="맑은 고딕"/>
+                <a:cs typeface="맑은 고딕"/>
+              </a:rPr>
+              <a:t>26</a:t>
+            </a:r>
+          </a:p>
+        </p:txBody>
+      </p:sp>
+      <p:sp>
+        <p:nvSpPr>
+          <p:cNvPr id="6" name="Rounded Rectangle 5"/>
+          <p:cNvSpPr/>
+          <p:nvPr/>
+        </p:nvSpPr>
+        <p:spPr>
+          <a:xfrm>
+            <a:off x="548640" y="1627632"/>
+            <a:ext cx="11094415" cy="347472"/>
+          </a:xfrm>
+          <a:prstGeom prst="roundRect">
+            <a:avLst>
+              <a:gd name="adj" fmla="val 12000"/>
+            </a:avLst>
+          </a:prstGeom>
+          <a:solidFill>
+            <a:srgbClr val="13294B"/>
+          </a:solidFill>
+          <a:ln>
+            <a:noFill/>
+          </a:ln>
+        </p:spPr>
+        <p:txBody>
+          <a:bodyPr rtlCol="0" anchor="ctr"/>
+          <a:lstStyle/>
+          <a:p>
+            <a:pPr algn="ctr"/>
+          </a:p>
+        </p:txBody>
+      </p:sp>
+      <p:sp>
+        <p:nvSpPr>
           <p:cNvPr id="7" name="TextBox 6"/>
           <p:cNvSpPr txBox="1"/>
           <p:nvPr/>
         </p:nvSpPr>
         <p:spPr>
           <a:xfrm>
-            <a:off x="685800" y="2418587"/>
+            <a:off x="685800" y="1627632"/>
             <a:ext cx="2514600" cy="347472"/>
           </a:xfrm>
           <a:prstGeom prst="rect">
@@ -19275,7 +20901,7 @@
                 <a:ea typeface="맑은 고딕"/>
                 <a:cs typeface="맑은 고딕"/>
               </a:rPr>
-              <a:t>교시</a:t>
+              <a:t>물음</a:t>
             </a:r>
           </a:p>
         </p:txBody>
@@ -19288,7 +20914,7 @@
         </p:nvSpPr>
         <p:spPr>
           <a:xfrm>
-            <a:off x="3200400" y="2418587"/>
+            <a:off x="3200400" y="1627632"/>
             <a:ext cx="6248095" cy="347472"/>
           </a:xfrm>
           <a:prstGeom prst="rect">
@@ -19314,7 +20940,7 @@
                 <a:ea typeface="맑은 고딕"/>
                 <a:cs typeface="맑은 고딕"/>
               </a:rPr>
-              <a:t>실습</a:t>
+              <a:t>답이 놓인 자리</a:t>
             </a:r>
           </a:p>
         </p:txBody>
@@ -19327,7 +20953,7 @@
         </p:nvSpPr>
         <p:spPr>
           <a:xfrm>
-            <a:off x="9448495" y="2418587"/>
+            <a:off x="9448495" y="1627632"/>
             <a:ext cx="2194560" cy="347472"/>
           </a:xfrm>
           <a:prstGeom prst="rect">
@@ -19353,7 +20979,7 @@
                 <a:ea typeface="맑은 고딕"/>
                 <a:cs typeface="맑은 고딕"/>
               </a:rPr>
-              <a:t>남길 결과</a:t>
+              <a:t>헷갈리기 쉬운 짝</a:t>
             </a:r>
           </a:p>
         </p:txBody>
@@ -19366,8 +20992,8 @@
         </p:nvSpPr>
         <p:spPr>
           <a:xfrm>
-            <a:off x="548640" y="2852927"/>
-            <a:ext cx="11094415" cy="850392"/>
+            <a:off x="548640" y="2061972"/>
+            <a:ext cx="11094415" cy="801014"/>
           </a:xfrm>
           <a:prstGeom prst="roundRect">
             <a:avLst>
@@ -19397,8 +21023,8 @@
         </p:nvSpPr>
         <p:spPr>
           <a:xfrm>
-            <a:off x="685800" y="2820923"/>
-            <a:ext cx="2514600" cy="914400"/>
+            <a:off x="685800" y="2029968"/>
+            <a:ext cx="2514600" cy="865022"/>
           </a:xfrm>
           <a:prstGeom prst="rect">
             <a:avLst/>
@@ -19423,7 +21049,7 @@
                 <a:ea typeface="맑은 고딕"/>
                 <a:cs typeface="맑은 고딕"/>
               </a:rPr>
-              <a:t>2교시</a:t>
+              <a:t>회의 후속에도 같은 에이전트를 옮겨 쓰나</a:t>
             </a:r>
           </a:p>
         </p:txBody>
@@ -19436,8 +21062,8 @@
         </p:nvSpPr>
         <p:spPr>
           <a:xfrm>
-            <a:off x="3200400" y="2820923"/>
-            <a:ext cx="6156655" cy="914400"/>
+            <a:off x="3200400" y="2029968"/>
+            <a:ext cx="6156655" cy="865022"/>
           </a:xfrm>
           <a:prstGeom prst="rect">
             <a:avLst/>
@@ -19462,7 +21088,7 @@
                 <a:ea typeface="맑은 고딕"/>
                 <a:cs typeface="맑은 고딕"/>
               </a:rPr>
-              <a:t>설비 원인과 점검 순서 기능 만들기</a:t>
+              <a:t>활용마다 다른 입력 · 도구 · 결과 판정</a:t>
             </a:r>
           </a:p>
         </p:txBody>
@@ -19475,8 +21101,8 @@
         </p:nvSpPr>
         <p:spPr>
           <a:xfrm>
-            <a:off x="9448495" y="2820923"/>
-            <a:ext cx="2103120" cy="914400"/>
+            <a:off x="9448495" y="2029968"/>
+            <a:ext cx="2103120" cy="865022"/>
           </a:xfrm>
           <a:prstGeom prst="rect">
             <a:avLst/>
@@ -19501,7 +21127,7 @@
                 <a:ea typeface="맑은 고딕"/>
                 <a:cs typeface="맑은 고딕"/>
               </a:rPr>
-              <a:t>원인 후보와 근거,</a:t>
+              <a:t>같은 실행 구조</a:t>
             </a:r>
           </a:p>
           <a:p>
@@ -19519,7 +21145,7 @@
                 <a:ea typeface="맑은 고딕"/>
                 <a:cs typeface="맑은 고딕"/>
               </a:rPr>
-              <a:t>미확인 표시</a:t>
+              <a:t>vs 같은 활용</a:t>
             </a:r>
           </a:p>
         </p:txBody>
@@ -19532,8 +21158,8 @@
         </p:nvSpPr>
         <p:spPr>
           <a:xfrm>
-            <a:off x="548640" y="3767327"/>
-            <a:ext cx="11094415" cy="850392"/>
+            <a:off x="548640" y="2926994"/>
+            <a:ext cx="11094415" cy="801014"/>
           </a:xfrm>
           <a:prstGeom prst="roundRect">
             <a:avLst>
@@ -19563,8 +21189,8 @@
         </p:nvSpPr>
         <p:spPr>
           <a:xfrm>
-            <a:off x="685800" y="3735323"/>
-            <a:ext cx="2514600" cy="914400"/>
+            <a:off x="685800" y="2894990"/>
+            <a:ext cx="2514600" cy="865022"/>
           </a:xfrm>
           <a:prstGeom prst="rect">
             <a:avLst/>
@@ -19589,7 +21215,7 @@
                 <a:ea typeface="맑은 고딕"/>
                 <a:cs typeface="맑은 고딕"/>
               </a:rPr>
-              <a:t>3교시</a:t>
+              <a:t>다음에 무엇을 부를지 누가 정하나</a:t>
             </a:r>
           </a:p>
         </p:txBody>
@@ -19602,8 +21228,8 @@
         </p:nvSpPr>
         <p:spPr>
           <a:xfrm>
-            <a:off x="3200400" y="3735323"/>
-            <a:ext cx="6156655" cy="914400"/>
+            <a:off x="3200400" y="2894990"/>
+            <a:ext cx="6156655" cy="865022"/>
           </a:xfrm>
           <a:prstGeom prst="rect">
             <a:avLst/>
@@ -19628,7 +21254,7 @@
                 <a:ea typeface="맑은 고딕"/>
                 <a:cs typeface="맑은 고딕"/>
               </a:rPr>
-              <a:t>설비 · 문서 · 부품 근거 연결하기</a:t>
+              <a:t>순서가 늘 같으면 워크플로, 결과를 보고 고르면 에이전트</a:t>
             </a:r>
           </a:p>
         </p:txBody>
@@ -19641,8 +21267,8 @@
         </p:nvSpPr>
         <p:spPr>
           <a:xfrm>
-            <a:off x="9448495" y="3735323"/>
-            <a:ext cx="2103120" cy="914400"/>
+            <a:off x="9448495" y="2894990"/>
+            <a:ext cx="2103120" cy="865022"/>
           </a:xfrm>
           <a:prstGeom prst="rect">
             <a:avLst/>
@@ -19667,7 +21293,7 @@
                 <a:ea typeface="맑은 고딕"/>
                 <a:cs typeface="맑은 고딕"/>
               </a:rPr>
-              <a:t>해결된 사실과</a:t>
+              <a:t>워크플로</a:t>
             </a:r>
           </a:p>
           <a:p>
@@ -19685,7 +21311,7 @@
                 <a:ea typeface="맑은 고딕"/>
                 <a:cs typeface="맑은 고딕"/>
               </a:rPr>
-              <a:t>추가 확인 조건</a:t>
+              <a:t>vs 에이전트</a:t>
             </a:r>
           </a:p>
         </p:txBody>
@@ -19698,8 +21324,304 @@
         </p:nvSpPr>
         <p:spPr>
           <a:xfrm>
-            <a:off x="548640" y="4681727"/>
-            <a:ext cx="11094415" cy="850392"/>
+            <a:off x="548640" y="3792016"/>
+            <a:ext cx="11094415" cy="801014"/>
+          </a:xfrm>
+          <a:prstGeom prst="roundRect">
+            <a:avLst>
+              <a:gd name="adj" fmla="val 8000"/>
+            </a:avLst>
+          </a:prstGeom>
+          <a:solidFill>
+            <a:srgbClr val="F3F6F9"/>
+          </a:solidFill>
+          <a:ln>
+            <a:noFill/>
+          </a:ln>
+        </p:spPr>
+        <p:txBody>
+          <a:bodyPr rtlCol="0" anchor="ctr"/>
+          <a:lstStyle/>
+          <a:p>
+            <a:pPr algn="ctr"/>
+          </a:p>
+        </p:txBody>
+      </p:sp>
+      <p:sp>
+        <p:nvSpPr>
+          <p:cNvPr id="19" name="TextBox 18"/>
+          <p:cNvSpPr txBox="1"/>
+          <p:nvPr/>
+        </p:nvSpPr>
+        <p:spPr>
+          <a:xfrm>
+            <a:off x="685800" y="3760012"/>
+            <a:ext cx="2514600" cy="865022"/>
+          </a:xfrm>
+          <a:prstGeom prst="rect">
+            <a:avLst/>
+          </a:prstGeom>
+          <a:noFill/>
+        </p:spPr>
+        <p:txBody>
+          <a:bodyPr wrap="square" anchor="ctr"/>
+          <a:lstStyle/>
+          <a:p>
+            <a:pPr algn="l" eaLnBrk="0">
+              <a:lnSpc>
+                <a:spcPct val="110000"/>
+              </a:lnSpc>
+            </a:pPr>
+            <a:r>
+              <a:rPr sz="1600" b="1">
+                <a:solidFill>
+                  <a:srgbClr val="13294B"/>
+                </a:solidFill>
+                <a:latin typeface="맑은 고딕"/>
+                <a:ea typeface="맑은 고딕"/>
+                <a:cs typeface="맑은 고딕"/>
+              </a:rPr>
+              <a:t>「냉각 효율 70 %」는 잰 값인가</a:t>
+            </a:r>
+          </a:p>
+        </p:txBody>
+      </p:sp>
+      <p:sp>
+        <p:nvSpPr>
+          <p:cNvPr id="20" name="TextBox 19"/>
+          <p:cNvSpPr txBox="1"/>
+          <p:nvPr/>
+        </p:nvSpPr>
+        <p:spPr>
+          <a:xfrm>
+            <a:off x="3200400" y="3760012"/>
+            <a:ext cx="6156655" cy="865022"/>
+          </a:xfrm>
+          <a:prstGeom prst="rect">
+            <a:avLst/>
+          </a:prstGeom>
+          <a:noFill/>
+        </p:spPr>
+        <p:txBody>
+          <a:bodyPr wrap="square" anchor="ctr"/>
+          <a:lstStyle/>
+          <a:p>
+            <a:pPr algn="l" eaLnBrk="0">
+              <a:lnSpc>
+                <a:spcPct val="110000"/>
+              </a:lnSpc>
+            </a:pPr>
+            <a:r>
+              <a:rPr sz="1400" b="0">
+                <a:solidFill>
+                  <a:srgbClr val="1F2A3A"/>
+                </a:solidFill>
+                <a:latin typeface="맑은 고딕"/>
+                <a:ea typeface="맑은 고딕"/>
+                <a:cs typeface="맑은 고딕"/>
+              </a:rPr>
+              <a:t>70은 HM-8.4의 기준, 46.2 %가 시계열 DB의 관측값</a:t>
+            </a:r>
+          </a:p>
+        </p:txBody>
+      </p:sp>
+      <p:sp>
+        <p:nvSpPr>
+          <p:cNvPr id="21" name="TextBox 20"/>
+          <p:cNvSpPr txBox="1"/>
+          <p:nvPr/>
+        </p:nvSpPr>
+        <p:spPr>
+          <a:xfrm>
+            <a:off x="9448495" y="3760012"/>
+            <a:ext cx="2103120" cy="865022"/>
+          </a:xfrm>
+          <a:prstGeom prst="rect">
+            <a:avLst/>
+          </a:prstGeom>
+          <a:noFill/>
+        </p:spPr>
+        <p:txBody>
+          <a:bodyPr wrap="square" anchor="ctr"/>
+          <a:lstStyle/>
+          <a:p>
+            <a:pPr algn="l" eaLnBrk="0">
+              <a:lnSpc>
+                <a:spcPct val="110000"/>
+              </a:lnSpc>
+            </a:pPr>
+            <a:r>
+              <a:rPr sz="1250" b="1">
+                <a:solidFill>
+                  <a:srgbClr val="556175"/>
+                </a:solidFill>
+                <a:latin typeface="맑은 고딕"/>
+                <a:ea typeface="맑은 고딕"/>
+                <a:cs typeface="맑은 고딕"/>
+              </a:rPr>
+              <a:t>기준 vs 관측값</a:t>
+            </a:r>
+          </a:p>
+        </p:txBody>
+      </p:sp>
+      <p:sp>
+        <p:nvSpPr>
+          <p:cNvPr id="22" name="Rounded Rectangle 21"/>
+          <p:cNvSpPr/>
+          <p:nvPr/>
+        </p:nvSpPr>
+        <p:spPr>
+          <a:xfrm>
+            <a:off x="548640" y="4657039"/>
+            <a:ext cx="11094415" cy="801014"/>
+          </a:xfrm>
+          <a:prstGeom prst="roundRect">
+            <a:avLst>
+              <a:gd name="adj" fmla="val 8000"/>
+            </a:avLst>
+          </a:prstGeom>
+          <a:solidFill>
+            <a:srgbClr val="F3F6F9"/>
+          </a:solidFill>
+          <a:ln>
+            <a:noFill/>
+          </a:ln>
+        </p:spPr>
+        <p:txBody>
+          <a:bodyPr rtlCol="0" anchor="ctr"/>
+          <a:lstStyle/>
+          <a:p>
+            <a:pPr algn="ctr"/>
+          </a:p>
+        </p:txBody>
+      </p:sp>
+      <p:sp>
+        <p:nvSpPr>
+          <p:cNvPr id="23" name="TextBox 22"/>
+          <p:cNvSpPr txBox="1"/>
+          <p:nvPr/>
+        </p:nvSpPr>
+        <p:spPr>
+          <a:xfrm>
+            <a:off x="685800" y="4625035"/>
+            <a:ext cx="2514600" cy="865022"/>
+          </a:xfrm>
+          <a:prstGeom prst="rect">
+            <a:avLst/>
+          </a:prstGeom>
+          <a:noFill/>
+        </p:spPr>
+        <p:txBody>
+          <a:bodyPr wrap="square" anchor="ctr"/>
+          <a:lstStyle/>
+          <a:p>
+            <a:pPr algn="l" eaLnBrk="0">
+              <a:lnSpc>
+                <a:spcPct val="110000"/>
+              </a:lnSpc>
+            </a:pPr>
+            <a:r>
+              <a:rPr sz="1600" b="1">
+                <a:solidFill>
+                  <a:srgbClr val="13294B"/>
+                </a:solidFill>
+                <a:latin typeface="맑은 고딕"/>
+                <a:ea typeface="맑은 고딕"/>
+                <a:cs typeface="맑은 고딕"/>
+              </a:rPr>
+              <a:t>이 값을 지금 근거로 써도 되나</a:t>
+            </a:r>
+          </a:p>
+        </p:txBody>
+      </p:sp>
+      <p:sp>
+        <p:nvSpPr>
+          <p:cNvPr id="24" name="TextBox 23"/>
+          <p:cNvSpPr txBox="1"/>
+          <p:nvPr/>
+        </p:nvSpPr>
+        <p:spPr>
+          <a:xfrm>
+            <a:off x="3200400" y="4625035"/>
+            <a:ext cx="6156655" cy="865022"/>
+          </a:xfrm>
+          <a:prstGeom prst="rect">
+            <a:avLst/>
+          </a:prstGeom>
+          <a:noFill/>
+        </p:spPr>
+        <p:txBody>
+          <a:bodyPr wrap="square" anchor="ctr"/>
+          <a:lstStyle/>
+          <a:p>
+            <a:pPr algn="l" eaLnBrk="0">
+              <a:lnSpc>
+                <a:spcPct val="110000"/>
+              </a:lnSpc>
+            </a:pPr>
+            <a:r>
+              <a:rPr sz="1400" b="0">
+                <a:solidFill>
+                  <a:srgbClr val="1F2A3A"/>
+                </a:solidFill>
+                <a:latin typeface="맑은 고딕"/>
+                <a:ea typeface="맑은 고딕"/>
+                <a:cs typeface="맑은 고딕"/>
+              </a:rPr>
+              <a:t>관측 시각과 구간의 표본 수</a:t>
+            </a:r>
+          </a:p>
+        </p:txBody>
+      </p:sp>
+      <p:sp>
+        <p:nvSpPr>
+          <p:cNvPr id="25" name="TextBox 24"/>
+          <p:cNvSpPr txBox="1"/>
+          <p:nvPr/>
+        </p:nvSpPr>
+        <p:spPr>
+          <a:xfrm>
+            <a:off x="9448495" y="4625035"/>
+            <a:ext cx="2103120" cy="865022"/>
+          </a:xfrm>
+          <a:prstGeom prst="rect">
+            <a:avLst/>
+          </a:prstGeom>
+          <a:noFill/>
+        </p:spPr>
+        <p:txBody>
+          <a:bodyPr wrap="square" anchor="ctr"/>
+          <a:lstStyle/>
+          <a:p>
+            <a:pPr algn="l" eaLnBrk="0">
+              <a:lnSpc>
+                <a:spcPct val="110000"/>
+              </a:lnSpc>
+            </a:pPr>
+            <a:r>
+              <a:rPr sz="1250" b="1">
+                <a:solidFill>
+                  <a:srgbClr val="556175"/>
+                </a:solidFill>
+                <a:latin typeface="맑은 고딕"/>
+                <a:ea typeface="맑은 고딕"/>
+                <a:cs typeface="맑은 고딕"/>
+              </a:rPr>
+              <a:t>신선도 vs 표본</a:t>
+            </a:r>
+          </a:p>
+        </p:txBody>
+      </p:sp>
+      <p:sp>
+        <p:nvSpPr>
+          <p:cNvPr id="26" name="Rounded Rectangle 25"/>
+          <p:cNvSpPr/>
+          <p:nvPr/>
+        </p:nvSpPr>
+        <p:spPr>
+          <a:xfrm>
+            <a:off x="548640" y="5522061"/>
+            <a:ext cx="11094415" cy="801014"/>
           </a:xfrm>
           <a:prstGeom prst="roundRect">
             <a:avLst>
@@ -19723,14 +21645,842 @@
       </p:sp>
       <p:sp>
         <p:nvSpPr>
+          <p:cNvPr id="27" name="TextBox 26"/>
+          <p:cNvSpPr txBox="1"/>
+          <p:nvPr/>
+        </p:nvSpPr>
+        <p:spPr>
+          <a:xfrm>
+            <a:off x="685800" y="5490057"/>
+            <a:ext cx="2514600" cy="865022"/>
+          </a:xfrm>
+          <a:prstGeom prst="rect">
+            <a:avLst/>
+          </a:prstGeom>
+          <a:noFill/>
+        </p:spPr>
+        <p:txBody>
+          <a:bodyPr wrap="square" anchor="ctr"/>
+          <a:lstStyle/>
+          <a:p>
+            <a:pPr algn="l" eaLnBrk="0">
+              <a:lnSpc>
+                <a:spcPct val="110000"/>
+              </a:lnSpc>
+            </a:pPr>
+            <a:r>
+              <a:rPr sz="1600" b="1">
+                <a:solidFill>
+                  <a:srgbClr val="13294B"/>
+                </a:solidFill>
+                <a:latin typeface="맑은 고딕"/>
+                <a:ea typeface="맑은 고딕"/>
+                <a:cs typeface="맑은 고딕"/>
+              </a:rPr>
+              <a:t>초안의 핀 오염은 확정된 원인인가</a:t>
+            </a:r>
+          </a:p>
+        </p:txBody>
+      </p:sp>
+      <p:sp>
+        <p:nvSpPr>
+          <p:cNvPr id="28" name="TextBox 27"/>
+          <p:cNvSpPr txBox="1"/>
+          <p:nvPr/>
+        </p:nvSpPr>
+        <p:spPr>
+          <a:xfrm>
+            <a:off x="3200400" y="5490057"/>
+            <a:ext cx="6156655" cy="865022"/>
+          </a:xfrm>
+          <a:prstGeom prst="rect">
+            <a:avLst/>
+          </a:prstGeom>
+          <a:noFill/>
+        </p:spPr>
+        <p:txBody>
+          <a:bodyPr wrap="square" anchor="ctr"/>
+          <a:lstStyle/>
+          <a:p>
+            <a:pPr algn="l" eaLnBrk="0">
+              <a:lnSpc>
+                <a:spcPct val="110000"/>
+              </a:lnSpc>
+            </a:pPr>
+            <a:r>
+              <a:rPr sz="1400" b="0">
+                <a:solidFill>
+                  <a:srgbClr val="1F2A3A"/>
+                </a:solidFill>
+                <a:latin typeface="맑은 고딕"/>
+                <a:ea typeface="맑은 고딕"/>
+                <a:cs typeface="맑은 고딕"/>
+              </a:rPr>
+              <a:t>기준에 맞은 가설과 확인 항목, 상태는 요청 초안</a:t>
+            </a:r>
+          </a:p>
+        </p:txBody>
+      </p:sp>
+      <p:sp>
+        <p:nvSpPr>
+          <p:cNvPr id="29" name="TextBox 28"/>
+          <p:cNvSpPr txBox="1"/>
+          <p:nvPr/>
+        </p:nvSpPr>
+        <p:spPr>
+          <a:xfrm>
+            <a:off x="9448495" y="5490057"/>
+            <a:ext cx="2103120" cy="865022"/>
+          </a:xfrm>
+          <a:prstGeom prst="rect">
+            <a:avLst/>
+          </a:prstGeom>
+          <a:noFill/>
+        </p:spPr>
+        <p:txBody>
+          <a:bodyPr wrap="square" anchor="ctr"/>
+          <a:lstStyle/>
+          <a:p>
+            <a:pPr algn="l" eaLnBrk="0">
+              <a:lnSpc>
+                <a:spcPct val="110000"/>
+              </a:lnSpc>
+            </a:pPr>
+            <a:r>
+              <a:rPr sz="1250" b="1">
+                <a:solidFill>
+                  <a:srgbClr val="1A6FC4"/>
+                </a:solidFill>
+                <a:latin typeface="맑은 고딕"/>
+                <a:ea typeface="맑은 고딕"/>
+                <a:cs typeface="맑은 고딕"/>
+              </a:rPr>
+              <a:t>가설 vs 확인된 원인</a:t>
+            </a:r>
+          </a:p>
+          <a:p>
+            <a:pPr algn="l" eaLnBrk="0">
+              <a:lnSpc>
+                <a:spcPct val="110000"/>
+              </a:lnSpc>
+            </a:pPr>
+            <a:r>
+              <a:rPr sz="1250" b="1">
+                <a:solidFill>
+                  <a:srgbClr val="1A6FC4"/>
+                </a:solidFill>
+                <a:latin typeface="맑은 고딕"/>
+                <a:ea typeface="맑은 고딕"/>
+                <a:cs typeface="맑은 고딕"/>
+              </a:rPr>
+              <a:t>요청 초안 vs 작업지시</a:t>
+            </a:r>
+          </a:p>
+        </p:txBody>
+      </p:sp>
+    </p:spTree>
+  </p:cSld>
+  <p:clrMapOvr>
+    <a:masterClrMapping/>
+  </p:clrMapOvr>
+</p:sld>
+</file>
+
+<file path=ppt/slides/slide27.xml><?xml version="1.0" encoding="utf-8"?>
+<p:sld xmlns:a="http://schemas.openxmlformats.org/drawingml/2006/main" xmlns:p="http://schemas.openxmlformats.org/presentationml/2006/main" xmlns:r="http://schemas.openxmlformats.org/officeDocument/2006/relationships">
+  <p:cSld>
+    <p:bg>
+      <p:bgPr>
+        <a:solidFill>
+          <a:srgbClr val="FFFFFF"/>
+        </a:solidFill>
+        <a:effectLst/>
+      </p:bgPr>
+    </p:bg>
+    <p:spTree>
+      <p:nvGrpSpPr>
+        <p:cNvPr id="1" name=""/>
+        <p:cNvGrpSpPr/>
+        <p:nvPr/>
+      </p:nvGrpSpPr>
+      <p:grpSpPr/>
+      <p:sp>
+        <p:nvSpPr>
+          <p:cNvPr id="2" name="TextBox 1"/>
+          <p:cNvSpPr txBox="1"/>
+          <p:nvPr/>
+        </p:nvSpPr>
+        <p:spPr>
+          <a:xfrm>
+            <a:off x="457200" y="329184"/>
+            <a:ext cx="11277295" cy="603504"/>
+          </a:xfrm>
+          <a:prstGeom prst="rect">
+            <a:avLst/>
+          </a:prstGeom>
+          <a:noFill/>
+        </p:spPr>
+        <p:txBody>
+          <a:bodyPr wrap="square" anchor="ctr"/>
+          <a:lstStyle/>
+          <a:p>
+            <a:pPr algn="l" eaLnBrk="0">
+              <a:lnSpc>
+                <a:spcPct val="110000"/>
+              </a:lnSpc>
+            </a:pPr>
+            <a:r>
+              <a:rPr sz="2800" b="1">
+                <a:solidFill>
+                  <a:srgbClr val="13294B"/>
+                </a:solidFill>
+                <a:latin typeface="맑은 고딕"/>
+                <a:ea typeface="맑은 고딕"/>
+                <a:cs typeface="맑은 고딕"/>
+              </a:rPr>
+              <a:t>오늘 다룬 핵심 개념과 주요 용어 정리</a:t>
+            </a:r>
+          </a:p>
+        </p:txBody>
+      </p:sp>
+      <p:sp>
+        <p:nvSpPr>
+          <p:cNvPr id="3" name="TextBox 2"/>
+          <p:cNvSpPr txBox="1"/>
+          <p:nvPr/>
+        </p:nvSpPr>
+        <p:spPr>
+          <a:xfrm>
+            <a:off x="457200" y="932688"/>
+            <a:ext cx="11277295" cy="420624"/>
+          </a:xfrm>
+          <a:prstGeom prst="rect">
+            <a:avLst/>
+          </a:prstGeom>
+          <a:noFill/>
+        </p:spPr>
+        <p:txBody>
+          <a:bodyPr wrap="square" anchor="ctr"/>
+          <a:lstStyle/>
+          <a:p>
+            <a:pPr algn="l" eaLnBrk="0">
+              <a:lnSpc>
+                <a:spcPct val="110000"/>
+              </a:lnSpc>
+            </a:pPr>
+            <a:r>
+              <a:rPr sz="1600" b="0">
+                <a:solidFill>
+                  <a:srgbClr val="556175"/>
+                </a:solidFill>
+                <a:latin typeface="맑은 고딕"/>
+                <a:ea typeface="맑은 고딕"/>
+                <a:cs typeface="맑은 고딕"/>
+              </a:rPr>
+              <a:t>에이전트의 실행과 근거 확인에서 쓰는 용어를 정식 명칭과 한 줄 뜻으로 모은다.</a:t>
+            </a:r>
+          </a:p>
+        </p:txBody>
+      </p:sp>
+      <p:sp>
+        <p:nvSpPr>
+          <p:cNvPr id="4" name="Rectangle 3"/>
+          <p:cNvSpPr/>
+          <p:nvPr/>
+        </p:nvSpPr>
+        <p:spPr>
+          <a:xfrm>
+            <a:off x="548640" y="1408176"/>
+            <a:ext cx="11094415" cy="18288"/>
+          </a:xfrm>
+          <a:prstGeom prst="rect">
+            <a:avLst/>
+          </a:prstGeom>
+          <a:solidFill>
+            <a:srgbClr val="D3D9E1"/>
+          </a:solidFill>
+          <a:ln>
+            <a:noFill/>
+          </a:ln>
+        </p:spPr>
+        <p:txBody>
+          <a:bodyPr rtlCol="0" anchor="ctr"/>
+          <a:lstStyle/>
+          <a:p>
+            <a:pPr algn="ctr"/>
+          </a:p>
+        </p:txBody>
+      </p:sp>
+      <p:sp>
+        <p:nvSpPr>
+          <p:cNvPr id="5" name="TextBox 4"/>
+          <p:cNvSpPr txBox="1"/>
+          <p:nvPr/>
+        </p:nvSpPr>
+        <p:spPr>
+          <a:xfrm>
+            <a:off x="10911535" y="6473952"/>
+            <a:ext cx="822960" cy="274320"/>
+          </a:xfrm>
+          <a:prstGeom prst="rect">
+            <a:avLst/>
+          </a:prstGeom>
+          <a:noFill/>
+        </p:spPr>
+        <p:txBody>
+          <a:bodyPr wrap="square" anchor="t"/>
+          <a:lstStyle/>
+          <a:p>
+            <a:pPr algn="r" eaLnBrk="0">
+              <a:lnSpc>
+                <a:spcPct val="110000"/>
+              </a:lnSpc>
+            </a:pPr>
+            <a:r>
+              <a:rPr sz="1000" b="0">
+                <a:solidFill>
+                  <a:srgbClr val="556175"/>
+                </a:solidFill>
+                <a:latin typeface="맑은 고딕"/>
+                <a:ea typeface="맑은 고딕"/>
+                <a:cs typeface="맑은 고딕"/>
+              </a:rPr>
+              <a:t>27</a:t>
+            </a:r>
+          </a:p>
+        </p:txBody>
+      </p:sp>
+      <p:sp>
+        <p:nvSpPr>
+          <p:cNvPr id="6" name="Rounded Rectangle 5"/>
+          <p:cNvSpPr/>
+          <p:nvPr/>
+        </p:nvSpPr>
+        <p:spPr>
+          <a:xfrm>
+            <a:off x="548640" y="1627632"/>
+            <a:ext cx="11094415" cy="347472"/>
+          </a:xfrm>
+          <a:prstGeom prst="roundRect">
+            <a:avLst>
+              <a:gd name="adj" fmla="val 12000"/>
+            </a:avLst>
+          </a:prstGeom>
+          <a:solidFill>
+            <a:srgbClr val="13294B"/>
+          </a:solidFill>
+          <a:ln>
+            <a:noFill/>
+          </a:ln>
+        </p:spPr>
+        <p:txBody>
+          <a:bodyPr rtlCol="0" anchor="ctr"/>
+          <a:lstStyle/>
+          <a:p>
+            <a:pPr algn="ctr"/>
+          </a:p>
+        </p:txBody>
+      </p:sp>
+      <p:sp>
+        <p:nvSpPr>
+          <p:cNvPr id="7" name="TextBox 6"/>
+          <p:cNvSpPr txBox="1"/>
+          <p:nvPr/>
+        </p:nvSpPr>
+        <p:spPr>
+          <a:xfrm>
+            <a:off x="685800" y="1627632"/>
+            <a:ext cx="2514600" cy="347472"/>
+          </a:xfrm>
+          <a:prstGeom prst="rect">
+            <a:avLst/>
+          </a:prstGeom>
+          <a:noFill/>
+        </p:spPr>
+        <p:txBody>
+          <a:bodyPr wrap="square" anchor="ctr"/>
+          <a:lstStyle/>
+          <a:p>
+            <a:pPr algn="l" eaLnBrk="0">
+              <a:lnSpc>
+                <a:spcPct val="110000"/>
+              </a:lnSpc>
+            </a:pPr>
+            <a:r>
+              <a:rPr sz="1300" b="1">
+                <a:solidFill>
+                  <a:srgbClr val="FFFFFF"/>
+                </a:solidFill>
+                <a:latin typeface="맑은 고딕"/>
+                <a:ea typeface="맑은 고딕"/>
+                <a:cs typeface="맑은 고딕"/>
+              </a:rPr>
+              <a:t>용어</a:t>
+            </a:r>
+          </a:p>
+        </p:txBody>
+      </p:sp>
+      <p:sp>
+        <p:nvSpPr>
+          <p:cNvPr id="8" name="TextBox 7"/>
+          <p:cNvSpPr txBox="1"/>
+          <p:nvPr/>
+        </p:nvSpPr>
+        <p:spPr>
+          <a:xfrm>
+            <a:off x="3200400" y="1627632"/>
+            <a:ext cx="8442655" cy="347472"/>
+          </a:xfrm>
+          <a:prstGeom prst="rect">
+            <a:avLst/>
+          </a:prstGeom>
+          <a:noFill/>
+        </p:spPr>
+        <p:txBody>
+          <a:bodyPr wrap="square" anchor="ctr"/>
+          <a:lstStyle/>
+          <a:p>
+            <a:pPr algn="l" eaLnBrk="0">
+              <a:lnSpc>
+                <a:spcPct val="110000"/>
+              </a:lnSpc>
+            </a:pPr>
+            <a:r>
+              <a:rPr sz="1300" b="1">
+                <a:solidFill>
+                  <a:srgbClr val="FFFFFF"/>
+                </a:solidFill>
+                <a:latin typeface="맑은 고딕"/>
+                <a:ea typeface="맑은 고딕"/>
+                <a:cs typeface="맑은 고딕"/>
+              </a:rPr>
+              <a:t>정식 명칭 · 풀이</a:t>
+            </a:r>
+          </a:p>
+        </p:txBody>
+      </p:sp>
+      <p:sp>
+        <p:nvSpPr>
+          <p:cNvPr id="9" name="Rounded Rectangle 8"/>
+          <p:cNvSpPr/>
+          <p:nvPr/>
+        </p:nvSpPr>
+        <p:spPr>
+          <a:xfrm>
+            <a:off x="548640" y="2061972"/>
+            <a:ext cx="11094415" cy="801014"/>
+          </a:xfrm>
+          <a:prstGeom prst="roundRect">
+            <a:avLst>
+              <a:gd name="adj" fmla="val 8000"/>
+            </a:avLst>
+          </a:prstGeom>
+          <a:solidFill>
+            <a:srgbClr val="F3F6F9"/>
+          </a:solidFill>
+          <a:ln>
+            <a:noFill/>
+          </a:ln>
+        </p:spPr>
+        <p:txBody>
+          <a:bodyPr rtlCol="0" anchor="ctr"/>
+          <a:lstStyle/>
+          <a:p>
+            <a:pPr algn="ctr"/>
+          </a:p>
+        </p:txBody>
+      </p:sp>
+      <p:sp>
+        <p:nvSpPr>
+          <p:cNvPr id="10" name="TextBox 9"/>
+          <p:cNvSpPr txBox="1"/>
+          <p:nvPr/>
+        </p:nvSpPr>
+        <p:spPr>
+          <a:xfrm>
+            <a:off x="685800" y="2029968"/>
+            <a:ext cx="2514600" cy="865022"/>
+          </a:xfrm>
+          <a:prstGeom prst="rect">
+            <a:avLst/>
+          </a:prstGeom>
+          <a:noFill/>
+        </p:spPr>
+        <p:txBody>
+          <a:bodyPr wrap="square" anchor="ctr"/>
+          <a:lstStyle/>
+          <a:p>
+            <a:pPr algn="l" eaLnBrk="0">
+              <a:lnSpc>
+                <a:spcPct val="110000"/>
+              </a:lnSpc>
+            </a:pPr>
+            <a:r>
+              <a:rPr sz="1600" b="1">
+                <a:solidFill>
+                  <a:srgbClr val="13294B"/>
+                </a:solidFill>
+                <a:latin typeface="맑은 고딕"/>
+                <a:ea typeface="맑은 고딕"/>
+                <a:cs typeface="맑은 고딕"/>
+              </a:rPr>
+              <a:t>LLM · RAG</a:t>
+            </a:r>
+          </a:p>
+        </p:txBody>
+      </p:sp>
+      <p:sp>
+        <p:nvSpPr>
+          <p:cNvPr id="11" name="TextBox 10"/>
+          <p:cNvSpPr txBox="1"/>
+          <p:nvPr/>
+        </p:nvSpPr>
+        <p:spPr>
+          <a:xfrm>
+            <a:off x="3200400" y="2029968"/>
+            <a:ext cx="8351215" cy="865022"/>
+          </a:xfrm>
+          <a:prstGeom prst="rect">
+            <a:avLst/>
+          </a:prstGeom>
+          <a:noFill/>
+        </p:spPr>
+        <p:txBody>
+          <a:bodyPr wrap="square" anchor="ctr"/>
+          <a:lstStyle/>
+          <a:p>
+            <a:pPr algn="l" eaLnBrk="0">
+              <a:lnSpc>
+                <a:spcPct val="110000"/>
+              </a:lnSpc>
+            </a:pPr>
+            <a:r>
+              <a:rPr sz="1400" b="0">
+                <a:solidFill>
+                  <a:srgbClr val="1F2A3A"/>
+                </a:solidFill>
+                <a:latin typeface="맑은 고딕"/>
+                <a:ea typeface="맑은 고딕"/>
+                <a:cs typeface="맑은 고딕"/>
+              </a:rPr>
+              <a:t>Large Language Model · Retrieval-Augmented Generation</a:t>
+            </a:r>
+          </a:p>
+          <a:p>
+            <a:pPr algn="l" eaLnBrk="0">
+              <a:lnSpc>
+                <a:spcPct val="110000"/>
+              </a:lnSpc>
+            </a:pPr>
+            <a:r>
+              <a:rPr sz="1400" b="0">
+                <a:solidFill>
+                  <a:srgbClr val="1F2A3A"/>
+                </a:solidFill>
+                <a:latin typeface="맑은 고딕"/>
+                <a:ea typeface="맑은 고딕"/>
+                <a:cs typeface="맑은 고딕"/>
+              </a:rPr>
+              <a:t>응답을 만드는 대규모 언어 모델과, 검색한 자료를 답의 근거로 넣는 방식</a:t>
+            </a:r>
+          </a:p>
+        </p:txBody>
+      </p:sp>
+      <p:sp>
+        <p:nvSpPr>
+          <p:cNvPr id="12" name="Rounded Rectangle 11"/>
+          <p:cNvSpPr/>
+          <p:nvPr/>
+        </p:nvSpPr>
+        <p:spPr>
+          <a:xfrm>
+            <a:off x="548640" y="2926994"/>
+            <a:ext cx="11094415" cy="801014"/>
+          </a:xfrm>
+          <a:prstGeom prst="roundRect">
+            <a:avLst>
+              <a:gd name="adj" fmla="val 8000"/>
+            </a:avLst>
+          </a:prstGeom>
+          <a:solidFill>
+            <a:srgbClr val="F3F6F9"/>
+          </a:solidFill>
+          <a:ln>
+            <a:noFill/>
+          </a:ln>
+        </p:spPr>
+        <p:txBody>
+          <a:bodyPr rtlCol="0" anchor="ctr"/>
+          <a:lstStyle/>
+          <a:p>
+            <a:pPr algn="ctr"/>
+          </a:p>
+        </p:txBody>
+      </p:sp>
+      <p:sp>
+        <p:nvSpPr>
+          <p:cNvPr id="13" name="TextBox 12"/>
+          <p:cNvSpPr txBox="1"/>
+          <p:nvPr/>
+        </p:nvSpPr>
+        <p:spPr>
+          <a:xfrm>
+            <a:off x="685800" y="2894990"/>
+            <a:ext cx="2514600" cy="865022"/>
+          </a:xfrm>
+          <a:prstGeom prst="rect">
+            <a:avLst/>
+          </a:prstGeom>
+          <a:noFill/>
+        </p:spPr>
+        <p:txBody>
+          <a:bodyPr wrap="square" anchor="ctr"/>
+          <a:lstStyle/>
+          <a:p>
+            <a:pPr algn="l" eaLnBrk="0">
+              <a:lnSpc>
+                <a:spcPct val="110000"/>
+              </a:lnSpc>
+            </a:pPr>
+            <a:r>
+              <a:rPr sz="1600" b="1">
+                <a:solidFill>
+                  <a:srgbClr val="13294B"/>
+                </a:solidFill>
+                <a:latin typeface="맑은 고딕"/>
+                <a:ea typeface="맑은 고딕"/>
+                <a:cs typeface="맑은 고딕"/>
+              </a:rPr>
+              <a:t>에이전트</a:t>
+            </a:r>
+          </a:p>
+        </p:txBody>
+      </p:sp>
+      <p:sp>
+        <p:nvSpPr>
+          <p:cNvPr id="14" name="TextBox 13"/>
+          <p:cNvSpPr txBox="1"/>
+          <p:nvPr/>
+        </p:nvSpPr>
+        <p:spPr>
+          <a:xfrm>
+            <a:off x="3200400" y="2894990"/>
+            <a:ext cx="8351215" cy="865022"/>
+          </a:xfrm>
+          <a:prstGeom prst="rect">
+            <a:avLst/>
+          </a:prstGeom>
+          <a:noFill/>
+        </p:spPr>
+        <p:txBody>
+          <a:bodyPr wrap="square" anchor="ctr"/>
+          <a:lstStyle/>
+          <a:p>
+            <a:pPr algn="l" eaLnBrk="0">
+              <a:lnSpc>
+                <a:spcPct val="110000"/>
+              </a:lnSpc>
+            </a:pPr>
+            <a:r>
+              <a:rPr sz="1400" b="0">
+                <a:solidFill>
+                  <a:srgbClr val="1F2A3A"/>
+                </a:solidFill>
+                <a:latin typeface="맑은 고딕"/>
+                <a:ea typeface="맑은 고딕"/>
+                <a:cs typeface="맑은 고딕"/>
+              </a:rPr>
+              <a:t>AI Agent</a:t>
+            </a:r>
+          </a:p>
+          <a:p>
+            <a:pPr algn="l" eaLnBrk="0">
+              <a:lnSpc>
+                <a:spcPct val="110000"/>
+              </a:lnSpc>
+            </a:pPr>
+            <a:r>
+              <a:rPr sz="1400" b="0">
+                <a:solidFill>
+                  <a:srgbClr val="1F2A3A"/>
+                </a:solidFill>
+                <a:latin typeface="맑은 고딕"/>
+                <a:ea typeface="맑은 고딕"/>
+                <a:cs typeface="맑은 고딕"/>
+              </a:rPr>
+              <a:t>목표를 받아 도구 결과를 보며 다음 행동을 정하고, 완료 · 멈춤 조건에서 끝내는 시스템</a:t>
+            </a:r>
+          </a:p>
+        </p:txBody>
+      </p:sp>
+      <p:sp>
+        <p:nvSpPr>
+          <p:cNvPr id="15" name="Rounded Rectangle 14"/>
+          <p:cNvSpPr/>
+          <p:nvPr/>
+        </p:nvSpPr>
+        <p:spPr>
+          <a:xfrm>
+            <a:off x="548640" y="3792016"/>
+            <a:ext cx="11094415" cy="801014"/>
+          </a:xfrm>
+          <a:prstGeom prst="roundRect">
+            <a:avLst>
+              <a:gd name="adj" fmla="val 8000"/>
+            </a:avLst>
+          </a:prstGeom>
+          <a:solidFill>
+            <a:srgbClr val="F3F6F9"/>
+          </a:solidFill>
+          <a:ln>
+            <a:noFill/>
+          </a:ln>
+        </p:spPr>
+        <p:txBody>
+          <a:bodyPr rtlCol="0" anchor="ctr"/>
+          <a:lstStyle/>
+          <a:p>
+            <a:pPr algn="ctr"/>
+          </a:p>
+        </p:txBody>
+      </p:sp>
+      <p:sp>
+        <p:nvSpPr>
+          <p:cNvPr id="16" name="TextBox 15"/>
+          <p:cNvSpPr txBox="1"/>
+          <p:nvPr/>
+        </p:nvSpPr>
+        <p:spPr>
+          <a:xfrm>
+            <a:off x="685800" y="3760012"/>
+            <a:ext cx="2514600" cy="865022"/>
+          </a:xfrm>
+          <a:prstGeom prst="rect">
+            <a:avLst/>
+          </a:prstGeom>
+          <a:noFill/>
+        </p:spPr>
+        <p:txBody>
+          <a:bodyPr wrap="square" anchor="ctr"/>
+          <a:lstStyle/>
+          <a:p>
+            <a:pPr algn="l" eaLnBrk="0">
+              <a:lnSpc>
+                <a:spcPct val="110000"/>
+              </a:lnSpc>
+            </a:pPr>
+            <a:r>
+              <a:rPr sz="1600" b="1">
+                <a:solidFill>
+                  <a:srgbClr val="13294B"/>
+                </a:solidFill>
+                <a:latin typeface="맑은 고딕"/>
+                <a:ea typeface="맑은 고딕"/>
+                <a:cs typeface="맑은 고딕"/>
+              </a:rPr>
+              <a:t>실행 고리</a:t>
+            </a:r>
+          </a:p>
+        </p:txBody>
+      </p:sp>
+      <p:sp>
+        <p:nvSpPr>
+          <p:cNvPr id="17" name="TextBox 16"/>
+          <p:cNvSpPr txBox="1"/>
+          <p:nvPr/>
+        </p:nvSpPr>
+        <p:spPr>
+          <a:xfrm>
+            <a:off x="3200400" y="3760012"/>
+            <a:ext cx="8351215" cy="865022"/>
+          </a:xfrm>
+          <a:prstGeom prst="rect">
+            <a:avLst/>
+          </a:prstGeom>
+          <a:noFill/>
+        </p:spPr>
+        <p:txBody>
+          <a:bodyPr wrap="square" anchor="ctr"/>
+          <a:lstStyle/>
+          <a:p>
+            <a:pPr algn="l" eaLnBrk="0">
+              <a:lnSpc>
+                <a:spcPct val="110000"/>
+              </a:lnSpc>
+            </a:pPr>
+            <a:r>
+              <a:rPr sz="1400" b="0">
+                <a:solidFill>
+                  <a:srgbClr val="1F2A3A"/>
+                </a:solidFill>
+                <a:latin typeface="맑은 고딕"/>
+                <a:ea typeface="맑은 고딕"/>
+                <a:cs typeface="맑은 고딕"/>
+              </a:rPr>
+              <a:t>Agent Loop</a:t>
+            </a:r>
+          </a:p>
+          <a:p>
+            <a:pPr algn="l" eaLnBrk="0">
+              <a:lnSpc>
+                <a:spcPct val="110000"/>
+              </a:lnSpc>
+            </a:pPr>
+            <a:r>
+              <a:rPr sz="1400" b="0">
+                <a:solidFill>
+                  <a:srgbClr val="1F2A3A"/>
+                </a:solidFill>
+                <a:latin typeface="맑은 고딕"/>
+                <a:ea typeface="맑은 고딕"/>
+                <a:cs typeface="맑은 고딕"/>
+              </a:rPr>
+              <a:t>요청 해석 · 계획 · 도구 호출 · 결과 관찰을 되풀이하다 종료하는 틀</a:t>
+            </a:r>
+          </a:p>
+        </p:txBody>
+      </p:sp>
+      <p:sp>
+        <p:nvSpPr>
+          <p:cNvPr id="18" name="Rounded Rectangle 17"/>
+          <p:cNvSpPr/>
+          <p:nvPr/>
+        </p:nvSpPr>
+        <p:spPr>
+          <a:xfrm>
+            <a:off x="548640" y="4657039"/>
+            <a:ext cx="11094415" cy="801014"/>
+          </a:xfrm>
+          <a:prstGeom prst="roundRect">
+            <a:avLst>
+              <a:gd name="adj" fmla="val 8000"/>
+            </a:avLst>
+          </a:prstGeom>
+          <a:solidFill>
+            <a:srgbClr val="F3F6F9"/>
+          </a:solidFill>
+          <a:ln>
+            <a:noFill/>
+          </a:ln>
+        </p:spPr>
+        <p:txBody>
+          <a:bodyPr rtlCol="0" anchor="ctr"/>
+          <a:lstStyle/>
+          <a:p>
+            <a:pPr algn="ctr"/>
+          </a:p>
+        </p:txBody>
+      </p:sp>
+      <p:sp>
+        <p:nvSpPr>
           <p:cNvPr id="19" name="TextBox 18"/>
           <p:cNvSpPr txBox="1"/>
           <p:nvPr/>
         </p:nvSpPr>
         <p:spPr>
           <a:xfrm>
-            <a:off x="685800" y="4649723"/>
-            <a:ext cx="2514600" cy="914400"/>
+            <a:off x="685800" y="4625035"/>
+            <a:ext cx="2514600" cy="865022"/>
           </a:xfrm>
           <a:prstGeom prst="rect">
             <a:avLst/>
@@ -19755,7 +22505,7 @@
                 <a:ea typeface="맑은 고딕"/>
                 <a:cs typeface="맑은 고딕"/>
               </a:rPr>
-              <a:t>4교시</a:t>
+              <a:t>신선도 · 표본</a:t>
             </a:r>
           </a:p>
         </p:txBody>
@@ -19768,8 +22518,8 @@
         </p:nvSpPr>
         <p:spPr>
           <a:xfrm>
-            <a:off x="3200400" y="4649723"/>
-            <a:ext cx="6156655" cy="914400"/>
+            <a:off x="3200400" y="4625035"/>
+            <a:ext cx="8351215" cy="865022"/>
           </a:xfrm>
           <a:prstGeom prst="rect">
             <a:avLst/>
@@ -19794,21 +22544,70 @@
                 <a:ea typeface="맑은 고딕"/>
                 <a:cs typeface="맑은 고딕"/>
               </a:rPr>
-              <a:t>점검 요청 초안을 만들고 검증하기</a:t>
-            </a:r>
-          </a:p>
-        </p:txBody>
-      </p:sp>
-      <p:sp>
-        <p:nvSpPr>
-          <p:cNvPr id="21" name="TextBox 20"/>
-          <p:cNvSpPr txBox="1"/>
-          <p:nvPr/>
-        </p:nvSpPr>
-        <p:spPr>
-          <a:xfrm>
-            <a:off x="9448495" y="4649723"/>
-            <a:ext cx="2103120" cy="914400"/>
+              <a:t>Freshness · Coverage</a:t>
+            </a:r>
+          </a:p>
+          <a:p>
+            <a:pPr algn="l" eaLnBrk="0">
+              <a:lnSpc>
+                <a:spcPct val="110000"/>
+              </a:lnSpc>
+            </a:pPr>
+            <a:r>
+              <a:rPr sz="1400" b="0">
+                <a:solidFill>
+                  <a:srgbClr val="1F2A3A"/>
+                </a:solidFill>
+                <a:latin typeface="맑은 고딕"/>
+                <a:ea typeface="맑은 고딕"/>
+                <a:cs typeface="맑은 고딕"/>
+              </a:rPr>
+              <a:t>값이 판단 시점에서 얼마나 묵었는지와, 구간을 채울 만큼 값이 들어왔는지</a:t>
+            </a:r>
+          </a:p>
+        </p:txBody>
+      </p:sp>
+      <p:sp>
+        <p:nvSpPr>
+          <p:cNvPr id="21" name="Rounded Rectangle 20"/>
+          <p:cNvSpPr/>
+          <p:nvPr/>
+        </p:nvSpPr>
+        <p:spPr>
+          <a:xfrm>
+            <a:off x="548640" y="5522061"/>
+            <a:ext cx="11094415" cy="801014"/>
+          </a:xfrm>
+          <a:prstGeom prst="roundRect">
+            <a:avLst>
+              <a:gd name="adj" fmla="val 8000"/>
+            </a:avLst>
+          </a:prstGeom>
+          <a:solidFill>
+            <a:srgbClr val="F3F6F9"/>
+          </a:solidFill>
+          <a:ln>
+            <a:noFill/>
+          </a:ln>
+        </p:spPr>
+        <p:txBody>
+          <a:bodyPr rtlCol="0" anchor="ctr"/>
+          <a:lstStyle/>
+          <a:p>
+            <a:pPr algn="ctr"/>
+          </a:p>
+        </p:txBody>
+      </p:sp>
+      <p:sp>
+        <p:nvSpPr>
+          <p:cNvPr id="22" name="TextBox 21"/>
+          <p:cNvSpPr txBox="1"/>
+          <p:nvPr/>
+        </p:nvSpPr>
+        <p:spPr>
+          <a:xfrm>
+            <a:off x="685800" y="5490057"/>
+            <a:ext cx="2514600" cy="865022"/>
           </a:xfrm>
           <a:prstGeom prst="rect">
             <a:avLst/>
@@ -19825,33 +22624,1038 @@
               </a:lnSpc>
             </a:pPr>
             <a:r>
-              <a:rPr sz="1250" b="1">
-                <a:solidFill>
-                  <a:srgbClr val="1A6FC4"/>
-                </a:solidFill>
-                <a:latin typeface="맑은 고딕"/>
-                <a:ea typeface="맑은 고딕"/>
-                <a:cs typeface="맑은 고딕"/>
-              </a:rPr>
-              <a:t>대상 · 시각 · 근거 · 확인 항목,</a:t>
-            </a:r>
-          </a:p>
-          <a:p>
-            <a:pPr algn="l" eaLnBrk="0">
-              <a:lnSpc>
-                <a:spcPct val="110000"/>
-              </a:lnSpc>
-            </a:pPr>
-            <a:r>
-              <a:rPr sz="1250" b="1">
-                <a:solidFill>
-                  <a:srgbClr val="1A6FC4"/>
-                </a:solidFill>
-                <a:latin typeface="맑은 고딕"/>
-                <a:ea typeface="맑은 고딕"/>
-                <a:cs typeface="맑은 고딕"/>
-              </a:rPr>
-              <a:t>초안과 작업지시 구분</a:t>
+              <a:rPr sz="1600" b="1">
+                <a:solidFill>
+                  <a:srgbClr val="13294B"/>
+                </a:solidFill>
+                <a:latin typeface="맑은 고딕"/>
+                <a:ea typeface="맑은 고딕"/>
+                <a:cs typeface="맑은 고딕"/>
+              </a:rPr>
+              <a:t>구조화 출력</a:t>
+            </a:r>
+          </a:p>
+        </p:txBody>
+      </p:sp>
+      <p:sp>
+        <p:nvSpPr>
+          <p:cNvPr id="23" name="TextBox 22"/>
+          <p:cNvSpPr txBox="1"/>
+          <p:nvPr/>
+        </p:nvSpPr>
+        <p:spPr>
+          <a:xfrm>
+            <a:off x="3200400" y="5490057"/>
+            <a:ext cx="8351215" cy="865022"/>
+          </a:xfrm>
+          <a:prstGeom prst="rect">
+            <a:avLst/>
+          </a:prstGeom>
+          <a:noFill/>
+        </p:spPr>
+        <p:txBody>
+          <a:bodyPr wrap="square" anchor="ctr"/>
+          <a:lstStyle/>
+          <a:p>
+            <a:pPr algn="l" eaLnBrk="0">
+              <a:lnSpc>
+                <a:spcPct val="110000"/>
+              </a:lnSpc>
+            </a:pPr>
+            <a:r>
+              <a:rPr sz="1400" b="0">
+                <a:solidFill>
+                  <a:srgbClr val="1F2A3A"/>
+                </a:solidFill>
+                <a:latin typeface="맑은 고딕"/>
+                <a:ea typeface="맑은 고딕"/>
+                <a:cs typeface="맑은 고딕"/>
+              </a:rPr>
+              <a:t>Structured Output</a:t>
+            </a:r>
+          </a:p>
+          <a:p>
+            <a:pPr algn="l" eaLnBrk="0">
+              <a:lnSpc>
+                <a:spcPct val="110000"/>
+              </a:lnSpc>
+            </a:pPr>
+            <a:r>
+              <a:rPr sz="1400" b="0">
+                <a:solidFill>
+                  <a:srgbClr val="1F2A3A"/>
+                </a:solidFill>
+                <a:latin typeface="맑은 고딕"/>
+                <a:ea typeface="맑은 고딕"/>
+                <a:cs typeface="맑은 고딕"/>
+              </a:rPr>
+              <a:t>다음 단계가 읽도록 항목 이름과 형식을 정해 둔 결과</a:t>
+            </a:r>
+          </a:p>
+        </p:txBody>
+      </p:sp>
+    </p:spTree>
+  </p:cSld>
+  <p:clrMapOvr>
+    <a:masterClrMapping/>
+  </p:clrMapOvr>
+</p:sld>
+</file>
+
+<file path=ppt/slides/slide28.xml><?xml version="1.0" encoding="utf-8"?>
+<p:sld xmlns:a="http://schemas.openxmlformats.org/drawingml/2006/main" xmlns:p="http://schemas.openxmlformats.org/presentationml/2006/main" xmlns:r="http://schemas.openxmlformats.org/officeDocument/2006/relationships">
+  <p:cSld>
+    <p:bg>
+      <p:bgPr>
+        <a:solidFill>
+          <a:srgbClr val="E7F3FD"/>
+        </a:solidFill>
+        <a:effectLst/>
+      </p:bgPr>
+    </p:bg>
+    <p:spTree>
+      <p:nvGrpSpPr>
+        <p:cNvPr id="1" name=""/>
+        <p:cNvGrpSpPr/>
+        <p:nvPr/>
+      </p:nvGrpSpPr>
+      <p:grpSpPr/>
+      <p:sp>
+        <p:nvSpPr>
+          <p:cNvPr id="2" name="TextBox 1"/>
+          <p:cNvSpPr txBox="1"/>
+          <p:nvPr/>
+        </p:nvSpPr>
+        <p:spPr>
+          <a:xfrm>
+            <a:off x="457200" y="384048"/>
+            <a:ext cx="8229600" cy="457200"/>
+          </a:xfrm>
+          <a:prstGeom prst="rect">
+            <a:avLst/>
+          </a:prstGeom>
+          <a:noFill/>
+        </p:spPr>
+        <p:txBody>
+          <a:bodyPr wrap="square" anchor="t"/>
+          <a:lstStyle/>
+          <a:p>
+            <a:pPr algn="l" eaLnBrk="0">
+              <a:lnSpc>
+                <a:spcPct val="110000"/>
+              </a:lnSpc>
+            </a:pPr>
+            <a:r>
+              <a:rPr sz="2000" b="1">
+                <a:solidFill>
+                  <a:srgbClr val="5CB8F2"/>
+                </a:solidFill>
+                <a:latin typeface="맑은 고딕"/>
+                <a:ea typeface="맑은 고딕"/>
+                <a:cs typeface="맑은 고딕"/>
+              </a:rPr>
+              <a:t>경남대학교 피지컬AI 사관학교</a:t>
+            </a:r>
+          </a:p>
+        </p:txBody>
+      </p:sp>
+      <p:sp>
+        <p:nvSpPr>
+          <p:cNvPr id="3" name="Rectangle 2"/>
+          <p:cNvSpPr/>
+          <p:nvPr/>
+        </p:nvSpPr>
+        <p:spPr>
+          <a:xfrm>
+            <a:off x="548640" y="859536"/>
+            <a:ext cx="3606800" cy="41148"/>
+          </a:xfrm>
+          <a:prstGeom prst="rect">
+            <a:avLst/>
+          </a:prstGeom>
+          <a:solidFill>
+            <a:srgbClr val="5CB8F2"/>
+          </a:solidFill>
+          <a:ln>
+            <a:noFill/>
+          </a:ln>
+        </p:spPr>
+        <p:txBody>
+          <a:bodyPr rtlCol="0" anchor="ctr"/>
+          <a:lstStyle/>
+          <a:p>
+            <a:pPr algn="ctr"/>
+          </a:p>
+        </p:txBody>
+      </p:sp>
+      <p:sp>
+        <p:nvSpPr>
+          <p:cNvPr id="4" name="TextBox 3"/>
+          <p:cNvSpPr txBox="1"/>
+          <p:nvPr/>
+        </p:nvSpPr>
+        <p:spPr>
+          <a:xfrm>
+            <a:off x="731520" y="2011680"/>
+            <a:ext cx="10911535" cy="2011680"/>
+          </a:xfrm>
+          <a:prstGeom prst="rect">
+            <a:avLst/>
+          </a:prstGeom>
+          <a:noFill/>
+        </p:spPr>
+        <p:txBody>
+          <a:bodyPr wrap="square" anchor="ctr"/>
+          <a:lstStyle/>
+          <a:p>
+            <a:pPr algn="l" eaLnBrk="0">
+              <a:lnSpc>
+                <a:spcPct val="110000"/>
+              </a:lnSpc>
+            </a:pPr>
+            <a:r>
+              <a:rPr sz="3400" b="1">
+                <a:solidFill>
+                  <a:srgbClr val="13294B"/>
+                </a:solidFill>
+                <a:latin typeface="맑은 고딕"/>
+                <a:ea typeface="맑은 고딕"/>
+                <a:cs typeface="맑은 고딕"/>
+              </a:rPr>
+              <a:t>Review Quiz: 핵심 흐름 되짚어보기</a:t>
+            </a:r>
+          </a:p>
+        </p:txBody>
+      </p:sp>
+      <p:sp>
+        <p:nvSpPr>
+          <p:cNvPr id="5" name="TextBox 4"/>
+          <p:cNvSpPr txBox="1"/>
+          <p:nvPr/>
+        </p:nvSpPr>
+        <p:spPr>
+          <a:xfrm>
+            <a:off x="731520" y="4160520"/>
+            <a:ext cx="10911535" cy="457200"/>
+          </a:xfrm>
+          <a:prstGeom prst="rect">
+            <a:avLst/>
+          </a:prstGeom>
+          <a:noFill/>
+        </p:spPr>
+        <p:txBody>
+          <a:bodyPr wrap="square" anchor="t"/>
+          <a:lstStyle/>
+          <a:p>
+            <a:pPr algn="l" eaLnBrk="0">
+              <a:lnSpc>
+                <a:spcPct val="110000"/>
+              </a:lnSpc>
+            </a:pPr>
+            <a:r>
+              <a:rPr sz="1700" b="0">
+                <a:solidFill>
+                  <a:srgbClr val="556175"/>
+                </a:solidFill>
+                <a:latin typeface="맑은 고딕"/>
+                <a:ea typeface="맑은 고딕"/>
+                <a:cs typeface="맑은 고딕"/>
+              </a:rPr>
+              <a:t>배운 내용을 바탕으로 정답을 맞혀 보세요.</a:t>
+            </a:r>
+          </a:p>
+        </p:txBody>
+      </p:sp>
+    </p:spTree>
+  </p:cSld>
+  <p:clrMapOvr>
+    <a:masterClrMapping/>
+  </p:clrMapOvr>
+</p:sld>
+</file>
+
+<file path=ppt/slides/slide29.xml><?xml version="1.0" encoding="utf-8"?>
+<p:sld xmlns:a="http://schemas.openxmlformats.org/drawingml/2006/main" xmlns:p="http://schemas.openxmlformats.org/presentationml/2006/main" xmlns:r="http://schemas.openxmlformats.org/officeDocument/2006/relationships">
+  <p:cSld>
+    <p:bg>
+      <p:bgPr>
+        <a:solidFill>
+          <a:srgbClr val="FFFFFF"/>
+        </a:solidFill>
+        <a:effectLst/>
+      </p:bgPr>
+    </p:bg>
+    <p:spTree>
+      <p:nvGrpSpPr>
+        <p:cNvPr id="1" name=""/>
+        <p:cNvGrpSpPr/>
+        <p:nvPr/>
+      </p:nvGrpSpPr>
+      <p:grpSpPr/>
+      <p:sp>
+        <p:nvSpPr>
+          <p:cNvPr id="2" name="TextBox 1"/>
+          <p:cNvSpPr txBox="1"/>
+          <p:nvPr/>
+        </p:nvSpPr>
+        <p:spPr>
+          <a:xfrm>
+            <a:off x="457200" y="329184"/>
+            <a:ext cx="11277295" cy="603504"/>
+          </a:xfrm>
+          <a:prstGeom prst="rect">
+            <a:avLst/>
+          </a:prstGeom>
+          <a:noFill/>
+        </p:spPr>
+        <p:txBody>
+          <a:bodyPr wrap="square" anchor="ctr"/>
+          <a:lstStyle/>
+          <a:p>
+            <a:pPr algn="l" eaLnBrk="0">
+              <a:lnSpc>
+                <a:spcPct val="110000"/>
+              </a:lnSpc>
+            </a:pPr>
+            <a:r>
+              <a:rPr sz="2800" b="1">
+                <a:solidFill>
+                  <a:srgbClr val="13294B"/>
+                </a:solidFill>
+                <a:latin typeface="맑은 고딕"/>
+                <a:ea typeface="맑은 고딕"/>
+                <a:cs typeface="맑은 고딕"/>
+              </a:rPr>
+              <a:t>Quiz 1. 진행 설명만 남은 확인</a:t>
+            </a:r>
+          </a:p>
+        </p:txBody>
+      </p:sp>
+      <p:sp>
+        <p:nvSpPr>
+          <p:cNvPr id="3" name="TextBox 2"/>
+          <p:cNvSpPr txBox="1"/>
+          <p:nvPr/>
+        </p:nvSpPr>
+        <p:spPr>
+          <a:xfrm>
+            <a:off x="457200" y="932688"/>
+            <a:ext cx="11277295" cy="420624"/>
+          </a:xfrm>
+          <a:prstGeom prst="rect">
+            <a:avLst/>
+          </a:prstGeom>
+          <a:noFill/>
+        </p:spPr>
+        <p:txBody>
+          <a:bodyPr wrap="square" anchor="ctr"/>
+          <a:lstStyle/>
+          <a:p>
+            <a:pPr algn="l" eaLnBrk="0">
+              <a:lnSpc>
+                <a:spcPct val="110000"/>
+              </a:lnSpc>
+            </a:pPr>
+            <a:r>
+              <a:rPr sz="1600" b="0">
+                <a:solidFill>
+                  <a:srgbClr val="556175"/>
+                </a:solidFill>
+                <a:latin typeface="맑은 고딕"/>
+                <a:ea typeface="맑은 고딕"/>
+                <a:cs typeface="맑은 고딕"/>
+              </a:rPr>
+              <a:t>점검 요청 초안에 「냉각 효율을 확인했다」고 적혔는데, 처리 기록에는 그 값을 돌려준 호출이 없다.</a:t>
+            </a:r>
+          </a:p>
+        </p:txBody>
+      </p:sp>
+      <p:sp>
+        <p:nvSpPr>
+          <p:cNvPr id="4" name="Rectangle 3"/>
+          <p:cNvSpPr/>
+          <p:nvPr/>
+        </p:nvSpPr>
+        <p:spPr>
+          <a:xfrm>
+            <a:off x="548640" y="1408176"/>
+            <a:ext cx="11094415" cy="18288"/>
+          </a:xfrm>
+          <a:prstGeom prst="rect">
+            <a:avLst/>
+          </a:prstGeom>
+          <a:solidFill>
+            <a:srgbClr val="D3D9E1"/>
+          </a:solidFill>
+          <a:ln>
+            <a:noFill/>
+          </a:ln>
+        </p:spPr>
+        <p:txBody>
+          <a:bodyPr rtlCol="0" anchor="ctr"/>
+          <a:lstStyle/>
+          <a:p>
+            <a:pPr algn="ctr"/>
+          </a:p>
+        </p:txBody>
+      </p:sp>
+      <p:sp>
+        <p:nvSpPr>
+          <p:cNvPr id="5" name="TextBox 4"/>
+          <p:cNvSpPr txBox="1"/>
+          <p:nvPr/>
+        </p:nvSpPr>
+        <p:spPr>
+          <a:xfrm>
+            <a:off x="10911535" y="6473952"/>
+            <a:ext cx="822960" cy="274320"/>
+          </a:xfrm>
+          <a:prstGeom prst="rect">
+            <a:avLst/>
+          </a:prstGeom>
+          <a:noFill/>
+        </p:spPr>
+        <p:txBody>
+          <a:bodyPr wrap="square" anchor="t"/>
+          <a:lstStyle/>
+          <a:p>
+            <a:pPr algn="r" eaLnBrk="0">
+              <a:lnSpc>
+                <a:spcPct val="110000"/>
+              </a:lnSpc>
+            </a:pPr>
+            <a:r>
+              <a:rPr sz="1000" b="0">
+                <a:solidFill>
+                  <a:srgbClr val="556175"/>
+                </a:solidFill>
+                <a:latin typeface="맑은 고딕"/>
+                <a:ea typeface="맑은 고딕"/>
+                <a:cs typeface="맑은 고딕"/>
+              </a:rPr>
+              <a:t>29</a:t>
+            </a:r>
+          </a:p>
+        </p:txBody>
+      </p:sp>
+      <p:sp>
+        <p:nvSpPr>
+          <p:cNvPr id="6" name="Rounded Rectangle 5"/>
+          <p:cNvSpPr/>
+          <p:nvPr/>
+        </p:nvSpPr>
+        <p:spPr>
+          <a:xfrm>
+            <a:off x="548640" y="1627632"/>
+            <a:ext cx="11094415" cy="704088"/>
+          </a:xfrm>
+          <a:prstGeom prst="roundRect">
+            <a:avLst>
+              <a:gd name="adj" fmla="val 5000"/>
+            </a:avLst>
+          </a:prstGeom>
+          <a:solidFill>
+            <a:srgbClr val="E7F3FD"/>
+          </a:solidFill>
+          <a:ln>
+            <a:noFill/>
+          </a:ln>
+        </p:spPr>
+        <p:txBody>
+          <a:bodyPr rtlCol="0" anchor="ctr"/>
+          <a:lstStyle/>
+          <a:p>
+            <a:pPr algn="ctr"/>
+          </a:p>
+        </p:txBody>
+      </p:sp>
+      <p:sp>
+        <p:nvSpPr>
+          <p:cNvPr id="7" name="TextBox 6"/>
+          <p:cNvSpPr txBox="1"/>
+          <p:nvPr/>
+        </p:nvSpPr>
+        <p:spPr>
+          <a:xfrm>
+            <a:off x="777240" y="1627632"/>
+            <a:ext cx="10637215" cy="704088"/>
+          </a:xfrm>
+          <a:prstGeom prst="rect">
+            <a:avLst/>
+          </a:prstGeom>
+          <a:noFill/>
+        </p:spPr>
+        <p:txBody>
+          <a:bodyPr wrap="square" anchor="ctr"/>
+          <a:lstStyle/>
+          <a:p>
+            <a:pPr algn="l" eaLnBrk="0">
+              <a:lnSpc>
+                <a:spcPct val="110000"/>
+              </a:lnSpc>
+            </a:pPr>
+            <a:r>
+              <a:rPr sz="1900" b="1">
+                <a:solidFill>
+                  <a:srgbClr val="13294B"/>
+                </a:solidFill>
+                <a:latin typeface="맑은 고딕"/>
+                <a:ea typeface="맑은 고딕"/>
+                <a:cs typeface="맑은 고딕"/>
+              </a:rPr>
+              <a:t>이 초안의 근거를 어떻게 봐야 하나?</a:t>
+            </a:r>
+          </a:p>
+        </p:txBody>
+      </p:sp>
+      <p:sp>
+        <p:nvSpPr>
+          <p:cNvPr id="8" name="Rounded Rectangle 7"/>
+          <p:cNvSpPr/>
+          <p:nvPr/>
+        </p:nvSpPr>
+        <p:spPr>
+          <a:xfrm>
+            <a:off x="548640" y="2560320"/>
+            <a:ext cx="11094415" cy="822960"/>
+          </a:xfrm>
+          <a:prstGeom prst="roundRect">
+            <a:avLst>
+              <a:gd name="adj" fmla="val 8000"/>
+            </a:avLst>
+          </a:prstGeom>
+          <a:solidFill>
+            <a:srgbClr val="F3F6F9"/>
+          </a:solidFill>
+          <a:ln>
+            <a:noFill/>
+          </a:ln>
+        </p:spPr>
+        <p:txBody>
+          <a:bodyPr rtlCol="0" anchor="ctr"/>
+          <a:lstStyle/>
+          <a:p>
+            <a:pPr algn="ctr"/>
+          </a:p>
+        </p:txBody>
+      </p:sp>
+      <p:sp>
+        <p:nvSpPr>
+          <p:cNvPr id="9" name="Oval 8"/>
+          <p:cNvSpPr/>
+          <p:nvPr/>
+        </p:nvSpPr>
+        <p:spPr>
+          <a:xfrm>
+            <a:off x="731520" y="2788920"/>
+            <a:ext cx="365760" cy="365760"/>
+          </a:xfrm>
+          <a:prstGeom prst="ellipse">
+            <a:avLst/>
+          </a:prstGeom>
+          <a:solidFill>
+            <a:srgbClr val="13294B"/>
+          </a:solidFill>
+          <a:ln>
+            <a:noFill/>
+          </a:ln>
+        </p:spPr>
+        <p:txBody>
+          <a:bodyPr rtlCol="0" anchor="ctr"/>
+          <a:lstStyle/>
+          <a:p>
+            <a:pPr algn="ctr"/>
+          </a:p>
+        </p:txBody>
+      </p:sp>
+      <p:sp>
+        <p:nvSpPr>
+          <p:cNvPr id="10" name="TextBox 9"/>
+          <p:cNvSpPr txBox="1"/>
+          <p:nvPr/>
+        </p:nvSpPr>
+        <p:spPr>
+          <a:xfrm>
+            <a:off x="731520" y="2788920"/>
+            <a:ext cx="365760" cy="365760"/>
+          </a:xfrm>
+          <a:prstGeom prst="rect">
+            <a:avLst/>
+          </a:prstGeom>
+          <a:noFill/>
+        </p:spPr>
+        <p:txBody>
+          <a:bodyPr wrap="square" anchor="ctr"/>
+          <a:lstStyle/>
+          <a:p>
+            <a:pPr algn="ctr" eaLnBrk="0">
+              <a:lnSpc>
+                <a:spcPct val="110000"/>
+              </a:lnSpc>
+            </a:pPr>
+            <a:r>
+              <a:rPr sz="1300" b="1">
+                <a:solidFill>
+                  <a:srgbClr val="FFFFFF"/>
+                </a:solidFill>
+                <a:latin typeface="맑은 고딕"/>
+                <a:ea typeface="맑은 고딕"/>
+                <a:cs typeface="맑은 고딕"/>
+              </a:rPr>
+              <a:t>1</a:t>
+            </a:r>
+          </a:p>
+        </p:txBody>
+      </p:sp>
+      <p:sp>
+        <p:nvSpPr>
+          <p:cNvPr id="11" name="TextBox 10"/>
+          <p:cNvSpPr txBox="1"/>
+          <p:nvPr/>
+        </p:nvSpPr>
+        <p:spPr>
+          <a:xfrm>
+            <a:off x="1234440" y="2514600"/>
+            <a:ext cx="10225735" cy="914400"/>
+          </a:xfrm>
+          <a:prstGeom prst="rect">
+            <a:avLst/>
+          </a:prstGeom>
+          <a:noFill/>
+        </p:spPr>
+        <p:txBody>
+          <a:bodyPr wrap="square" anchor="ctr"/>
+          <a:lstStyle/>
+          <a:p>
+            <a:pPr algn="l" eaLnBrk="0">
+              <a:lnSpc>
+                <a:spcPct val="110000"/>
+              </a:lnSpc>
+            </a:pPr>
+            <a:r>
+              <a:rPr sz="1550" b="1">
+                <a:solidFill>
+                  <a:srgbClr val="1F2A3A"/>
+                </a:solidFill>
+                <a:latin typeface="맑은 고딕"/>
+                <a:ea typeface="맑은 고딕"/>
+                <a:cs typeface="맑은 고딕"/>
+              </a:rPr>
+              <a:t>에이전트가 진행 설명에 확인했다고 남겼으니 확인된 근거로 본다</a:t>
+            </a:r>
+          </a:p>
+        </p:txBody>
+      </p:sp>
+      <p:sp>
+        <p:nvSpPr>
+          <p:cNvPr id="12" name="Rounded Rectangle 11"/>
+          <p:cNvSpPr/>
+          <p:nvPr/>
+        </p:nvSpPr>
+        <p:spPr>
+          <a:xfrm>
+            <a:off x="548640" y="3474720"/>
+            <a:ext cx="11094415" cy="822960"/>
+          </a:xfrm>
+          <a:prstGeom prst="roundRect">
+            <a:avLst>
+              <a:gd name="adj" fmla="val 8000"/>
+            </a:avLst>
+          </a:prstGeom>
+          <a:solidFill>
+            <a:srgbClr val="F3F6F9"/>
+          </a:solidFill>
+          <a:ln>
+            <a:noFill/>
+          </a:ln>
+        </p:spPr>
+        <p:txBody>
+          <a:bodyPr rtlCol="0" anchor="ctr"/>
+          <a:lstStyle/>
+          <a:p>
+            <a:pPr algn="ctr"/>
+          </a:p>
+        </p:txBody>
+      </p:sp>
+      <p:sp>
+        <p:nvSpPr>
+          <p:cNvPr id="13" name="Oval 12"/>
+          <p:cNvSpPr/>
+          <p:nvPr/>
+        </p:nvSpPr>
+        <p:spPr>
+          <a:xfrm>
+            <a:off x="731520" y="3703320"/>
+            <a:ext cx="365760" cy="365760"/>
+          </a:xfrm>
+          <a:prstGeom prst="ellipse">
+            <a:avLst/>
+          </a:prstGeom>
+          <a:solidFill>
+            <a:srgbClr val="13294B"/>
+          </a:solidFill>
+          <a:ln>
+            <a:noFill/>
+          </a:ln>
+        </p:spPr>
+        <p:txBody>
+          <a:bodyPr rtlCol="0" anchor="ctr"/>
+          <a:lstStyle/>
+          <a:p>
+            <a:pPr algn="ctr"/>
+          </a:p>
+        </p:txBody>
+      </p:sp>
+      <p:sp>
+        <p:nvSpPr>
+          <p:cNvPr id="14" name="TextBox 13"/>
+          <p:cNvSpPr txBox="1"/>
+          <p:nvPr/>
+        </p:nvSpPr>
+        <p:spPr>
+          <a:xfrm>
+            <a:off x="731520" y="3703320"/>
+            <a:ext cx="365760" cy="365760"/>
+          </a:xfrm>
+          <a:prstGeom prst="rect">
+            <a:avLst/>
+          </a:prstGeom>
+          <a:noFill/>
+        </p:spPr>
+        <p:txBody>
+          <a:bodyPr wrap="square" anchor="ctr"/>
+          <a:lstStyle/>
+          <a:p>
+            <a:pPr algn="ctr" eaLnBrk="0">
+              <a:lnSpc>
+                <a:spcPct val="110000"/>
+              </a:lnSpc>
+            </a:pPr>
+            <a:r>
+              <a:rPr sz="1300" b="1">
+                <a:solidFill>
+                  <a:srgbClr val="FFFFFF"/>
+                </a:solidFill>
+                <a:latin typeface="맑은 고딕"/>
+                <a:ea typeface="맑은 고딕"/>
+                <a:cs typeface="맑은 고딕"/>
+              </a:rPr>
+              <a:t>2</a:t>
+            </a:r>
+          </a:p>
+        </p:txBody>
+      </p:sp>
+      <p:sp>
+        <p:nvSpPr>
+          <p:cNvPr id="15" name="TextBox 14"/>
+          <p:cNvSpPr txBox="1"/>
+          <p:nvPr/>
+        </p:nvSpPr>
+        <p:spPr>
+          <a:xfrm>
+            <a:off x="1234440" y="3429000"/>
+            <a:ext cx="10225735" cy="914400"/>
+          </a:xfrm>
+          <a:prstGeom prst="rect">
+            <a:avLst/>
+          </a:prstGeom>
+          <a:noFill/>
+        </p:spPr>
+        <p:txBody>
+          <a:bodyPr wrap="square" anchor="ctr"/>
+          <a:lstStyle/>
+          <a:p>
+            <a:pPr algn="l" eaLnBrk="0">
+              <a:lnSpc>
+                <a:spcPct val="110000"/>
+              </a:lnSpc>
+            </a:pPr>
+            <a:r>
+              <a:rPr sz="1550" b="1">
+                <a:solidFill>
+                  <a:srgbClr val="1F2A3A"/>
+                </a:solidFill>
+                <a:latin typeface="맑은 고딕"/>
+                <a:ea typeface="맑은 고딕"/>
+                <a:cs typeface="맑은 고딕"/>
+              </a:rPr>
+              <a:t>그 값을 돌려준 호출을 찾지 못했으니 근거가 확인되지 않은 것으로 본다</a:t>
+            </a:r>
+          </a:p>
+        </p:txBody>
+      </p:sp>
+      <p:sp>
+        <p:nvSpPr>
+          <p:cNvPr id="16" name="Rounded Rectangle 15"/>
+          <p:cNvSpPr/>
+          <p:nvPr/>
+        </p:nvSpPr>
+        <p:spPr>
+          <a:xfrm>
+            <a:off x="548640" y="4389120"/>
+            <a:ext cx="11094415" cy="822960"/>
+          </a:xfrm>
+          <a:prstGeom prst="roundRect">
+            <a:avLst>
+              <a:gd name="adj" fmla="val 8000"/>
+            </a:avLst>
+          </a:prstGeom>
+          <a:solidFill>
+            <a:srgbClr val="F3F6F9"/>
+          </a:solidFill>
+          <a:ln>
+            <a:noFill/>
+          </a:ln>
+        </p:spPr>
+        <p:txBody>
+          <a:bodyPr rtlCol="0" anchor="ctr"/>
+          <a:lstStyle/>
+          <a:p>
+            <a:pPr algn="ctr"/>
+          </a:p>
+        </p:txBody>
+      </p:sp>
+      <p:sp>
+        <p:nvSpPr>
+          <p:cNvPr id="17" name="Oval 16"/>
+          <p:cNvSpPr/>
+          <p:nvPr/>
+        </p:nvSpPr>
+        <p:spPr>
+          <a:xfrm>
+            <a:off x="731520" y="4617720"/>
+            <a:ext cx="365760" cy="365760"/>
+          </a:xfrm>
+          <a:prstGeom prst="ellipse">
+            <a:avLst/>
+          </a:prstGeom>
+          <a:solidFill>
+            <a:srgbClr val="13294B"/>
+          </a:solidFill>
+          <a:ln>
+            <a:noFill/>
+          </a:ln>
+        </p:spPr>
+        <p:txBody>
+          <a:bodyPr rtlCol="0" anchor="ctr"/>
+          <a:lstStyle/>
+          <a:p>
+            <a:pPr algn="ctr"/>
+          </a:p>
+        </p:txBody>
+      </p:sp>
+      <p:sp>
+        <p:nvSpPr>
+          <p:cNvPr id="18" name="TextBox 17"/>
+          <p:cNvSpPr txBox="1"/>
+          <p:nvPr/>
+        </p:nvSpPr>
+        <p:spPr>
+          <a:xfrm>
+            <a:off x="731520" y="4617720"/>
+            <a:ext cx="365760" cy="365760"/>
+          </a:xfrm>
+          <a:prstGeom prst="rect">
+            <a:avLst/>
+          </a:prstGeom>
+          <a:noFill/>
+        </p:spPr>
+        <p:txBody>
+          <a:bodyPr wrap="square" anchor="ctr"/>
+          <a:lstStyle/>
+          <a:p>
+            <a:pPr algn="ctr" eaLnBrk="0">
+              <a:lnSpc>
+                <a:spcPct val="110000"/>
+              </a:lnSpc>
+            </a:pPr>
+            <a:r>
+              <a:rPr sz="1300" b="1">
+                <a:solidFill>
+                  <a:srgbClr val="FFFFFF"/>
+                </a:solidFill>
+                <a:latin typeface="맑은 고딕"/>
+                <a:ea typeface="맑은 고딕"/>
+                <a:cs typeface="맑은 고딕"/>
+              </a:rPr>
+              <a:t>3</a:t>
+            </a:r>
+          </a:p>
+        </p:txBody>
+      </p:sp>
+      <p:sp>
+        <p:nvSpPr>
+          <p:cNvPr id="19" name="TextBox 18"/>
+          <p:cNvSpPr txBox="1"/>
+          <p:nvPr/>
+        </p:nvSpPr>
+        <p:spPr>
+          <a:xfrm>
+            <a:off x="1234440" y="4343400"/>
+            <a:ext cx="10225735" cy="914400"/>
+          </a:xfrm>
+          <a:prstGeom prst="rect">
+            <a:avLst/>
+          </a:prstGeom>
+          <a:noFill/>
+        </p:spPr>
+        <p:txBody>
+          <a:bodyPr wrap="square" anchor="ctr"/>
+          <a:lstStyle/>
+          <a:p>
+            <a:pPr algn="l" eaLnBrk="0">
+              <a:lnSpc>
+                <a:spcPct val="110000"/>
+              </a:lnSpc>
+            </a:pPr>
+            <a:r>
+              <a:rPr sz="1550" b="1">
+                <a:solidFill>
+                  <a:srgbClr val="1F2A3A"/>
+                </a:solidFill>
+                <a:latin typeface="맑은 고딕"/>
+                <a:ea typeface="맑은 고딕"/>
+                <a:cs typeface="맑은 고딕"/>
+              </a:rPr>
+              <a:t>초안에 46.2 %라는 값이 적혀 있으니 시계열 DB를 읽은 것으로 본다</a:t>
+            </a:r>
+          </a:p>
+        </p:txBody>
+      </p:sp>
+      <p:sp>
+        <p:nvSpPr>
+          <p:cNvPr id="20" name="Rounded Rectangle 19"/>
+          <p:cNvSpPr/>
+          <p:nvPr/>
+        </p:nvSpPr>
+        <p:spPr>
+          <a:xfrm>
+            <a:off x="548640" y="5303520"/>
+            <a:ext cx="11094415" cy="822960"/>
+          </a:xfrm>
+          <a:prstGeom prst="roundRect">
+            <a:avLst>
+              <a:gd name="adj" fmla="val 8000"/>
+            </a:avLst>
+          </a:prstGeom>
+          <a:solidFill>
+            <a:srgbClr val="F3F6F9"/>
+          </a:solidFill>
+          <a:ln>
+            <a:noFill/>
+          </a:ln>
+        </p:spPr>
+        <p:txBody>
+          <a:bodyPr rtlCol="0" anchor="ctr"/>
+          <a:lstStyle/>
+          <a:p>
+            <a:pPr algn="ctr"/>
+          </a:p>
+        </p:txBody>
+      </p:sp>
+      <p:sp>
+        <p:nvSpPr>
+          <p:cNvPr id="21" name="Oval 20"/>
+          <p:cNvSpPr/>
+          <p:nvPr/>
+        </p:nvSpPr>
+        <p:spPr>
+          <a:xfrm>
+            <a:off x="731520" y="5532120"/>
+            <a:ext cx="365760" cy="365760"/>
+          </a:xfrm>
+          <a:prstGeom prst="ellipse">
+            <a:avLst/>
+          </a:prstGeom>
+          <a:solidFill>
+            <a:srgbClr val="13294B"/>
+          </a:solidFill>
+          <a:ln>
+            <a:noFill/>
+          </a:ln>
+        </p:spPr>
+        <p:txBody>
+          <a:bodyPr rtlCol="0" anchor="ctr"/>
+          <a:lstStyle/>
+          <a:p>
+            <a:pPr algn="ctr"/>
+          </a:p>
+        </p:txBody>
+      </p:sp>
+      <p:sp>
+        <p:nvSpPr>
+          <p:cNvPr id="22" name="TextBox 21"/>
+          <p:cNvSpPr txBox="1"/>
+          <p:nvPr/>
+        </p:nvSpPr>
+        <p:spPr>
+          <a:xfrm>
+            <a:off x="731520" y="5532120"/>
+            <a:ext cx="365760" cy="365760"/>
+          </a:xfrm>
+          <a:prstGeom prst="rect">
+            <a:avLst/>
+          </a:prstGeom>
+          <a:noFill/>
+        </p:spPr>
+        <p:txBody>
+          <a:bodyPr wrap="square" anchor="ctr"/>
+          <a:lstStyle/>
+          <a:p>
+            <a:pPr algn="ctr" eaLnBrk="0">
+              <a:lnSpc>
+                <a:spcPct val="110000"/>
+              </a:lnSpc>
+            </a:pPr>
+            <a:r>
+              <a:rPr sz="1300" b="1">
+                <a:solidFill>
+                  <a:srgbClr val="FFFFFF"/>
+                </a:solidFill>
+                <a:latin typeface="맑은 고딕"/>
+                <a:ea typeface="맑은 고딕"/>
+                <a:cs typeface="맑은 고딕"/>
+              </a:rPr>
+              <a:t>4</a:t>
+            </a:r>
+          </a:p>
+        </p:txBody>
+      </p:sp>
+      <p:sp>
+        <p:nvSpPr>
+          <p:cNvPr id="23" name="TextBox 22"/>
+          <p:cNvSpPr txBox="1"/>
+          <p:nvPr/>
+        </p:nvSpPr>
+        <p:spPr>
+          <a:xfrm>
+            <a:off x="1234440" y="5257800"/>
+            <a:ext cx="10225735" cy="914400"/>
+          </a:xfrm>
+          <a:prstGeom prst="rect">
+            <a:avLst/>
+          </a:prstGeom>
+          <a:noFill/>
+        </p:spPr>
+        <p:txBody>
+          <a:bodyPr wrap="square" anchor="ctr"/>
+          <a:lstStyle/>
+          <a:p>
+            <a:pPr algn="l" eaLnBrk="0">
+              <a:lnSpc>
+                <a:spcPct val="110000"/>
+              </a:lnSpc>
+            </a:pPr>
+            <a:r>
+              <a:rPr sz="1550" b="1">
+                <a:solidFill>
+                  <a:srgbClr val="1F2A3A"/>
+                </a:solidFill>
+                <a:latin typeface="맑은 고딕"/>
+                <a:ea typeface="맑은 고딕"/>
+                <a:cs typeface="맑은 고딕"/>
+              </a:rPr>
+              <a:t>모델이 쿨러 사건을 학습했을 수 있으니 값을 그대로 쓴다</a:t>
             </a:r>
           </a:p>
         </p:txBody>
@@ -20676,6 +24480,2358 @@
 </p:sld>
 </file>
 
+<file path=ppt/slides/slide30.xml><?xml version="1.0" encoding="utf-8"?>
+<p:sld xmlns:a="http://schemas.openxmlformats.org/drawingml/2006/main" xmlns:p="http://schemas.openxmlformats.org/presentationml/2006/main" xmlns:r="http://schemas.openxmlformats.org/officeDocument/2006/relationships">
+  <p:cSld>
+    <p:bg>
+      <p:bgPr>
+        <a:solidFill>
+          <a:srgbClr val="FFFFFF"/>
+        </a:solidFill>
+        <a:effectLst/>
+      </p:bgPr>
+    </p:bg>
+    <p:spTree>
+      <p:nvGrpSpPr>
+        <p:cNvPr id="1" name=""/>
+        <p:cNvGrpSpPr/>
+        <p:nvPr/>
+      </p:nvGrpSpPr>
+      <p:grpSpPr/>
+      <p:sp>
+        <p:nvSpPr>
+          <p:cNvPr id="2" name="TextBox 1"/>
+          <p:cNvSpPr txBox="1"/>
+          <p:nvPr/>
+        </p:nvSpPr>
+        <p:spPr>
+          <a:xfrm>
+            <a:off x="457200" y="329184"/>
+            <a:ext cx="11277295" cy="603504"/>
+          </a:xfrm>
+          <a:prstGeom prst="rect">
+            <a:avLst/>
+          </a:prstGeom>
+          <a:noFill/>
+        </p:spPr>
+        <p:txBody>
+          <a:bodyPr wrap="square" anchor="ctr"/>
+          <a:lstStyle/>
+          <a:p>
+            <a:pPr algn="l" eaLnBrk="0">
+              <a:lnSpc>
+                <a:spcPct val="110000"/>
+              </a:lnSpc>
+            </a:pPr>
+            <a:r>
+              <a:rPr sz="2800" b="1">
+                <a:solidFill>
+                  <a:srgbClr val="13294B"/>
+                </a:solidFill>
+                <a:latin typeface="맑은 고딕"/>
+                <a:ea typeface="맑은 고딕"/>
+                <a:cs typeface="맑은 고딕"/>
+              </a:rPr>
+              <a:t>Quiz 2. 어느 기준에도 맞지 않은 값</a:t>
+            </a:r>
+          </a:p>
+        </p:txBody>
+      </p:sp>
+      <p:sp>
+        <p:nvSpPr>
+          <p:cNvPr id="3" name="TextBox 2"/>
+          <p:cNvSpPr txBox="1"/>
+          <p:nvPr/>
+        </p:nvSpPr>
+        <p:spPr>
+          <a:xfrm>
+            <a:off x="457200" y="932688"/>
+            <a:ext cx="11277295" cy="420624"/>
+          </a:xfrm>
+          <a:prstGeom prst="rect">
+            <a:avLst/>
+          </a:prstGeom>
+          <a:noFill/>
+        </p:spPr>
+        <p:txBody>
+          <a:bodyPr wrap="square" anchor="ctr"/>
+          <a:lstStyle/>
+          <a:p>
+            <a:pPr algn="l" eaLnBrk="0">
+              <a:lnSpc>
+                <a:spcPct val="110000"/>
+              </a:lnSpc>
+            </a:pPr>
+            <a:r>
+              <a:rPr sz="1600" b="0">
+                <a:solidFill>
+                  <a:srgbClr val="556175"/>
+                </a:solidFill>
+                <a:latin typeface="맑은 고딕"/>
+                <a:ea typeface="맑은 고딕"/>
+                <a:cs typeface="맑은 고딕"/>
+              </a:rPr>
+              <a:t>유온 경보에서 냉각 효율 85 % · 팬 진동 정상 · 캐비닛 온도 기준 아래가 모두 방금 관측한 값으로 읽혔다.</a:t>
+            </a:r>
+          </a:p>
+        </p:txBody>
+      </p:sp>
+      <p:sp>
+        <p:nvSpPr>
+          <p:cNvPr id="4" name="Rectangle 3"/>
+          <p:cNvSpPr/>
+          <p:nvPr/>
+        </p:nvSpPr>
+        <p:spPr>
+          <a:xfrm>
+            <a:off x="548640" y="1408176"/>
+            <a:ext cx="11094415" cy="18288"/>
+          </a:xfrm>
+          <a:prstGeom prst="rect">
+            <a:avLst/>
+          </a:prstGeom>
+          <a:solidFill>
+            <a:srgbClr val="D3D9E1"/>
+          </a:solidFill>
+          <a:ln>
+            <a:noFill/>
+          </a:ln>
+        </p:spPr>
+        <p:txBody>
+          <a:bodyPr rtlCol="0" anchor="ctr"/>
+          <a:lstStyle/>
+          <a:p>
+            <a:pPr algn="ctr"/>
+          </a:p>
+        </p:txBody>
+      </p:sp>
+      <p:sp>
+        <p:nvSpPr>
+          <p:cNvPr id="5" name="TextBox 4"/>
+          <p:cNvSpPr txBox="1"/>
+          <p:nvPr/>
+        </p:nvSpPr>
+        <p:spPr>
+          <a:xfrm>
+            <a:off x="10911535" y="6473952"/>
+            <a:ext cx="822960" cy="274320"/>
+          </a:xfrm>
+          <a:prstGeom prst="rect">
+            <a:avLst/>
+          </a:prstGeom>
+          <a:noFill/>
+        </p:spPr>
+        <p:txBody>
+          <a:bodyPr wrap="square" anchor="t"/>
+          <a:lstStyle/>
+          <a:p>
+            <a:pPr algn="r" eaLnBrk="0">
+              <a:lnSpc>
+                <a:spcPct val="110000"/>
+              </a:lnSpc>
+            </a:pPr>
+            <a:r>
+              <a:rPr sz="1000" b="0">
+                <a:solidFill>
+                  <a:srgbClr val="556175"/>
+                </a:solidFill>
+                <a:latin typeface="맑은 고딕"/>
+                <a:ea typeface="맑은 고딕"/>
+                <a:cs typeface="맑은 고딕"/>
+              </a:rPr>
+              <a:t>30</a:t>
+            </a:r>
+          </a:p>
+        </p:txBody>
+      </p:sp>
+      <p:sp>
+        <p:nvSpPr>
+          <p:cNvPr id="6" name="Rounded Rectangle 5"/>
+          <p:cNvSpPr/>
+          <p:nvPr/>
+        </p:nvSpPr>
+        <p:spPr>
+          <a:xfrm>
+            <a:off x="548640" y="1627632"/>
+            <a:ext cx="11094415" cy="704088"/>
+          </a:xfrm>
+          <a:prstGeom prst="roundRect">
+            <a:avLst>
+              <a:gd name="adj" fmla="val 5000"/>
+            </a:avLst>
+          </a:prstGeom>
+          <a:solidFill>
+            <a:srgbClr val="E7F3FD"/>
+          </a:solidFill>
+          <a:ln>
+            <a:noFill/>
+          </a:ln>
+        </p:spPr>
+        <p:txBody>
+          <a:bodyPr rtlCol="0" anchor="ctr"/>
+          <a:lstStyle/>
+          <a:p>
+            <a:pPr algn="ctr"/>
+          </a:p>
+        </p:txBody>
+      </p:sp>
+      <p:sp>
+        <p:nvSpPr>
+          <p:cNvPr id="7" name="TextBox 6"/>
+          <p:cNvSpPr txBox="1"/>
+          <p:nvPr/>
+        </p:nvSpPr>
+        <p:spPr>
+          <a:xfrm>
+            <a:off x="777240" y="1627632"/>
+            <a:ext cx="10637215" cy="704088"/>
+          </a:xfrm>
+          <a:prstGeom prst="rect">
+            <a:avLst/>
+          </a:prstGeom>
+          <a:noFill/>
+        </p:spPr>
+        <p:txBody>
+          <a:bodyPr wrap="square" anchor="ctr"/>
+          <a:lstStyle/>
+          <a:p>
+            <a:pPr algn="l" eaLnBrk="0">
+              <a:lnSpc>
+                <a:spcPct val="110000"/>
+              </a:lnSpc>
+            </a:pPr>
+            <a:r>
+              <a:rPr sz="1900" b="1">
+                <a:solidFill>
+                  <a:srgbClr val="13294B"/>
+                </a:solidFill>
+                <a:latin typeface="맑은 고딕"/>
+                <a:ea typeface="맑은 고딕"/>
+                <a:cs typeface="맑은 고딕"/>
+              </a:rPr>
+              <a:t>이 근거의 처리로 맞는 것은?</a:t>
+            </a:r>
+          </a:p>
+        </p:txBody>
+      </p:sp>
+      <p:sp>
+        <p:nvSpPr>
+          <p:cNvPr id="8" name="Rounded Rectangle 7"/>
+          <p:cNvSpPr/>
+          <p:nvPr/>
+        </p:nvSpPr>
+        <p:spPr>
+          <a:xfrm>
+            <a:off x="548640" y="2560320"/>
+            <a:ext cx="11094415" cy="822960"/>
+          </a:xfrm>
+          <a:prstGeom prst="roundRect">
+            <a:avLst>
+              <a:gd name="adj" fmla="val 8000"/>
+            </a:avLst>
+          </a:prstGeom>
+          <a:solidFill>
+            <a:srgbClr val="F3F6F9"/>
+          </a:solidFill>
+          <a:ln>
+            <a:noFill/>
+          </a:ln>
+        </p:spPr>
+        <p:txBody>
+          <a:bodyPr rtlCol="0" anchor="ctr"/>
+          <a:lstStyle/>
+          <a:p>
+            <a:pPr algn="ctr"/>
+          </a:p>
+        </p:txBody>
+      </p:sp>
+      <p:sp>
+        <p:nvSpPr>
+          <p:cNvPr id="9" name="Oval 8"/>
+          <p:cNvSpPr/>
+          <p:nvPr/>
+        </p:nvSpPr>
+        <p:spPr>
+          <a:xfrm>
+            <a:off x="731520" y="2788920"/>
+            <a:ext cx="365760" cy="365760"/>
+          </a:xfrm>
+          <a:prstGeom prst="ellipse">
+            <a:avLst/>
+          </a:prstGeom>
+          <a:solidFill>
+            <a:srgbClr val="13294B"/>
+          </a:solidFill>
+          <a:ln>
+            <a:noFill/>
+          </a:ln>
+        </p:spPr>
+        <p:txBody>
+          <a:bodyPr rtlCol="0" anchor="ctr"/>
+          <a:lstStyle/>
+          <a:p>
+            <a:pPr algn="ctr"/>
+          </a:p>
+        </p:txBody>
+      </p:sp>
+      <p:sp>
+        <p:nvSpPr>
+          <p:cNvPr id="10" name="TextBox 9"/>
+          <p:cNvSpPr txBox="1"/>
+          <p:nvPr/>
+        </p:nvSpPr>
+        <p:spPr>
+          <a:xfrm>
+            <a:off x="731520" y="2788920"/>
+            <a:ext cx="365760" cy="365760"/>
+          </a:xfrm>
+          <a:prstGeom prst="rect">
+            <a:avLst/>
+          </a:prstGeom>
+          <a:noFill/>
+        </p:spPr>
+        <p:txBody>
+          <a:bodyPr wrap="square" anchor="ctr"/>
+          <a:lstStyle/>
+          <a:p>
+            <a:pPr algn="ctr" eaLnBrk="0">
+              <a:lnSpc>
+                <a:spcPct val="110000"/>
+              </a:lnSpc>
+            </a:pPr>
+            <a:r>
+              <a:rPr sz="1300" b="1">
+                <a:solidFill>
+                  <a:srgbClr val="FFFFFF"/>
+                </a:solidFill>
+                <a:latin typeface="맑은 고딕"/>
+                <a:ea typeface="맑은 고딕"/>
+                <a:cs typeface="맑은 고딕"/>
+              </a:rPr>
+              <a:t>1</a:t>
+            </a:r>
+          </a:p>
+        </p:txBody>
+      </p:sp>
+      <p:sp>
+        <p:nvSpPr>
+          <p:cNvPr id="11" name="TextBox 10"/>
+          <p:cNvSpPr txBox="1"/>
+          <p:nvPr/>
+        </p:nvSpPr>
+        <p:spPr>
+          <a:xfrm>
+            <a:off x="1234440" y="2514600"/>
+            <a:ext cx="10225735" cy="914400"/>
+          </a:xfrm>
+          <a:prstGeom prst="rect">
+            <a:avLst/>
+          </a:prstGeom>
+          <a:noFill/>
+        </p:spPr>
+        <p:txBody>
+          <a:bodyPr wrap="square" anchor="ctr"/>
+          <a:lstStyle/>
+          <a:p>
+            <a:pPr algn="l" eaLnBrk="0">
+              <a:lnSpc>
+                <a:spcPct val="110000"/>
+              </a:lnSpc>
+            </a:pPr>
+            <a:r>
+              <a:rPr sz="1550" b="1">
+                <a:solidFill>
+                  <a:srgbClr val="1F2A3A"/>
+                </a:solidFill>
+                <a:latin typeface="맑은 고딕"/>
+                <a:ea typeface="맑은 고딕"/>
+                <a:cs typeface="맑은 고딕"/>
+              </a:rPr>
+              <a:t>값이 모자란 것이니 미확인으로 두고 값이 들어오기를 기다린다</a:t>
+            </a:r>
+          </a:p>
+        </p:txBody>
+      </p:sp>
+      <p:sp>
+        <p:nvSpPr>
+          <p:cNvPr id="12" name="Rounded Rectangle 11"/>
+          <p:cNvSpPr/>
+          <p:nvPr/>
+        </p:nvSpPr>
+        <p:spPr>
+          <a:xfrm>
+            <a:off x="548640" y="3474720"/>
+            <a:ext cx="11094415" cy="822960"/>
+          </a:xfrm>
+          <a:prstGeom prst="roundRect">
+            <a:avLst>
+              <a:gd name="adj" fmla="val 8000"/>
+            </a:avLst>
+          </a:prstGeom>
+          <a:solidFill>
+            <a:srgbClr val="F3F6F9"/>
+          </a:solidFill>
+          <a:ln>
+            <a:noFill/>
+          </a:ln>
+        </p:spPr>
+        <p:txBody>
+          <a:bodyPr rtlCol="0" anchor="ctr"/>
+          <a:lstStyle/>
+          <a:p>
+            <a:pPr algn="ctr"/>
+          </a:p>
+        </p:txBody>
+      </p:sp>
+      <p:sp>
+        <p:nvSpPr>
+          <p:cNvPr id="13" name="Oval 12"/>
+          <p:cNvSpPr/>
+          <p:nvPr/>
+        </p:nvSpPr>
+        <p:spPr>
+          <a:xfrm>
+            <a:off x="731520" y="3703320"/>
+            <a:ext cx="365760" cy="365760"/>
+          </a:xfrm>
+          <a:prstGeom prst="ellipse">
+            <a:avLst/>
+          </a:prstGeom>
+          <a:solidFill>
+            <a:srgbClr val="13294B"/>
+          </a:solidFill>
+          <a:ln>
+            <a:noFill/>
+          </a:ln>
+        </p:spPr>
+        <p:txBody>
+          <a:bodyPr rtlCol="0" anchor="ctr"/>
+          <a:lstStyle/>
+          <a:p>
+            <a:pPr algn="ctr"/>
+          </a:p>
+        </p:txBody>
+      </p:sp>
+      <p:sp>
+        <p:nvSpPr>
+          <p:cNvPr id="14" name="TextBox 13"/>
+          <p:cNvSpPr txBox="1"/>
+          <p:nvPr/>
+        </p:nvSpPr>
+        <p:spPr>
+          <a:xfrm>
+            <a:off x="731520" y="3703320"/>
+            <a:ext cx="365760" cy="365760"/>
+          </a:xfrm>
+          <a:prstGeom prst="rect">
+            <a:avLst/>
+          </a:prstGeom>
+          <a:noFill/>
+        </p:spPr>
+        <p:txBody>
+          <a:bodyPr wrap="square" anchor="ctr"/>
+          <a:lstStyle/>
+          <a:p>
+            <a:pPr algn="ctr" eaLnBrk="0">
+              <a:lnSpc>
+                <a:spcPct val="110000"/>
+              </a:lnSpc>
+            </a:pPr>
+            <a:r>
+              <a:rPr sz="1300" b="1">
+                <a:solidFill>
+                  <a:srgbClr val="FFFFFF"/>
+                </a:solidFill>
+                <a:latin typeface="맑은 고딕"/>
+                <a:ea typeface="맑은 고딕"/>
+                <a:cs typeface="맑은 고딕"/>
+              </a:rPr>
+              <a:t>2</a:t>
+            </a:r>
+          </a:p>
+        </p:txBody>
+      </p:sp>
+      <p:sp>
+        <p:nvSpPr>
+          <p:cNvPr id="15" name="TextBox 14"/>
+          <p:cNvSpPr txBox="1"/>
+          <p:nvPr/>
+        </p:nvSpPr>
+        <p:spPr>
+          <a:xfrm>
+            <a:off x="1234440" y="3429000"/>
+            <a:ext cx="10225735" cy="914400"/>
+          </a:xfrm>
+          <a:prstGeom prst="rect">
+            <a:avLst/>
+          </a:prstGeom>
+          <a:noFill/>
+        </p:spPr>
+        <p:txBody>
+          <a:bodyPr wrap="square" anchor="ctr"/>
+          <a:lstStyle/>
+          <a:p>
+            <a:pPr algn="l" eaLnBrk="0">
+              <a:lnSpc>
+                <a:spcPct val="110000"/>
+              </a:lnSpc>
+            </a:pPr>
+            <a:r>
+              <a:rPr sz="1550" b="1">
+                <a:solidFill>
+                  <a:srgbClr val="1F2A3A"/>
+                </a:solidFill>
+                <a:latin typeface="맑은 고딕"/>
+                <a:ea typeface="맑은 고딕"/>
+                <a:cs typeface="맑은 고딕"/>
+              </a:rPr>
+              <a:t>가장 흔한 원인인 핀 오염을 원인으로 적는다</a:t>
+            </a:r>
+          </a:p>
+        </p:txBody>
+      </p:sp>
+      <p:sp>
+        <p:nvSpPr>
+          <p:cNvPr id="16" name="Rounded Rectangle 15"/>
+          <p:cNvSpPr/>
+          <p:nvPr/>
+        </p:nvSpPr>
+        <p:spPr>
+          <a:xfrm>
+            <a:off x="548640" y="4389120"/>
+            <a:ext cx="11094415" cy="822960"/>
+          </a:xfrm>
+          <a:prstGeom prst="roundRect">
+            <a:avLst>
+              <a:gd name="adj" fmla="val 8000"/>
+            </a:avLst>
+          </a:prstGeom>
+          <a:solidFill>
+            <a:srgbClr val="F3F6F9"/>
+          </a:solidFill>
+          <a:ln>
+            <a:noFill/>
+          </a:ln>
+        </p:spPr>
+        <p:txBody>
+          <a:bodyPr rtlCol="0" anchor="ctr"/>
+          <a:lstStyle/>
+          <a:p>
+            <a:pPr algn="ctr"/>
+          </a:p>
+        </p:txBody>
+      </p:sp>
+      <p:sp>
+        <p:nvSpPr>
+          <p:cNvPr id="17" name="Oval 16"/>
+          <p:cNvSpPr/>
+          <p:nvPr/>
+        </p:nvSpPr>
+        <p:spPr>
+          <a:xfrm>
+            <a:off x="731520" y="4617720"/>
+            <a:ext cx="365760" cy="365760"/>
+          </a:xfrm>
+          <a:prstGeom prst="ellipse">
+            <a:avLst/>
+          </a:prstGeom>
+          <a:solidFill>
+            <a:srgbClr val="13294B"/>
+          </a:solidFill>
+          <a:ln>
+            <a:noFill/>
+          </a:ln>
+        </p:spPr>
+        <p:txBody>
+          <a:bodyPr rtlCol="0" anchor="ctr"/>
+          <a:lstStyle/>
+          <a:p>
+            <a:pPr algn="ctr"/>
+          </a:p>
+        </p:txBody>
+      </p:sp>
+      <p:sp>
+        <p:nvSpPr>
+          <p:cNvPr id="18" name="TextBox 17"/>
+          <p:cNvSpPr txBox="1"/>
+          <p:nvPr/>
+        </p:nvSpPr>
+        <p:spPr>
+          <a:xfrm>
+            <a:off x="731520" y="4617720"/>
+            <a:ext cx="365760" cy="365760"/>
+          </a:xfrm>
+          <a:prstGeom prst="rect">
+            <a:avLst/>
+          </a:prstGeom>
+          <a:noFill/>
+        </p:spPr>
+        <p:txBody>
+          <a:bodyPr wrap="square" anchor="ctr"/>
+          <a:lstStyle/>
+          <a:p>
+            <a:pPr algn="ctr" eaLnBrk="0">
+              <a:lnSpc>
+                <a:spcPct val="110000"/>
+              </a:lnSpc>
+            </a:pPr>
+            <a:r>
+              <a:rPr sz="1300" b="1">
+                <a:solidFill>
+                  <a:srgbClr val="FFFFFF"/>
+                </a:solidFill>
+                <a:latin typeface="맑은 고딕"/>
+                <a:ea typeface="맑은 고딕"/>
+                <a:cs typeface="맑은 고딕"/>
+              </a:rPr>
+              <a:t>3</a:t>
+            </a:r>
+          </a:p>
+        </p:txBody>
+      </p:sp>
+      <p:sp>
+        <p:nvSpPr>
+          <p:cNvPr id="19" name="TextBox 18"/>
+          <p:cNvSpPr txBox="1"/>
+          <p:nvPr/>
+        </p:nvSpPr>
+        <p:spPr>
+          <a:xfrm>
+            <a:off x="1234440" y="4343400"/>
+            <a:ext cx="10225735" cy="914400"/>
+          </a:xfrm>
+          <a:prstGeom prst="rect">
+            <a:avLst/>
+          </a:prstGeom>
+          <a:noFill/>
+        </p:spPr>
+        <p:txBody>
+          <a:bodyPr wrap="square" anchor="ctr"/>
+          <a:lstStyle/>
+          <a:p>
+            <a:pPr algn="l" eaLnBrk="0">
+              <a:lnSpc>
+                <a:spcPct val="110000"/>
+              </a:lnSpc>
+            </a:pPr>
+            <a:r>
+              <a:rPr sz="1550" b="1">
+                <a:solidFill>
+                  <a:srgbClr val="1F2A3A"/>
+                </a:solidFill>
+                <a:latin typeface="맑은 고딕"/>
+                <a:ea typeface="맑은 고딕"/>
+                <a:cs typeface="맑은 고딕"/>
+              </a:rPr>
+              <a:t>지지 근거 없음으로 적고, 사람이 현장을 직접 살피게 한다</a:t>
+            </a:r>
+          </a:p>
+        </p:txBody>
+      </p:sp>
+      <p:sp>
+        <p:nvSpPr>
+          <p:cNvPr id="20" name="Rounded Rectangle 19"/>
+          <p:cNvSpPr/>
+          <p:nvPr/>
+        </p:nvSpPr>
+        <p:spPr>
+          <a:xfrm>
+            <a:off x="548640" y="5303520"/>
+            <a:ext cx="11094415" cy="822960"/>
+          </a:xfrm>
+          <a:prstGeom prst="roundRect">
+            <a:avLst>
+              <a:gd name="adj" fmla="val 8000"/>
+            </a:avLst>
+          </a:prstGeom>
+          <a:solidFill>
+            <a:srgbClr val="F3F6F9"/>
+          </a:solidFill>
+          <a:ln>
+            <a:noFill/>
+          </a:ln>
+        </p:spPr>
+        <p:txBody>
+          <a:bodyPr rtlCol="0" anchor="ctr"/>
+          <a:lstStyle/>
+          <a:p>
+            <a:pPr algn="ctr"/>
+          </a:p>
+        </p:txBody>
+      </p:sp>
+      <p:sp>
+        <p:nvSpPr>
+          <p:cNvPr id="21" name="Oval 20"/>
+          <p:cNvSpPr/>
+          <p:nvPr/>
+        </p:nvSpPr>
+        <p:spPr>
+          <a:xfrm>
+            <a:off x="731520" y="5532120"/>
+            <a:ext cx="365760" cy="365760"/>
+          </a:xfrm>
+          <a:prstGeom prst="ellipse">
+            <a:avLst/>
+          </a:prstGeom>
+          <a:solidFill>
+            <a:srgbClr val="13294B"/>
+          </a:solidFill>
+          <a:ln>
+            <a:noFill/>
+          </a:ln>
+        </p:spPr>
+        <p:txBody>
+          <a:bodyPr rtlCol="0" anchor="ctr"/>
+          <a:lstStyle/>
+          <a:p>
+            <a:pPr algn="ctr"/>
+          </a:p>
+        </p:txBody>
+      </p:sp>
+      <p:sp>
+        <p:nvSpPr>
+          <p:cNvPr id="22" name="TextBox 21"/>
+          <p:cNvSpPr txBox="1"/>
+          <p:nvPr/>
+        </p:nvSpPr>
+        <p:spPr>
+          <a:xfrm>
+            <a:off x="731520" y="5532120"/>
+            <a:ext cx="365760" cy="365760"/>
+          </a:xfrm>
+          <a:prstGeom prst="rect">
+            <a:avLst/>
+          </a:prstGeom>
+          <a:noFill/>
+        </p:spPr>
+        <p:txBody>
+          <a:bodyPr wrap="square" anchor="ctr"/>
+          <a:lstStyle/>
+          <a:p>
+            <a:pPr algn="ctr" eaLnBrk="0">
+              <a:lnSpc>
+                <a:spcPct val="110000"/>
+              </a:lnSpc>
+            </a:pPr>
+            <a:r>
+              <a:rPr sz="1300" b="1">
+                <a:solidFill>
+                  <a:srgbClr val="FFFFFF"/>
+                </a:solidFill>
+                <a:latin typeface="맑은 고딕"/>
+                <a:ea typeface="맑은 고딕"/>
+                <a:cs typeface="맑은 고딕"/>
+              </a:rPr>
+              <a:t>4</a:t>
+            </a:r>
+          </a:p>
+        </p:txBody>
+      </p:sp>
+      <p:sp>
+        <p:nvSpPr>
+          <p:cNvPr id="23" name="TextBox 22"/>
+          <p:cNvSpPr txBox="1"/>
+          <p:nvPr/>
+        </p:nvSpPr>
+        <p:spPr>
+          <a:xfrm>
+            <a:off x="1234440" y="5257800"/>
+            <a:ext cx="10225735" cy="914400"/>
+          </a:xfrm>
+          <a:prstGeom prst="rect">
+            <a:avLst/>
+          </a:prstGeom>
+          <a:noFill/>
+        </p:spPr>
+        <p:txBody>
+          <a:bodyPr wrap="square" anchor="ctr"/>
+          <a:lstStyle/>
+          <a:p>
+            <a:pPr algn="l" eaLnBrk="0">
+              <a:lnSpc>
+                <a:spcPct val="110000"/>
+              </a:lnSpc>
+            </a:pPr>
+            <a:r>
+              <a:rPr sz="1550" b="1">
+                <a:solidFill>
+                  <a:srgbClr val="1F2A3A"/>
+                </a:solidFill>
+                <a:latin typeface="맑은 고딕"/>
+                <a:ea typeface="맑은 고딕"/>
+                <a:cs typeface="맑은 고딕"/>
+              </a:rPr>
+              <a:t>경보가 잘못 난 것으로 보고 점검 요청을 닫는다</a:t>
+            </a:r>
+          </a:p>
+        </p:txBody>
+      </p:sp>
+    </p:spTree>
+  </p:cSld>
+  <p:clrMapOvr>
+    <a:masterClrMapping/>
+  </p:clrMapOvr>
+</p:sld>
+</file>
+
+<file path=ppt/slides/slide31.xml><?xml version="1.0" encoding="utf-8"?>
+<p:sld xmlns:a="http://schemas.openxmlformats.org/drawingml/2006/main" xmlns:p="http://schemas.openxmlformats.org/presentationml/2006/main" xmlns:r="http://schemas.openxmlformats.org/officeDocument/2006/relationships">
+  <p:cSld>
+    <p:bg>
+      <p:bgPr>
+        <a:solidFill>
+          <a:srgbClr val="FFFFFF"/>
+        </a:solidFill>
+        <a:effectLst/>
+      </p:bgPr>
+    </p:bg>
+    <p:spTree>
+      <p:nvGrpSpPr>
+        <p:cNvPr id="1" name=""/>
+        <p:cNvGrpSpPr/>
+        <p:nvPr/>
+      </p:nvGrpSpPr>
+      <p:grpSpPr/>
+      <p:sp>
+        <p:nvSpPr>
+          <p:cNvPr id="2" name="TextBox 1"/>
+          <p:cNvSpPr txBox="1"/>
+          <p:nvPr/>
+        </p:nvSpPr>
+        <p:spPr>
+          <a:xfrm>
+            <a:off x="457200" y="329184"/>
+            <a:ext cx="11277295" cy="603504"/>
+          </a:xfrm>
+          <a:prstGeom prst="rect">
+            <a:avLst/>
+          </a:prstGeom>
+          <a:noFill/>
+        </p:spPr>
+        <p:txBody>
+          <a:bodyPr wrap="square" anchor="ctr"/>
+          <a:lstStyle/>
+          <a:p>
+            <a:pPr algn="l" eaLnBrk="0">
+              <a:lnSpc>
+                <a:spcPct val="110000"/>
+              </a:lnSpc>
+            </a:pPr>
+            <a:r>
+              <a:rPr sz="2800" b="1">
+                <a:solidFill>
+                  <a:srgbClr val="13294B"/>
+                </a:solidFill>
+                <a:latin typeface="맑은 고딕"/>
+                <a:ea typeface="맑은 고딕"/>
+                <a:cs typeface="맑은 고딕"/>
+              </a:rPr>
+              <a:t>Quiz 3. 승인 전의 추천안</a:t>
+            </a:r>
+          </a:p>
+        </p:txBody>
+      </p:sp>
+      <p:sp>
+        <p:nvSpPr>
+          <p:cNvPr id="3" name="TextBox 2"/>
+          <p:cNvSpPr txBox="1"/>
+          <p:nvPr/>
+        </p:nvSpPr>
+        <p:spPr>
+          <a:xfrm>
+            <a:off x="457200" y="932688"/>
+            <a:ext cx="11277295" cy="420624"/>
+          </a:xfrm>
+          <a:prstGeom prst="rect">
+            <a:avLst/>
+          </a:prstGeom>
+          <a:noFill/>
+        </p:spPr>
+        <p:txBody>
+          <a:bodyPr wrap="square" anchor="ctr"/>
+          <a:lstStyle/>
+          <a:p>
+            <a:pPr algn="l" eaLnBrk="0">
+              <a:lnSpc>
+                <a:spcPct val="110000"/>
+              </a:lnSpc>
+            </a:pPr>
+            <a:r>
+              <a:rPr sz="1600" b="0">
+                <a:solidFill>
+                  <a:srgbClr val="556175"/>
+                </a:solidFill>
+                <a:latin typeface="맑은 고딕"/>
+                <a:ea typeface="맑은 고딕"/>
+                <a:cs typeface="맑은 고딕"/>
+              </a:rPr>
+              <a:t>냉각 대응 에이전트가 추천안을 제출하고 판단 번호를 받았지만, 사람은 아직 승인하지 않았다.</a:t>
+            </a:r>
+          </a:p>
+        </p:txBody>
+      </p:sp>
+      <p:sp>
+        <p:nvSpPr>
+          <p:cNvPr id="4" name="Rectangle 3"/>
+          <p:cNvSpPr/>
+          <p:nvPr/>
+        </p:nvSpPr>
+        <p:spPr>
+          <a:xfrm>
+            <a:off x="548640" y="1408176"/>
+            <a:ext cx="11094415" cy="18288"/>
+          </a:xfrm>
+          <a:prstGeom prst="rect">
+            <a:avLst/>
+          </a:prstGeom>
+          <a:solidFill>
+            <a:srgbClr val="D3D9E1"/>
+          </a:solidFill>
+          <a:ln>
+            <a:noFill/>
+          </a:ln>
+        </p:spPr>
+        <p:txBody>
+          <a:bodyPr rtlCol="0" anchor="ctr"/>
+          <a:lstStyle/>
+          <a:p>
+            <a:pPr algn="ctr"/>
+          </a:p>
+        </p:txBody>
+      </p:sp>
+      <p:sp>
+        <p:nvSpPr>
+          <p:cNvPr id="5" name="TextBox 4"/>
+          <p:cNvSpPr txBox="1"/>
+          <p:nvPr/>
+        </p:nvSpPr>
+        <p:spPr>
+          <a:xfrm>
+            <a:off x="10911535" y="6473952"/>
+            <a:ext cx="822960" cy="274320"/>
+          </a:xfrm>
+          <a:prstGeom prst="rect">
+            <a:avLst/>
+          </a:prstGeom>
+          <a:noFill/>
+        </p:spPr>
+        <p:txBody>
+          <a:bodyPr wrap="square" anchor="t"/>
+          <a:lstStyle/>
+          <a:p>
+            <a:pPr algn="r" eaLnBrk="0">
+              <a:lnSpc>
+                <a:spcPct val="110000"/>
+              </a:lnSpc>
+            </a:pPr>
+            <a:r>
+              <a:rPr sz="1000" b="0">
+                <a:solidFill>
+                  <a:srgbClr val="556175"/>
+                </a:solidFill>
+                <a:latin typeface="맑은 고딕"/>
+                <a:ea typeface="맑은 고딕"/>
+                <a:cs typeface="맑은 고딕"/>
+              </a:rPr>
+              <a:t>31</a:t>
+            </a:r>
+          </a:p>
+        </p:txBody>
+      </p:sp>
+      <p:sp>
+        <p:nvSpPr>
+          <p:cNvPr id="6" name="Rounded Rectangle 5"/>
+          <p:cNvSpPr/>
+          <p:nvPr/>
+        </p:nvSpPr>
+        <p:spPr>
+          <a:xfrm>
+            <a:off x="548640" y="1627632"/>
+            <a:ext cx="11094415" cy="704088"/>
+          </a:xfrm>
+          <a:prstGeom prst="roundRect">
+            <a:avLst>
+              <a:gd name="adj" fmla="val 5000"/>
+            </a:avLst>
+          </a:prstGeom>
+          <a:solidFill>
+            <a:srgbClr val="E7F3FD"/>
+          </a:solidFill>
+          <a:ln>
+            <a:noFill/>
+          </a:ln>
+        </p:spPr>
+        <p:txBody>
+          <a:bodyPr rtlCol="0" anchor="ctr"/>
+          <a:lstStyle/>
+          <a:p>
+            <a:pPr algn="ctr"/>
+          </a:p>
+        </p:txBody>
+      </p:sp>
+      <p:sp>
+        <p:nvSpPr>
+          <p:cNvPr id="7" name="TextBox 6"/>
+          <p:cNvSpPr txBox="1"/>
+          <p:nvPr/>
+        </p:nvSpPr>
+        <p:spPr>
+          <a:xfrm>
+            <a:off x="777240" y="1627632"/>
+            <a:ext cx="10637215" cy="704088"/>
+          </a:xfrm>
+          <a:prstGeom prst="rect">
+            <a:avLst/>
+          </a:prstGeom>
+          <a:noFill/>
+        </p:spPr>
+        <p:txBody>
+          <a:bodyPr wrap="square" anchor="ctr"/>
+          <a:lstStyle/>
+          <a:p>
+            <a:pPr algn="l" eaLnBrk="0">
+              <a:lnSpc>
+                <a:spcPct val="110000"/>
+              </a:lnSpc>
+            </a:pPr>
+            <a:r>
+              <a:rPr sz="1900" b="1">
+                <a:solidFill>
+                  <a:srgbClr val="13294B"/>
+                </a:solidFill>
+                <a:latin typeface="맑은 고딕"/>
+                <a:ea typeface="맑은 고딕"/>
+                <a:cs typeface="맑은 고딕"/>
+              </a:rPr>
+              <a:t>이때 맞는 것은?</a:t>
+            </a:r>
+          </a:p>
+        </p:txBody>
+      </p:sp>
+      <p:sp>
+        <p:nvSpPr>
+          <p:cNvPr id="8" name="Rounded Rectangle 7"/>
+          <p:cNvSpPr/>
+          <p:nvPr/>
+        </p:nvSpPr>
+        <p:spPr>
+          <a:xfrm>
+            <a:off x="548640" y="2560320"/>
+            <a:ext cx="11094415" cy="822960"/>
+          </a:xfrm>
+          <a:prstGeom prst="roundRect">
+            <a:avLst>
+              <a:gd name="adj" fmla="val 8000"/>
+            </a:avLst>
+          </a:prstGeom>
+          <a:solidFill>
+            <a:srgbClr val="F3F6F9"/>
+          </a:solidFill>
+          <a:ln>
+            <a:noFill/>
+          </a:ln>
+        </p:spPr>
+        <p:txBody>
+          <a:bodyPr rtlCol="0" anchor="ctr"/>
+          <a:lstStyle/>
+          <a:p>
+            <a:pPr algn="ctr"/>
+          </a:p>
+        </p:txBody>
+      </p:sp>
+      <p:sp>
+        <p:nvSpPr>
+          <p:cNvPr id="9" name="Oval 8"/>
+          <p:cNvSpPr/>
+          <p:nvPr/>
+        </p:nvSpPr>
+        <p:spPr>
+          <a:xfrm>
+            <a:off x="731520" y="2788920"/>
+            <a:ext cx="365760" cy="365760"/>
+          </a:xfrm>
+          <a:prstGeom prst="ellipse">
+            <a:avLst/>
+          </a:prstGeom>
+          <a:solidFill>
+            <a:srgbClr val="13294B"/>
+          </a:solidFill>
+          <a:ln>
+            <a:noFill/>
+          </a:ln>
+        </p:spPr>
+        <p:txBody>
+          <a:bodyPr rtlCol="0" anchor="ctr"/>
+          <a:lstStyle/>
+          <a:p>
+            <a:pPr algn="ctr"/>
+          </a:p>
+        </p:txBody>
+      </p:sp>
+      <p:sp>
+        <p:nvSpPr>
+          <p:cNvPr id="10" name="TextBox 9"/>
+          <p:cNvSpPr txBox="1"/>
+          <p:nvPr/>
+        </p:nvSpPr>
+        <p:spPr>
+          <a:xfrm>
+            <a:off x="731520" y="2788920"/>
+            <a:ext cx="365760" cy="365760"/>
+          </a:xfrm>
+          <a:prstGeom prst="rect">
+            <a:avLst/>
+          </a:prstGeom>
+          <a:noFill/>
+        </p:spPr>
+        <p:txBody>
+          <a:bodyPr wrap="square" anchor="ctr"/>
+          <a:lstStyle/>
+          <a:p>
+            <a:pPr algn="ctr" eaLnBrk="0">
+              <a:lnSpc>
+                <a:spcPct val="110000"/>
+              </a:lnSpc>
+            </a:pPr>
+            <a:r>
+              <a:rPr sz="1300" b="1">
+                <a:solidFill>
+                  <a:srgbClr val="FFFFFF"/>
+                </a:solidFill>
+                <a:latin typeface="맑은 고딕"/>
+                <a:ea typeface="맑은 고딕"/>
+                <a:cs typeface="맑은 고딕"/>
+              </a:rPr>
+              <a:t>1</a:t>
+            </a:r>
+          </a:p>
+        </p:txBody>
+      </p:sp>
+      <p:sp>
+        <p:nvSpPr>
+          <p:cNvPr id="11" name="TextBox 10"/>
+          <p:cNvSpPr txBox="1"/>
+          <p:nvPr/>
+        </p:nvSpPr>
+        <p:spPr>
+          <a:xfrm>
+            <a:off x="1234440" y="2514600"/>
+            <a:ext cx="10225735" cy="914400"/>
+          </a:xfrm>
+          <a:prstGeom prst="rect">
+            <a:avLst/>
+          </a:prstGeom>
+          <a:noFill/>
+        </p:spPr>
+        <p:txBody>
+          <a:bodyPr wrap="square" anchor="ctr"/>
+          <a:lstStyle/>
+          <a:p>
+            <a:pPr algn="l" eaLnBrk="0">
+              <a:lnSpc>
+                <a:spcPct val="110000"/>
+              </a:lnSpc>
+            </a:pPr>
+            <a:r>
+              <a:rPr sz="1550" b="1">
+                <a:solidFill>
+                  <a:srgbClr val="1F2A3A"/>
+                </a:solidFill>
+                <a:latin typeface="맑은 고딕"/>
+                <a:ea typeface="맑은 고딕"/>
+                <a:cs typeface="맑은 고딕"/>
+              </a:rPr>
+              <a:t>시스템은 팬 속도 명령을 보내지 않고 승인을 기다린다</a:t>
+            </a:r>
+          </a:p>
+        </p:txBody>
+      </p:sp>
+      <p:sp>
+        <p:nvSpPr>
+          <p:cNvPr id="12" name="Rounded Rectangle 11"/>
+          <p:cNvSpPr/>
+          <p:nvPr/>
+        </p:nvSpPr>
+        <p:spPr>
+          <a:xfrm>
+            <a:off x="548640" y="3474720"/>
+            <a:ext cx="11094415" cy="822960"/>
+          </a:xfrm>
+          <a:prstGeom prst="roundRect">
+            <a:avLst>
+              <a:gd name="adj" fmla="val 8000"/>
+            </a:avLst>
+          </a:prstGeom>
+          <a:solidFill>
+            <a:srgbClr val="F3F6F9"/>
+          </a:solidFill>
+          <a:ln>
+            <a:noFill/>
+          </a:ln>
+        </p:spPr>
+        <p:txBody>
+          <a:bodyPr rtlCol="0" anchor="ctr"/>
+          <a:lstStyle/>
+          <a:p>
+            <a:pPr algn="ctr"/>
+          </a:p>
+        </p:txBody>
+      </p:sp>
+      <p:sp>
+        <p:nvSpPr>
+          <p:cNvPr id="13" name="Oval 12"/>
+          <p:cNvSpPr/>
+          <p:nvPr/>
+        </p:nvSpPr>
+        <p:spPr>
+          <a:xfrm>
+            <a:off x="731520" y="3703320"/>
+            <a:ext cx="365760" cy="365760"/>
+          </a:xfrm>
+          <a:prstGeom prst="ellipse">
+            <a:avLst/>
+          </a:prstGeom>
+          <a:solidFill>
+            <a:srgbClr val="13294B"/>
+          </a:solidFill>
+          <a:ln>
+            <a:noFill/>
+          </a:ln>
+        </p:spPr>
+        <p:txBody>
+          <a:bodyPr rtlCol="0" anchor="ctr"/>
+          <a:lstStyle/>
+          <a:p>
+            <a:pPr algn="ctr"/>
+          </a:p>
+        </p:txBody>
+      </p:sp>
+      <p:sp>
+        <p:nvSpPr>
+          <p:cNvPr id="14" name="TextBox 13"/>
+          <p:cNvSpPr txBox="1"/>
+          <p:nvPr/>
+        </p:nvSpPr>
+        <p:spPr>
+          <a:xfrm>
+            <a:off x="731520" y="3703320"/>
+            <a:ext cx="365760" cy="365760"/>
+          </a:xfrm>
+          <a:prstGeom prst="rect">
+            <a:avLst/>
+          </a:prstGeom>
+          <a:noFill/>
+        </p:spPr>
+        <p:txBody>
+          <a:bodyPr wrap="square" anchor="ctr"/>
+          <a:lstStyle/>
+          <a:p>
+            <a:pPr algn="ctr" eaLnBrk="0">
+              <a:lnSpc>
+                <a:spcPct val="110000"/>
+              </a:lnSpc>
+            </a:pPr>
+            <a:r>
+              <a:rPr sz="1300" b="1">
+                <a:solidFill>
+                  <a:srgbClr val="FFFFFF"/>
+                </a:solidFill>
+                <a:latin typeface="맑은 고딕"/>
+                <a:ea typeface="맑은 고딕"/>
+                <a:cs typeface="맑은 고딕"/>
+              </a:rPr>
+              <a:t>2</a:t>
+            </a:r>
+          </a:p>
+        </p:txBody>
+      </p:sp>
+      <p:sp>
+        <p:nvSpPr>
+          <p:cNvPr id="15" name="TextBox 14"/>
+          <p:cNvSpPr txBox="1"/>
+          <p:nvPr/>
+        </p:nvSpPr>
+        <p:spPr>
+          <a:xfrm>
+            <a:off x="1234440" y="3429000"/>
+            <a:ext cx="10225735" cy="914400"/>
+          </a:xfrm>
+          <a:prstGeom prst="rect">
+            <a:avLst/>
+          </a:prstGeom>
+          <a:noFill/>
+        </p:spPr>
+        <p:txBody>
+          <a:bodyPr wrap="square" anchor="ctr"/>
+          <a:lstStyle/>
+          <a:p>
+            <a:pPr algn="l" eaLnBrk="0">
+              <a:lnSpc>
+                <a:spcPct val="110000"/>
+              </a:lnSpc>
+            </a:pPr>
+            <a:r>
+              <a:rPr sz="1550" b="1">
+                <a:solidFill>
+                  <a:srgbClr val="1F2A3A"/>
+                </a:solidFill>
+                <a:latin typeface="맑은 고딕"/>
+                <a:ea typeface="맑은 고딕"/>
+                <a:cs typeface="맑은 고딕"/>
+              </a:rPr>
+              <a:t>판단 번호를 받았으니 에이전트가 작업지시를 등록한다</a:t>
+            </a:r>
+          </a:p>
+        </p:txBody>
+      </p:sp>
+      <p:sp>
+        <p:nvSpPr>
+          <p:cNvPr id="16" name="Rounded Rectangle 15"/>
+          <p:cNvSpPr/>
+          <p:nvPr/>
+        </p:nvSpPr>
+        <p:spPr>
+          <a:xfrm>
+            <a:off x="548640" y="4389120"/>
+            <a:ext cx="11094415" cy="822960"/>
+          </a:xfrm>
+          <a:prstGeom prst="roundRect">
+            <a:avLst>
+              <a:gd name="adj" fmla="val 8000"/>
+            </a:avLst>
+          </a:prstGeom>
+          <a:solidFill>
+            <a:srgbClr val="F3F6F9"/>
+          </a:solidFill>
+          <a:ln>
+            <a:noFill/>
+          </a:ln>
+        </p:spPr>
+        <p:txBody>
+          <a:bodyPr rtlCol="0" anchor="ctr"/>
+          <a:lstStyle/>
+          <a:p>
+            <a:pPr algn="ctr"/>
+          </a:p>
+        </p:txBody>
+      </p:sp>
+      <p:sp>
+        <p:nvSpPr>
+          <p:cNvPr id="17" name="Oval 16"/>
+          <p:cNvSpPr/>
+          <p:nvPr/>
+        </p:nvSpPr>
+        <p:spPr>
+          <a:xfrm>
+            <a:off x="731520" y="4617720"/>
+            <a:ext cx="365760" cy="365760"/>
+          </a:xfrm>
+          <a:prstGeom prst="ellipse">
+            <a:avLst/>
+          </a:prstGeom>
+          <a:solidFill>
+            <a:srgbClr val="13294B"/>
+          </a:solidFill>
+          <a:ln>
+            <a:noFill/>
+          </a:ln>
+        </p:spPr>
+        <p:txBody>
+          <a:bodyPr rtlCol="0" anchor="ctr"/>
+          <a:lstStyle/>
+          <a:p>
+            <a:pPr algn="ctr"/>
+          </a:p>
+        </p:txBody>
+      </p:sp>
+      <p:sp>
+        <p:nvSpPr>
+          <p:cNvPr id="18" name="TextBox 17"/>
+          <p:cNvSpPr txBox="1"/>
+          <p:nvPr/>
+        </p:nvSpPr>
+        <p:spPr>
+          <a:xfrm>
+            <a:off x="731520" y="4617720"/>
+            <a:ext cx="365760" cy="365760"/>
+          </a:xfrm>
+          <a:prstGeom prst="rect">
+            <a:avLst/>
+          </a:prstGeom>
+          <a:noFill/>
+        </p:spPr>
+        <p:txBody>
+          <a:bodyPr wrap="square" anchor="ctr"/>
+          <a:lstStyle/>
+          <a:p>
+            <a:pPr algn="ctr" eaLnBrk="0">
+              <a:lnSpc>
+                <a:spcPct val="110000"/>
+              </a:lnSpc>
+            </a:pPr>
+            <a:r>
+              <a:rPr sz="1300" b="1">
+                <a:solidFill>
+                  <a:srgbClr val="FFFFFF"/>
+                </a:solidFill>
+                <a:latin typeface="맑은 고딕"/>
+                <a:ea typeface="맑은 고딕"/>
+                <a:cs typeface="맑은 고딕"/>
+              </a:rPr>
+              <a:t>3</a:t>
+            </a:r>
+          </a:p>
+        </p:txBody>
+      </p:sp>
+      <p:sp>
+        <p:nvSpPr>
+          <p:cNvPr id="19" name="TextBox 18"/>
+          <p:cNvSpPr txBox="1"/>
+          <p:nvPr/>
+        </p:nvSpPr>
+        <p:spPr>
+          <a:xfrm>
+            <a:off x="1234440" y="4343400"/>
+            <a:ext cx="10225735" cy="914400"/>
+          </a:xfrm>
+          <a:prstGeom prst="rect">
+            <a:avLst/>
+          </a:prstGeom>
+          <a:noFill/>
+        </p:spPr>
+        <p:txBody>
+          <a:bodyPr wrap="square" anchor="ctr"/>
+          <a:lstStyle/>
+          <a:p>
+            <a:pPr algn="l" eaLnBrk="0">
+              <a:lnSpc>
+                <a:spcPct val="110000"/>
+              </a:lnSpc>
+            </a:pPr>
+            <a:r>
+              <a:rPr sz="1550" b="1">
+                <a:solidFill>
+                  <a:srgbClr val="1F2A3A"/>
+                </a:solidFill>
+                <a:latin typeface="맑은 고딕"/>
+                <a:ea typeface="맑은 고딕"/>
+                <a:cs typeface="맑은 고딕"/>
+              </a:rPr>
+              <a:t>제출과 동시에 팬 속도 명령이 나가고 승인은 뒤에 기록된다</a:t>
+            </a:r>
+          </a:p>
+        </p:txBody>
+      </p:sp>
+      <p:sp>
+        <p:nvSpPr>
+          <p:cNvPr id="20" name="Rounded Rectangle 19"/>
+          <p:cNvSpPr/>
+          <p:nvPr/>
+        </p:nvSpPr>
+        <p:spPr>
+          <a:xfrm>
+            <a:off x="548640" y="5303520"/>
+            <a:ext cx="11094415" cy="822960"/>
+          </a:xfrm>
+          <a:prstGeom prst="roundRect">
+            <a:avLst>
+              <a:gd name="adj" fmla="val 8000"/>
+            </a:avLst>
+          </a:prstGeom>
+          <a:solidFill>
+            <a:srgbClr val="F3F6F9"/>
+          </a:solidFill>
+          <a:ln>
+            <a:noFill/>
+          </a:ln>
+        </p:spPr>
+        <p:txBody>
+          <a:bodyPr rtlCol="0" anchor="ctr"/>
+          <a:lstStyle/>
+          <a:p>
+            <a:pPr algn="ctr"/>
+          </a:p>
+        </p:txBody>
+      </p:sp>
+      <p:sp>
+        <p:nvSpPr>
+          <p:cNvPr id="21" name="Oval 20"/>
+          <p:cNvSpPr/>
+          <p:nvPr/>
+        </p:nvSpPr>
+        <p:spPr>
+          <a:xfrm>
+            <a:off x="731520" y="5532120"/>
+            <a:ext cx="365760" cy="365760"/>
+          </a:xfrm>
+          <a:prstGeom prst="ellipse">
+            <a:avLst/>
+          </a:prstGeom>
+          <a:solidFill>
+            <a:srgbClr val="13294B"/>
+          </a:solidFill>
+          <a:ln>
+            <a:noFill/>
+          </a:ln>
+        </p:spPr>
+        <p:txBody>
+          <a:bodyPr rtlCol="0" anchor="ctr"/>
+          <a:lstStyle/>
+          <a:p>
+            <a:pPr algn="ctr"/>
+          </a:p>
+        </p:txBody>
+      </p:sp>
+      <p:sp>
+        <p:nvSpPr>
+          <p:cNvPr id="22" name="TextBox 21"/>
+          <p:cNvSpPr txBox="1"/>
+          <p:nvPr/>
+        </p:nvSpPr>
+        <p:spPr>
+          <a:xfrm>
+            <a:off x="731520" y="5532120"/>
+            <a:ext cx="365760" cy="365760"/>
+          </a:xfrm>
+          <a:prstGeom prst="rect">
+            <a:avLst/>
+          </a:prstGeom>
+          <a:noFill/>
+        </p:spPr>
+        <p:txBody>
+          <a:bodyPr wrap="square" anchor="ctr"/>
+          <a:lstStyle/>
+          <a:p>
+            <a:pPr algn="ctr" eaLnBrk="0">
+              <a:lnSpc>
+                <a:spcPct val="110000"/>
+              </a:lnSpc>
+            </a:pPr>
+            <a:r>
+              <a:rPr sz="1300" b="1">
+                <a:solidFill>
+                  <a:srgbClr val="FFFFFF"/>
+                </a:solidFill>
+                <a:latin typeface="맑은 고딕"/>
+                <a:ea typeface="맑은 고딕"/>
+                <a:cs typeface="맑은 고딕"/>
+              </a:rPr>
+              <a:t>4</a:t>
+            </a:r>
+          </a:p>
+        </p:txBody>
+      </p:sp>
+      <p:sp>
+        <p:nvSpPr>
+          <p:cNvPr id="23" name="TextBox 22"/>
+          <p:cNvSpPr txBox="1"/>
+          <p:nvPr/>
+        </p:nvSpPr>
+        <p:spPr>
+          <a:xfrm>
+            <a:off x="1234440" y="5257800"/>
+            <a:ext cx="10225735" cy="914400"/>
+          </a:xfrm>
+          <a:prstGeom prst="rect">
+            <a:avLst/>
+          </a:prstGeom>
+          <a:noFill/>
+        </p:spPr>
+        <p:txBody>
+          <a:bodyPr wrap="square" anchor="ctr"/>
+          <a:lstStyle/>
+          <a:p>
+            <a:pPr algn="l" eaLnBrk="0">
+              <a:lnSpc>
+                <a:spcPct val="110000"/>
+              </a:lnSpc>
+            </a:pPr>
+            <a:r>
+              <a:rPr sz="1550" b="1">
+                <a:solidFill>
+                  <a:srgbClr val="1F2A3A"/>
+                </a:solidFill>
+                <a:latin typeface="맑은 고딕"/>
+                <a:ea typeface="맑은 고딕"/>
+                <a:cs typeface="맑은 고딕"/>
+              </a:rPr>
+              <a:t>에이전트가 스스로 승인을 기록하고 명령을 잇는다</a:t>
+            </a:r>
+          </a:p>
+        </p:txBody>
+      </p:sp>
+    </p:spTree>
+  </p:cSld>
+  <p:clrMapOvr>
+    <a:masterClrMapping/>
+  </p:clrMapOvr>
+</p:sld>
+</file>
+
+<file path=ppt/slides/slide32.xml><?xml version="1.0" encoding="utf-8"?>
+<p:sld xmlns:a="http://schemas.openxmlformats.org/drawingml/2006/main" xmlns:p="http://schemas.openxmlformats.org/presentationml/2006/main" xmlns:r="http://schemas.openxmlformats.org/officeDocument/2006/relationships">
+  <p:cSld>
+    <p:bg>
+      <p:bgPr>
+        <a:solidFill>
+          <a:srgbClr val="FFFFFF"/>
+        </a:solidFill>
+        <a:effectLst/>
+      </p:bgPr>
+    </p:bg>
+    <p:spTree>
+      <p:nvGrpSpPr>
+        <p:cNvPr id="1" name=""/>
+        <p:cNvGrpSpPr/>
+        <p:nvPr/>
+      </p:nvGrpSpPr>
+      <p:grpSpPr/>
+      <p:sp>
+        <p:nvSpPr>
+          <p:cNvPr id="2" name="TextBox 1"/>
+          <p:cNvSpPr txBox="1"/>
+          <p:nvPr/>
+        </p:nvSpPr>
+        <p:spPr>
+          <a:xfrm>
+            <a:off x="457200" y="329184"/>
+            <a:ext cx="11277295" cy="603504"/>
+          </a:xfrm>
+          <a:prstGeom prst="rect">
+            <a:avLst/>
+          </a:prstGeom>
+          <a:noFill/>
+        </p:spPr>
+        <p:txBody>
+          <a:bodyPr wrap="square" anchor="ctr"/>
+          <a:lstStyle/>
+          <a:p>
+            <a:pPr algn="l" eaLnBrk="0">
+              <a:lnSpc>
+                <a:spcPct val="110000"/>
+              </a:lnSpc>
+            </a:pPr>
+            <a:r>
+              <a:rPr sz="2800" b="1">
+                <a:solidFill>
+                  <a:srgbClr val="13294B"/>
+                </a:solidFill>
+                <a:latin typeface="맑은 고딕"/>
+                <a:ea typeface="맑은 고딕"/>
+                <a:cs typeface="맑은 고딕"/>
+              </a:rPr>
+              <a:t>정답과 판단 기준</a:t>
+            </a:r>
+          </a:p>
+        </p:txBody>
+      </p:sp>
+      <p:sp>
+        <p:nvSpPr>
+          <p:cNvPr id="3" name="TextBox 2"/>
+          <p:cNvSpPr txBox="1"/>
+          <p:nvPr/>
+        </p:nvSpPr>
+        <p:spPr>
+          <a:xfrm>
+            <a:off x="457200" y="932688"/>
+            <a:ext cx="11277295" cy="420624"/>
+          </a:xfrm>
+          <a:prstGeom prst="rect">
+            <a:avLst/>
+          </a:prstGeom>
+          <a:noFill/>
+        </p:spPr>
+        <p:txBody>
+          <a:bodyPr wrap="square" anchor="ctr"/>
+          <a:lstStyle/>
+          <a:p>
+            <a:pPr algn="l" eaLnBrk="0">
+              <a:lnSpc>
+                <a:spcPct val="110000"/>
+              </a:lnSpc>
+            </a:pPr>
+            <a:r>
+              <a:rPr sz="1600" b="0">
+                <a:solidFill>
+                  <a:srgbClr val="556175"/>
+                </a:solidFill>
+                <a:latin typeface="맑은 고딕"/>
+                <a:ea typeface="맑은 고딕"/>
+                <a:cs typeface="맑은 고딕"/>
+              </a:rPr>
+              <a:t>세 문항은 근거를 호출 기록으로 가리는지, 근거의 상태를 구분하는지, 제출과 실행의 경계를 지키는지 본다.</a:t>
+            </a:r>
+          </a:p>
+        </p:txBody>
+      </p:sp>
+      <p:sp>
+        <p:nvSpPr>
+          <p:cNvPr id="4" name="Rectangle 3"/>
+          <p:cNvSpPr/>
+          <p:nvPr/>
+        </p:nvSpPr>
+        <p:spPr>
+          <a:xfrm>
+            <a:off x="548640" y="1408176"/>
+            <a:ext cx="11094415" cy="18288"/>
+          </a:xfrm>
+          <a:prstGeom prst="rect">
+            <a:avLst/>
+          </a:prstGeom>
+          <a:solidFill>
+            <a:srgbClr val="D3D9E1"/>
+          </a:solidFill>
+          <a:ln>
+            <a:noFill/>
+          </a:ln>
+        </p:spPr>
+        <p:txBody>
+          <a:bodyPr rtlCol="0" anchor="ctr"/>
+          <a:lstStyle/>
+          <a:p>
+            <a:pPr algn="ctr"/>
+          </a:p>
+        </p:txBody>
+      </p:sp>
+      <p:sp>
+        <p:nvSpPr>
+          <p:cNvPr id="5" name="TextBox 4"/>
+          <p:cNvSpPr txBox="1"/>
+          <p:nvPr/>
+        </p:nvSpPr>
+        <p:spPr>
+          <a:xfrm>
+            <a:off x="10911535" y="6473952"/>
+            <a:ext cx="822960" cy="274320"/>
+          </a:xfrm>
+          <a:prstGeom prst="rect">
+            <a:avLst/>
+          </a:prstGeom>
+          <a:noFill/>
+        </p:spPr>
+        <p:txBody>
+          <a:bodyPr wrap="square" anchor="t"/>
+          <a:lstStyle/>
+          <a:p>
+            <a:pPr algn="r" eaLnBrk="0">
+              <a:lnSpc>
+                <a:spcPct val="110000"/>
+              </a:lnSpc>
+            </a:pPr>
+            <a:r>
+              <a:rPr sz="1000" b="0">
+                <a:solidFill>
+                  <a:srgbClr val="556175"/>
+                </a:solidFill>
+                <a:latin typeface="맑은 고딕"/>
+                <a:ea typeface="맑은 고딕"/>
+                <a:cs typeface="맑은 고딕"/>
+              </a:rPr>
+              <a:t>32</a:t>
+            </a:r>
+          </a:p>
+        </p:txBody>
+      </p:sp>
+      <p:sp>
+        <p:nvSpPr>
+          <p:cNvPr id="6" name="Rounded Rectangle 5"/>
+          <p:cNvSpPr/>
+          <p:nvPr/>
+        </p:nvSpPr>
+        <p:spPr>
+          <a:xfrm>
+            <a:off x="548640" y="2418587"/>
+            <a:ext cx="11094415" cy="347472"/>
+          </a:xfrm>
+          <a:prstGeom prst="roundRect">
+            <a:avLst>
+              <a:gd name="adj" fmla="val 12000"/>
+            </a:avLst>
+          </a:prstGeom>
+          <a:solidFill>
+            <a:srgbClr val="13294B"/>
+          </a:solidFill>
+          <a:ln>
+            <a:noFill/>
+          </a:ln>
+        </p:spPr>
+        <p:txBody>
+          <a:bodyPr rtlCol="0" anchor="ctr"/>
+          <a:lstStyle/>
+          <a:p>
+            <a:pPr algn="ctr"/>
+          </a:p>
+        </p:txBody>
+      </p:sp>
+      <p:sp>
+        <p:nvSpPr>
+          <p:cNvPr id="7" name="TextBox 6"/>
+          <p:cNvSpPr txBox="1"/>
+          <p:nvPr/>
+        </p:nvSpPr>
+        <p:spPr>
+          <a:xfrm>
+            <a:off x="685800" y="2418587"/>
+            <a:ext cx="2514600" cy="347472"/>
+          </a:xfrm>
+          <a:prstGeom prst="rect">
+            <a:avLst/>
+          </a:prstGeom>
+          <a:noFill/>
+        </p:spPr>
+        <p:txBody>
+          <a:bodyPr wrap="square" anchor="ctr"/>
+          <a:lstStyle/>
+          <a:p>
+            <a:pPr algn="l" eaLnBrk="0">
+              <a:lnSpc>
+                <a:spcPct val="110000"/>
+              </a:lnSpc>
+            </a:pPr>
+            <a:r>
+              <a:rPr sz="1300" b="1">
+                <a:solidFill>
+                  <a:srgbClr val="FFFFFF"/>
+                </a:solidFill>
+                <a:latin typeface="맑은 고딕"/>
+                <a:ea typeface="맑은 고딕"/>
+                <a:cs typeface="맑은 고딕"/>
+              </a:rPr>
+              <a:t>문항</a:t>
+            </a:r>
+          </a:p>
+        </p:txBody>
+      </p:sp>
+      <p:sp>
+        <p:nvSpPr>
+          <p:cNvPr id="8" name="TextBox 7"/>
+          <p:cNvSpPr txBox="1"/>
+          <p:nvPr/>
+        </p:nvSpPr>
+        <p:spPr>
+          <a:xfrm>
+            <a:off x="3200400" y="2418587"/>
+            <a:ext cx="6248095" cy="347472"/>
+          </a:xfrm>
+          <a:prstGeom prst="rect">
+            <a:avLst/>
+          </a:prstGeom>
+          <a:noFill/>
+        </p:spPr>
+        <p:txBody>
+          <a:bodyPr wrap="square" anchor="ctr"/>
+          <a:lstStyle/>
+          <a:p>
+            <a:pPr algn="l" eaLnBrk="0">
+              <a:lnSpc>
+                <a:spcPct val="110000"/>
+              </a:lnSpc>
+            </a:pPr>
+            <a:r>
+              <a:rPr sz="1300" b="1">
+                <a:solidFill>
+                  <a:srgbClr val="FFFFFF"/>
+                </a:solidFill>
+                <a:latin typeface="맑은 고딕"/>
+                <a:ea typeface="맑은 고딕"/>
+                <a:cs typeface="맑은 고딕"/>
+              </a:rPr>
+              <a:t>판단 기준</a:t>
+            </a:r>
+          </a:p>
+        </p:txBody>
+      </p:sp>
+      <p:sp>
+        <p:nvSpPr>
+          <p:cNvPr id="9" name="TextBox 8"/>
+          <p:cNvSpPr txBox="1"/>
+          <p:nvPr/>
+        </p:nvSpPr>
+        <p:spPr>
+          <a:xfrm>
+            <a:off x="9448495" y="2418587"/>
+            <a:ext cx="2194560" cy="347472"/>
+          </a:xfrm>
+          <a:prstGeom prst="rect">
+            <a:avLst/>
+          </a:prstGeom>
+          <a:noFill/>
+        </p:spPr>
+        <p:txBody>
+          <a:bodyPr wrap="square" anchor="ctr"/>
+          <a:lstStyle/>
+          <a:p>
+            <a:pPr algn="l" eaLnBrk="0">
+              <a:lnSpc>
+                <a:spcPct val="110000"/>
+              </a:lnSpc>
+            </a:pPr>
+            <a:r>
+              <a:rPr sz="1300" b="1">
+                <a:solidFill>
+                  <a:srgbClr val="FFFFFF"/>
+                </a:solidFill>
+                <a:latin typeface="맑은 고딕"/>
+                <a:ea typeface="맑은 고딕"/>
+                <a:cs typeface="맑은 고딕"/>
+              </a:rPr>
+              <a:t>정답</a:t>
+            </a:r>
+          </a:p>
+        </p:txBody>
+      </p:sp>
+      <p:sp>
+        <p:nvSpPr>
+          <p:cNvPr id="10" name="Rounded Rectangle 9"/>
+          <p:cNvSpPr/>
+          <p:nvPr/>
+        </p:nvSpPr>
+        <p:spPr>
+          <a:xfrm>
+            <a:off x="548640" y="2852927"/>
+            <a:ext cx="11094415" cy="850392"/>
+          </a:xfrm>
+          <a:prstGeom prst="roundRect">
+            <a:avLst>
+              <a:gd name="adj" fmla="val 8000"/>
+            </a:avLst>
+          </a:prstGeom>
+          <a:solidFill>
+            <a:srgbClr val="F3F6F9"/>
+          </a:solidFill>
+          <a:ln>
+            <a:noFill/>
+          </a:ln>
+        </p:spPr>
+        <p:txBody>
+          <a:bodyPr rtlCol="0" anchor="ctr"/>
+          <a:lstStyle/>
+          <a:p>
+            <a:pPr algn="ctr"/>
+          </a:p>
+        </p:txBody>
+      </p:sp>
+      <p:sp>
+        <p:nvSpPr>
+          <p:cNvPr id="11" name="TextBox 10"/>
+          <p:cNvSpPr txBox="1"/>
+          <p:nvPr/>
+        </p:nvSpPr>
+        <p:spPr>
+          <a:xfrm>
+            <a:off x="685800" y="2820923"/>
+            <a:ext cx="2514600" cy="914400"/>
+          </a:xfrm>
+          <a:prstGeom prst="rect">
+            <a:avLst/>
+          </a:prstGeom>
+          <a:noFill/>
+        </p:spPr>
+        <p:txBody>
+          <a:bodyPr wrap="square" anchor="ctr"/>
+          <a:lstStyle/>
+          <a:p>
+            <a:pPr algn="l" eaLnBrk="0">
+              <a:lnSpc>
+                <a:spcPct val="110000"/>
+              </a:lnSpc>
+            </a:pPr>
+            <a:r>
+              <a:rPr sz="1600" b="1">
+                <a:solidFill>
+                  <a:srgbClr val="13294B"/>
+                </a:solidFill>
+                <a:latin typeface="맑은 고딕"/>
+                <a:ea typeface="맑은 고딕"/>
+                <a:cs typeface="맑은 고딕"/>
+              </a:rPr>
+              <a:t>Quiz 1</a:t>
+            </a:r>
+          </a:p>
+        </p:txBody>
+      </p:sp>
+      <p:sp>
+        <p:nvSpPr>
+          <p:cNvPr id="12" name="TextBox 11"/>
+          <p:cNvSpPr txBox="1"/>
+          <p:nvPr/>
+        </p:nvSpPr>
+        <p:spPr>
+          <a:xfrm>
+            <a:off x="3200400" y="2820923"/>
+            <a:ext cx="6156655" cy="914400"/>
+          </a:xfrm>
+          <a:prstGeom prst="rect">
+            <a:avLst/>
+          </a:prstGeom>
+          <a:noFill/>
+        </p:spPr>
+        <p:txBody>
+          <a:bodyPr wrap="square" anchor="ctr"/>
+          <a:lstStyle/>
+          <a:p>
+            <a:pPr algn="l" eaLnBrk="0">
+              <a:lnSpc>
+                <a:spcPct val="110000"/>
+              </a:lnSpc>
+            </a:pPr>
+            <a:r>
+              <a:rPr sz="1400" b="0">
+                <a:solidFill>
+                  <a:srgbClr val="1F2A3A"/>
+                </a:solidFill>
+                <a:latin typeface="맑은 고딕"/>
+                <a:ea typeface="맑은 고딕"/>
+                <a:cs typeface="맑은 고딕"/>
+              </a:rPr>
+              <a:t>진행 설명과 적힌 값은 확인의 증거가 아니다. 그 값을 돌려준 호출의 입력 · 출력을 찾아야 근거가 된다.</a:t>
+            </a:r>
+          </a:p>
+        </p:txBody>
+      </p:sp>
+      <p:sp>
+        <p:nvSpPr>
+          <p:cNvPr id="13" name="TextBox 12"/>
+          <p:cNvSpPr txBox="1"/>
+          <p:nvPr/>
+        </p:nvSpPr>
+        <p:spPr>
+          <a:xfrm>
+            <a:off x="9448495" y="2820923"/>
+            <a:ext cx="2103120" cy="914400"/>
+          </a:xfrm>
+          <a:prstGeom prst="rect">
+            <a:avLst/>
+          </a:prstGeom>
+          <a:noFill/>
+        </p:spPr>
+        <p:txBody>
+          <a:bodyPr wrap="square" anchor="ctr"/>
+          <a:lstStyle/>
+          <a:p>
+            <a:pPr algn="l" eaLnBrk="0">
+              <a:lnSpc>
+                <a:spcPct val="110000"/>
+              </a:lnSpc>
+            </a:pPr>
+            <a:r>
+              <a:rPr sz="1250" b="1">
+                <a:solidFill>
+                  <a:srgbClr val="556175"/>
+                </a:solidFill>
+                <a:latin typeface="맑은 고딕"/>
+                <a:ea typeface="맑은 고딕"/>
+                <a:cs typeface="맑은 고딕"/>
+              </a:rPr>
+              <a:t>2번</a:t>
+            </a:r>
+          </a:p>
+        </p:txBody>
+      </p:sp>
+      <p:sp>
+        <p:nvSpPr>
+          <p:cNvPr id="14" name="Rounded Rectangle 13"/>
+          <p:cNvSpPr/>
+          <p:nvPr/>
+        </p:nvSpPr>
+        <p:spPr>
+          <a:xfrm>
+            <a:off x="548640" y="3767327"/>
+            <a:ext cx="11094415" cy="850392"/>
+          </a:xfrm>
+          <a:prstGeom prst="roundRect">
+            <a:avLst>
+              <a:gd name="adj" fmla="val 8000"/>
+            </a:avLst>
+          </a:prstGeom>
+          <a:solidFill>
+            <a:srgbClr val="F3F6F9"/>
+          </a:solidFill>
+          <a:ln>
+            <a:noFill/>
+          </a:ln>
+        </p:spPr>
+        <p:txBody>
+          <a:bodyPr rtlCol="0" anchor="ctr"/>
+          <a:lstStyle/>
+          <a:p>
+            <a:pPr algn="ctr"/>
+          </a:p>
+        </p:txBody>
+      </p:sp>
+      <p:sp>
+        <p:nvSpPr>
+          <p:cNvPr id="15" name="TextBox 14"/>
+          <p:cNvSpPr txBox="1"/>
+          <p:nvPr/>
+        </p:nvSpPr>
+        <p:spPr>
+          <a:xfrm>
+            <a:off x="685800" y="3735323"/>
+            <a:ext cx="2514600" cy="914400"/>
+          </a:xfrm>
+          <a:prstGeom prst="rect">
+            <a:avLst/>
+          </a:prstGeom>
+          <a:noFill/>
+        </p:spPr>
+        <p:txBody>
+          <a:bodyPr wrap="square" anchor="ctr"/>
+          <a:lstStyle/>
+          <a:p>
+            <a:pPr algn="l" eaLnBrk="0">
+              <a:lnSpc>
+                <a:spcPct val="110000"/>
+              </a:lnSpc>
+            </a:pPr>
+            <a:r>
+              <a:rPr sz="1600" b="1">
+                <a:solidFill>
+                  <a:srgbClr val="13294B"/>
+                </a:solidFill>
+                <a:latin typeface="맑은 고딕"/>
+                <a:ea typeface="맑은 고딕"/>
+                <a:cs typeface="맑은 고딕"/>
+              </a:rPr>
+              <a:t>Quiz 2</a:t>
+            </a:r>
+          </a:p>
+        </p:txBody>
+      </p:sp>
+      <p:sp>
+        <p:nvSpPr>
+          <p:cNvPr id="16" name="TextBox 15"/>
+          <p:cNvSpPr txBox="1"/>
+          <p:nvPr/>
+        </p:nvSpPr>
+        <p:spPr>
+          <a:xfrm>
+            <a:off x="3200400" y="3735323"/>
+            <a:ext cx="6156655" cy="914400"/>
+          </a:xfrm>
+          <a:prstGeom prst="rect">
+            <a:avLst/>
+          </a:prstGeom>
+          <a:noFill/>
+        </p:spPr>
+        <p:txBody>
+          <a:bodyPr wrap="square" anchor="ctr"/>
+          <a:lstStyle/>
+          <a:p>
+            <a:pPr algn="l" eaLnBrk="0">
+              <a:lnSpc>
+                <a:spcPct val="110000"/>
+              </a:lnSpc>
+            </a:pPr>
+            <a:r>
+              <a:rPr sz="1400" b="0">
+                <a:solidFill>
+                  <a:srgbClr val="1F2A3A"/>
+                </a:solidFill>
+                <a:latin typeface="맑은 고딕"/>
+                <a:ea typeface="맑은 고딕"/>
+                <a:cs typeface="맑은 고딕"/>
+              </a:rPr>
+              <a:t>값을 읽었는데 어느 후보의 기준에도 맞지 않으면 지지 근거 없음이다. 등록되지 않은 원인일 수 있어 사람이 살핀다.</a:t>
+            </a:r>
+          </a:p>
+        </p:txBody>
+      </p:sp>
+      <p:sp>
+        <p:nvSpPr>
+          <p:cNvPr id="17" name="TextBox 16"/>
+          <p:cNvSpPr txBox="1"/>
+          <p:nvPr/>
+        </p:nvSpPr>
+        <p:spPr>
+          <a:xfrm>
+            <a:off x="9448495" y="3735323"/>
+            <a:ext cx="2103120" cy="914400"/>
+          </a:xfrm>
+          <a:prstGeom prst="rect">
+            <a:avLst/>
+          </a:prstGeom>
+          <a:noFill/>
+        </p:spPr>
+        <p:txBody>
+          <a:bodyPr wrap="square" anchor="ctr"/>
+          <a:lstStyle/>
+          <a:p>
+            <a:pPr algn="l" eaLnBrk="0">
+              <a:lnSpc>
+                <a:spcPct val="110000"/>
+              </a:lnSpc>
+            </a:pPr>
+            <a:r>
+              <a:rPr sz="1250" b="1">
+                <a:solidFill>
+                  <a:srgbClr val="556175"/>
+                </a:solidFill>
+                <a:latin typeface="맑은 고딕"/>
+                <a:ea typeface="맑은 고딕"/>
+                <a:cs typeface="맑은 고딕"/>
+              </a:rPr>
+              <a:t>3번</a:t>
+            </a:r>
+          </a:p>
+        </p:txBody>
+      </p:sp>
+      <p:sp>
+        <p:nvSpPr>
+          <p:cNvPr id="18" name="Rounded Rectangle 17"/>
+          <p:cNvSpPr/>
+          <p:nvPr/>
+        </p:nvSpPr>
+        <p:spPr>
+          <a:xfrm>
+            <a:off x="548640" y="4681727"/>
+            <a:ext cx="11094415" cy="850392"/>
+          </a:xfrm>
+          <a:prstGeom prst="roundRect">
+            <a:avLst>
+              <a:gd name="adj" fmla="val 8000"/>
+            </a:avLst>
+          </a:prstGeom>
+          <a:solidFill>
+            <a:srgbClr val="F3F6F9"/>
+          </a:solidFill>
+          <a:ln>
+            <a:noFill/>
+          </a:ln>
+        </p:spPr>
+        <p:txBody>
+          <a:bodyPr rtlCol="0" anchor="ctr"/>
+          <a:lstStyle/>
+          <a:p>
+            <a:pPr algn="ctr"/>
+          </a:p>
+        </p:txBody>
+      </p:sp>
+      <p:sp>
+        <p:nvSpPr>
+          <p:cNvPr id="19" name="TextBox 18"/>
+          <p:cNvSpPr txBox="1"/>
+          <p:nvPr/>
+        </p:nvSpPr>
+        <p:spPr>
+          <a:xfrm>
+            <a:off x="685800" y="4649723"/>
+            <a:ext cx="2514600" cy="914400"/>
+          </a:xfrm>
+          <a:prstGeom prst="rect">
+            <a:avLst/>
+          </a:prstGeom>
+          <a:noFill/>
+        </p:spPr>
+        <p:txBody>
+          <a:bodyPr wrap="square" anchor="ctr"/>
+          <a:lstStyle/>
+          <a:p>
+            <a:pPr algn="l" eaLnBrk="0">
+              <a:lnSpc>
+                <a:spcPct val="110000"/>
+              </a:lnSpc>
+            </a:pPr>
+            <a:r>
+              <a:rPr sz="1600" b="1">
+                <a:solidFill>
+                  <a:srgbClr val="13294B"/>
+                </a:solidFill>
+                <a:latin typeface="맑은 고딕"/>
+                <a:ea typeface="맑은 고딕"/>
+                <a:cs typeface="맑은 고딕"/>
+              </a:rPr>
+              <a:t>Quiz 3</a:t>
+            </a:r>
+          </a:p>
+        </p:txBody>
+      </p:sp>
+      <p:sp>
+        <p:nvSpPr>
+          <p:cNvPr id="20" name="TextBox 19"/>
+          <p:cNvSpPr txBox="1"/>
+          <p:nvPr/>
+        </p:nvSpPr>
+        <p:spPr>
+          <a:xfrm>
+            <a:off x="3200400" y="4649723"/>
+            <a:ext cx="6156655" cy="914400"/>
+          </a:xfrm>
+          <a:prstGeom prst="rect">
+            <a:avLst/>
+          </a:prstGeom>
+          <a:noFill/>
+        </p:spPr>
+        <p:txBody>
+          <a:bodyPr wrap="square" anchor="ctr"/>
+          <a:lstStyle/>
+          <a:p>
+            <a:pPr algn="l" eaLnBrk="0">
+              <a:lnSpc>
+                <a:spcPct val="110000"/>
+              </a:lnSpc>
+            </a:pPr>
+            <a:r>
+              <a:rPr sz="1400" b="0">
+                <a:solidFill>
+                  <a:srgbClr val="1F2A3A"/>
+                </a:solidFill>
+                <a:latin typeface="맑은 고딕"/>
+                <a:ea typeface="맑은 고딕"/>
+                <a:cs typeface="맑은 고딕"/>
+              </a:rPr>
+              <a:t>에이전트의 일은 추천안 제출까지다. 명령 · 작업지시는 사람이 승인한 뒤 시스템이 이어 간다.</a:t>
+            </a:r>
+          </a:p>
+        </p:txBody>
+      </p:sp>
+      <p:sp>
+        <p:nvSpPr>
+          <p:cNvPr id="21" name="TextBox 20"/>
+          <p:cNvSpPr txBox="1"/>
+          <p:nvPr/>
+        </p:nvSpPr>
+        <p:spPr>
+          <a:xfrm>
+            <a:off x="9448495" y="4649723"/>
+            <a:ext cx="2103120" cy="914400"/>
+          </a:xfrm>
+          <a:prstGeom prst="rect">
+            <a:avLst/>
+          </a:prstGeom>
+          <a:noFill/>
+        </p:spPr>
+        <p:txBody>
+          <a:bodyPr wrap="square" anchor="ctr"/>
+          <a:lstStyle/>
+          <a:p>
+            <a:pPr algn="l" eaLnBrk="0">
+              <a:lnSpc>
+                <a:spcPct val="110000"/>
+              </a:lnSpc>
+            </a:pPr>
+            <a:r>
+              <a:rPr sz="1250" b="1">
+                <a:solidFill>
+                  <a:srgbClr val="556175"/>
+                </a:solidFill>
+                <a:latin typeface="맑은 고딕"/>
+                <a:ea typeface="맑은 고딕"/>
+                <a:cs typeface="맑은 고딕"/>
+              </a:rPr>
+              <a:t>1번</a:t>
+            </a:r>
+          </a:p>
+        </p:txBody>
+      </p:sp>
+    </p:spTree>
+  </p:cSld>
+  <p:clrMapOvr>
+    <a:masterClrMapping/>
+  </p:clrMapOvr>
+</p:sld>
+</file>
+
 <file path=ppt/slides/slide4.xml><?xml version="1.0" encoding="utf-8"?>
 <p:sld xmlns:a="http://schemas.openxmlformats.org/drawingml/2006/main" xmlns:p="http://schemas.openxmlformats.org/presentationml/2006/main" xmlns:r="http://schemas.openxmlformats.org/officeDocument/2006/relationships">
   <p:cSld>
@@ -25766,7 +31922,7 @@
                 <a:ea typeface="맑은 고딕"/>
                 <a:cs typeface="맑은 고딕"/>
               </a:rPr>
-              <a:t>점검 요청 초안(실습 2)</a:t>
+              <a:t>점검 요청 초안</a:t>
             </a:r>
           </a:p>
         </p:txBody>
@@ -25950,7 +32106,7 @@
                 <a:ea typeface="맑은 고딕"/>
                 <a:cs typeface="맑은 고딕"/>
               </a:rPr>
-              <a:t>다음 협의 안건(실습 4)</a:t>
+              <a:t>다음 협의 안건</a:t>
             </a:r>
           </a:p>
         </p:txBody>

--- a/산출물/실전반/이론_오프라인/04회차/실전반_오프라인_04회차.pptx
+++ b/산출물/실전반/이론_오프라인/04회차/실전반_오프라인_04회차.pptx
@@ -548,11 +548,6 @@
           </a:p>
           <a:p>
             <a:r>
-              <a:t>· 이론은 온라인 과정과 같은 교재의 장에서 오늘 실습에 쓰는 것만</a:t>
-            </a:r>
-          </a:p>
-          <a:p>
-            <a:r>
               <a:t>[다음] 학습목표</a:t>
             </a:r>
           </a:p>
@@ -633,7 +628,7 @@
           </a:p>
           <a:p>
             <a:r>
-              <a:t>· 실습의 원인 · 점검 순서 기능이 이 고리를 만든다</a:t>
+              <a:t>· 도구 호출 두 건 → 다섯 단계 → 늘 같은 순서는 워크플로, 결과를 보고 다음을 고르는 자리만 에이전트</a:t>
             </a:r>
           </a:p>
           <a:p>
@@ -1013,7 +1008,7 @@
           </a:p>
           <a:p>
             <a:r>
-              <a:t>· 실습에서 그래프와 문서의 집계 구간이 다르거나 원문 절이 없는 경우를 가른다</a:t>
+              <a:t>· 네 정보원 → 기준과 지금 값 → 값 하나를 쓰기 전의 다섯 확인 → 근거의 세 상태</a:t>
             </a:r>
           </a:p>
           <a:p>
@@ -1483,7 +1478,7 @@
           </a:p>
           <a:p>
             <a:r>
-              <a:t>· 20초 생각 시간. 값은 수업용 사례(이어지는 원인 · 점검 순서 실습과 같음)</a:t>
+              <a:t>· 20초 생각 시간. 값은 수업용 사례</a:t>
             </a:r>
           </a:p>
           <a:p>
@@ -1683,7 +1678,7 @@
           </a:p>
           <a:p>
             <a:r>
-              <a:t>· 실습에서 누락과 복수 원인 사례로 점검 요청 초안을 검증한다</a:t>
+              <a:t>· 멈춤 조건 → 구조화 출력과 보류 → 기록과 대조 → 단정한 초안과 근거 있는 초안</a:t>
             </a:r>
           </a:p>
           <a:p>
@@ -3113,7 +3108,7 @@
           </a:p>
           <a:p>
             <a:r>
-              <a:t>· 실제 포털 에이전트의 결과는 추천안. 점검 요청 초안은 실습 결과물</a:t>
+              <a:t>· 실제 포털 에이전트의 결과는 추천안. 점검 요청 초안은 그와 다른 결과물(담당자가 점검 여부를 정한다)</a:t>
             </a:r>
           </a:p>
           <a:p>
@@ -3218,7 +3213,7 @@
           </a:p>
           <a:p>
             <a:r>
-              <a:t>· 이름 · 자료만 바꾼 반복이 아니다. 이어지는 실습은 점검 요청</a:t>
+              <a:t>· 이름 · 자료만 바꾼 반복이 아니다 — 활용마다 입력과 결과 판정 기준이 다르다</a:t>
             </a:r>
           </a:p>
           <a:p>
@@ -3493,7 +3488,7 @@
           <a:lstStyle/>
           <a:p>
             <a:r>
-              <a:t>[짚을 곳] 표 네 줄, 위 둘(포털) · 아래 둘(실습), 오른쪽 넘지 않는 선</a:t>
+              <a:t>[짚을 곳] 표 네 줄, 위 둘(포털에서 본 결과) · 아래 둘(점검 요청 초안과 같은 꼴의 다른 결과물), 오른쪽 넘지 않는 선</a:t>
             </a:r>
           </a:p>
           <a:p>
@@ -8559,7 +8554,7 @@
       </p:sp>
       <p:pic>
         <p:nvPicPr>
-          <p:cNvPr id="6" name="삽화:실행고리.svg" descr="illust_7722426408142882587_1793113376.png"/>
+          <p:cNvPr id="6" name="삽화:실행고리.svg" descr="illust_5157883313809032889_1793113376.png"/>
           <p:cNvPicPr>
             <a:picLocks noChangeAspect="1"/>
           </p:cNvPicPr>
@@ -10358,7 +10353,7 @@
       </p:sp>
       <p:pic>
         <p:nvPicPr>
-          <p:cNvPr id="6" name="삽화:정보원.svg" descr="illust_6426216068488657882_1793113376.png"/>
+          <p:cNvPr id="6" name="삽화:정보원.svg" descr="illust_6229528638216937347_1793113376.png"/>
           <p:cNvPicPr>
             <a:picLocks noChangeAspect="1"/>
           </p:cNvPicPr>
